--- a/UC_RAG_Chatbot_Presentation.pptx
+++ b/UC_RAG_Chatbot_Presentation.pptx
@@ -5,14 +5,18 @@
     <p:sldMasterId id="2147483648" r:id="rId1"/>
   </p:sldMasterIdLst>
   <p:sldIdLst>
-    <p:sldId id="256" r:id="rId7"/>
-    <p:sldId id="257" r:id="rId8"/>
-    <p:sldId id="258" r:id="rId9"/>
-    <p:sldId id="259" r:id="rId10"/>
-    <p:sldId id="260" r:id="rId11"/>
-    <p:sldId id="261" r:id="rId12"/>
+    <p:sldId id="256" r:id="rId2"/>
+    <p:sldId id="257" r:id="rId3"/>
+    <p:sldId id="258" r:id="rId4"/>
+    <p:sldId id="259" r:id="rId5"/>
+    <p:sldId id="260" r:id="rId6"/>
+    <p:sldId id="261" r:id="rId7"/>
+    <p:sldId id="262" r:id="rId8"/>
+    <p:sldId id="263" r:id="rId9"/>
+    <p:sldId id="264" r:id="rId10"/>
+    <p:sldId id="265" r:id="rId11"/>
   </p:sldIdLst>
-  <p:sldSz cx="12191695" cy="6858000" type="screen4x3"/>
+  <p:sldSz cx="12192000" cy="6858000"/>
   <p:notesSz cx="6858000" cy="9144000"/>
   <p:defaultTextStyle>
     <a:defPPr>
@@ -109,6 +113,22 @@
       </a:defRPr>
     </a:lvl9pPr>
   </p:defaultTextStyle>
+  <p:extLst>
+    <p:ext uri="{EFAFB233-063F-42B5-8137-9DF3F51BA10A}">
+      <p15:sldGuideLst xmlns:p15="http://schemas.microsoft.com/office/powerpoint/2012/main">
+        <p15:guide id="1" orient="horz" pos="2160">
+          <p15:clr>
+            <a:srgbClr val="A4A3A4"/>
+          </p15:clr>
+        </p15:guide>
+        <p15:guide id="2" pos="2880">
+          <p15:clr>
+            <a:srgbClr val="A4A3A4"/>
+          </p15:clr>
+        </p15:guide>
+      </p15:sldGuideLst>
+    </p:ext>
+  </p:extLst>
 </p:presentation>
 </file>
 
@@ -150,10 +170,9 @@
           <a:lstStyle/>
           <a:p>
             <a:r>
-              <a:rPr lang="en-US" smtClean="0"/>
+              <a:rPr lang="en-US"/>
               <a:t>Click to edit Master title style</a:t>
             </a:r>
-            <a:endParaRPr lang="en-US"/>
           </a:p>
         </p:txBody>
       </p:sp>
@@ -269,10 +288,9 @@
           </a:lstStyle>
           <a:p>
             <a:r>
-              <a:rPr lang="en-US" smtClean="0"/>
+              <a:rPr lang="en-US"/>
               <a:t>Click to edit Master subtitle style</a:t>
             </a:r>
-            <a:endParaRPr lang="en-US"/>
           </a:p>
         </p:txBody>
       </p:sp>
@@ -293,7 +311,7 @@
           <a:p>
             <a:fld id="{5BCAD085-E8A6-8845-BD4E-CB4CCA059FC4}" type="datetimeFigureOut">
               <a:rPr lang="en-US" smtClean="0"/>
-              <a:t>1/27/13</a:t>
+              <a:t>7/25/26</a:t>
             </a:fld>
             <a:endParaRPr lang="en-US"/>
           </a:p>
@@ -387,10 +405,9 @@
           <a:lstStyle/>
           <a:p>
             <a:r>
-              <a:rPr lang="en-US" smtClean="0"/>
+              <a:rPr lang="en-US"/>
               <a:t>Click to edit Master title style</a:t>
             </a:r>
-            <a:endParaRPr lang="en-US"/>
           </a:p>
         </p:txBody>
       </p:sp>
@@ -411,38 +428,37 @@
           <a:p>
             <a:pPr lvl="0"/>
             <a:r>
-              <a:rPr lang="en-US" smtClean="0"/>
+              <a:rPr lang="en-US"/>
               <a:t>Click to edit Master text styles</a:t>
             </a:r>
           </a:p>
           <a:p>
             <a:pPr lvl="1"/>
             <a:r>
-              <a:rPr lang="en-US" smtClean="0"/>
+              <a:rPr lang="en-US"/>
               <a:t>Second level</a:t>
             </a:r>
           </a:p>
           <a:p>
             <a:pPr lvl="2"/>
             <a:r>
-              <a:rPr lang="en-US" smtClean="0"/>
+              <a:rPr lang="en-US"/>
               <a:t>Third level</a:t>
             </a:r>
           </a:p>
           <a:p>
             <a:pPr lvl="3"/>
             <a:r>
-              <a:rPr lang="en-US" smtClean="0"/>
+              <a:rPr lang="en-US"/>
               <a:t>Fourth level</a:t>
             </a:r>
           </a:p>
           <a:p>
             <a:pPr lvl="4"/>
             <a:r>
-              <a:rPr lang="en-US" smtClean="0"/>
+              <a:rPr lang="en-US"/>
               <a:t>Fifth level</a:t>
             </a:r>
-            <a:endParaRPr lang="en-US"/>
           </a:p>
         </p:txBody>
       </p:sp>
@@ -463,7 +479,7 @@
           <a:p>
             <a:fld id="{5BCAD085-E8A6-8845-BD4E-CB4CCA059FC4}" type="datetimeFigureOut">
               <a:rPr lang="en-US" smtClean="0"/>
-              <a:t>1/27/13</a:t>
+              <a:t>7/25/26</a:t>
             </a:fld>
             <a:endParaRPr lang="en-US"/>
           </a:p>
@@ -562,10 +578,9 @@
           <a:lstStyle/>
           <a:p>
             <a:r>
-              <a:rPr lang="en-US" smtClean="0"/>
+              <a:rPr lang="en-US"/>
               <a:t>Click to edit Master title style</a:t>
             </a:r>
-            <a:endParaRPr lang="en-US"/>
           </a:p>
         </p:txBody>
       </p:sp>
@@ -591,38 +606,37 @@
           <a:p>
             <a:pPr lvl="0"/>
             <a:r>
-              <a:rPr lang="en-US" smtClean="0"/>
+              <a:rPr lang="en-US"/>
               <a:t>Click to edit Master text styles</a:t>
             </a:r>
           </a:p>
           <a:p>
             <a:pPr lvl="1"/>
             <a:r>
-              <a:rPr lang="en-US" smtClean="0"/>
+              <a:rPr lang="en-US"/>
               <a:t>Second level</a:t>
             </a:r>
           </a:p>
           <a:p>
             <a:pPr lvl="2"/>
             <a:r>
-              <a:rPr lang="en-US" smtClean="0"/>
+              <a:rPr lang="en-US"/>
               <a:t>Third level</a:t>
             </a:r>
           </a:p>
           <a:p>
             <a:pPr lvl="3"/>
             <a:r>
-              <a:rPr lang="en-US" smtClean="0"/>
+              <a:rPr lang="en-US"/>
               <a:t>Fourth level</a:t>
             </a:r>
           </a:p>
           <a:p>
             <a:pPr lvl="4"/>
             <a:r>
-              <a:rPr lang="en-US" smtClean="0"/>
+              <a:rPr lang="en-US"/>
               <a:t>Fifth level</a:t>
             </a:r>
-            <a:endParaRPr lang="en-US"/>
           </a:p>
         </p:txBody>
       </p:sp>
@@ -643,7 +657,7 @@
           <a:p>
             <a:fld id="{5BCAD085-E8A6-8845-BD4E-CB4CCA059FC4}" type="datetimeFigureOut">
               <a:rPr lang="en-US" smtClean="0"/>
-              <a:t>1/27/13</a:t>
+              <a:t>7/25/26</a:t>
             </a:fld>
             <a:endParaRPr lang="en-US"/>
           </a:p>
@@ -737,10 +751,9 @@
           <a:lstStyle/>
           <a:p>
             <a:r>
-              <a:rPr lang="en-US" smtClean="0"/>
+              <a:rPr lang="en-US"/>
               <a:t>Click to edit Master title style</a:t>
             </a:r>
-            <a:endParaRPr lang="en-US"/>
           </a:p>
         </p:txBody>
       </p:sp>
@@ -761,38 +774,37 @@
           <a:p>
             <a:pPr lvl="0"/>
             <a:r>
-              <a:rPr lang="en-US" smtClean="0"/>
+              <a:rPr lang="en-US"/>
               <a:t>Click to edit Master text styles</a:t>
             </a:r>
           </a:p>
           <a:p>
             <a:pPr lvl="1"/>
             <a:r>
-              <a:rPr lang="en-US" smtClean="0"/>
+              <a:rPr lang="en-US"/>
               <a:t>Second level</a:t>
             </a:r>
           </a:p>
           <a:p>
             <a:pPr lvl="2"/>
             <a:r>
-              <a:rPr lang="en-US" smtClean="0"/>
+              <a:rPr lang="en-US"/>
               <a:t>Third level</a:t>
             </a:r>
           </a:p>
           <a:p>
             <a:pPr lvl="3"/>
             <a:r>
-              <a:rPr lang="en-US" smtClean="0"/>
+              <a:rPr lang="en-US"/>
               <a:t>Fourth level</a:t>
             </a:r>
           </a:p>
           <a:p>
             <a:pPr lvl="4"/>
             <a:r>
-              <a:rPr lang="en-US" smtClean="0"/>
+              <a:rPr lang="en-US"/>
               <a:t>Fifth level</a:t>
             </a:r>
-            <a:endParaRPr lang="en-US"/>
           </a:p>
         </p:txBody>
       </p:sp>
@@ -813,7 +825,7 @@
           <a:p>
             <a:fld id="{5BCAD085-E8A6-8845-BD4E-CB4CCA059FC4}" type="datetimeFigureOut">
               <a:rPr lang="en-US" smtClean="0"/>
-              <a:t>1/27/13</a:t>
+              <a:t>7/25/26</a:t>
             </a:fld>
             <a:endParaRPr lang="en-US"/>
           </a:p>
@@ -916,10 +928,9 @@
           </a:lstStyle>
           <a:p>
             <a:r>
-              <a:rPr lang="en-US" smtClean="0"/>
+              <a:rPr lang="en-US"/>
               <a:t>Click to edit Master title style</a:t>
             </a:r>
-            <a:endParaRPr lang="en-US"/>
           </a:p>
         </p:txBody>
       </p:sp>
@@ -1036,7 +1047,7 @@
           <a:p>
             <a:pPr lvl="0"/>
             <a:r>
-              <a:rPr lang="en-US" smtClean="0"/>
+              <a:rPr lang="en-US"/>
               <a:t>Click to edit Master text styles</a:t>
             </a:r>
           </a:p>
@@ -1059,7 +1070,7 @@
           <a:p>
             <a:fld id="{5BCAD085-E8A6-8845-BD4E-CB4CCA059FC4}" type="datetimeFigureOut">
               <a:rPr lang="en-US" smtClean="0"/>
-              <a:t>1/27/13</a:t>
+              <a:t>7/25/26</a:t>
             </a:fld>
             <a:endParaRPr lang="en-US"/>
           </a:p>
@@ -1153,10 +1164,9 @@
           <a:lstStyle/>
           <a:p>
             <a:r>
-              <a:rPr lang="en-US" smtClean="0"/>
+              <a:rPr lang="en-US"/>
               <a:t>Click to edit Master title style</a:t>
             </a:r>
-            <a:endParaRPr lang="en-US"/>
           </a:p>
         </p:txBody>
       </p:sp>
@@ -1210,38 +1220,37 @@
           <a:p>
             <a:pPr lvl="0"/>
             <a:r>
-              <a:rPr lang="en-US" smtClean="0"/>
+              <a:rPr lang="en-US"/>
               <a:t>Click to edit Master text styles</a:t>
             </a:r>
           </a:p>
           <a:p>
             <a:pPr lvl="1"/>
             <a:r>
-              <a:rPr lang="en-US" smtClean="0"/>
+              <a:rPr lang="en-US"/>
               <a:t>Second level</a:t>
             </a:r>
           </a:p>
           <a:p>
             <a:pPr lvl="2"/>
             <a:r>
-              <a:rPr lang="en-US" smtClean="0"/>
+              <a:rPr lang="en-US"/>
               <a:t>Third level</a:t>
             </a:r>
           </a:p>
           <a:p>
             <a:pPr lvl="3"/>
             <a:r>
-              <a:rPr lang="en-US" smtClean="0"/>
+              <a:rPr lang="en-US"/>
               <a:t>Fourth level</a:t>
             </a:r>
           </a:p>
           <a:p>
             <a:pPr lvl="4"/>
             <a:r>
-              <a:rPr lang="en-US" smtClean="0"/>
+              <a:rPr lang="en-US"/>
               <a:t>Fifth level</a:t>
             </a:r>
-            <a:endParaRPr lang="en-US"/>
           </a:p>
         </p:txBody>
       </p:sp>
@@ -1295,38 +1304,37 @@
           <a:p>
             <a:pPr lvl="0"/>
             <a:r>
-              <a:rPr lang="en-US" smtClean="0"/>
+              <a:rPr lang="en-US"/>
               <a:t>Click to edit Master text styles</a:t>
             </a:r>
           </a:p>
           <a:p>
             <a:pPr lvl="1"/>
             <a:r>
-              <a:rPr lang="en-US" smtClean="0"/>
+              <a:rPr lang="en-US"/>
               <a:t>Second level</a:t>
             </a:r>
           </a:p>
           <a:p>
             <a:pPr lvl="2"/>
             <a:r>
-              <a:rPr lang="en-US" smtClean="0"/>
+              <a:rPr lang="en-US"/>
               <a:t>Third level</a:t>
             </a:r>
           </a:p>
           <a:p>
             <a:pPr lvl="3"/>
             <a:r>
-              <a:rPr lang="en-US" smtClean="0"/>
+              <a:rPr lang="en-US"/>
               <a:t>Fourth level</a:t>
             </a:r>
           </a:p>
           <a:p>
             <a:pPr lvl="4"/>
             <a:r>
-              <a:rPr lang="en-US" smtClean="0"/>
+              <a:rPr lang="en-US"/>
               <a:t>Fifth level</a:t>
             </a:r>
-            <a:endParaRPr lang="en-US"/>
           </a:p>
         </p:txBody>
       </p:sp>
@@ -1347,7 +1355,7 @@
           <a:p>
             <a:fld id="{5BCAD085-E8A6-8845-BD4E-CB4CCA059FC4}" type="datetimeFigureOut">
               <a:rPr lang="en-US" smtClean="0"/>
-              <a:t>1/27/13</a:t>
+              <a:t>7/25/26</a:t>
             </a:fld>
             <a:endParaRPr lang="en-US"/>
           </a:p>
@@ -1445,10 +1453,9 @@
           </a:lstStyle>
           <a:p>
             <a:r>
-              <a:rPr lang="en-US" smtClean="0"/>
+              <a:rPr lang="en-US"/>
               <a:t>Click to edit Master title style</a:t>
             </a:r>
-            <a:endParaRPr lang="en-US"/>
           </a:p>
         </p:txBody>
       </p:sp>
@@ -1511,7 +1518,7 @@
           <a:p>
             <a:pPr lvl="0"/>
             <a:r>
-              <a:rPr lang="en-US" smtClean="0"/>
+              <a:rPr lang="en-US"/>
               <a:t>Click to edit Master text styles</a:t>
             </a:r>
           </a:p>
@@ -1567,38 +1574,37 @@
           <a:p>
             <a:pPr lvl="0"/>
             <a:r>
-              <a:rPr lang="en-US" smtClean="0"/>
+              <a:rPr lang="en-US"/>
               <a:t>Click to edit Master text styles</a:t>
             </a:r>
           </a:p>
           <a:p>
             <a:pPr lvl="1"/>
             <a:r>
-              <a:rPr lang="en-US" smtClean="0"/>
+              <a:rPr lang="en-US"/>
               <a:t>Second level</a:t>
             </a:r>
           </a:p>
           <a:p>
             <a:pPr lvl="2"/>
             <a:r>
-              <a:rPr lang="en-US" smtClean="0"/>
+              <a:rPr lang="en-US"/>
               <a:t>Third level</a:t>
             </a:r>
           </a:p>
           <a:p>
             <a:pPr lvl="3"/>
             <a:r>
-              <a:rPr lang="en-US" smtClean="0"/>
+              <a:rPr lang="en-US"/>
               <a:t>Fourth level</a:t>
             </a:r>
           </a:p>
           <a:p>
             <a:pPr lvl="4"/>
             <a:r>
-              <a:rPr lang="en-US" smtClean="0"/>
+              <a:rPr lang="en-US"/>
               <a:t>Fifth level</a:t>
             </a:r>
-            <a:endParaRPr lang="en-US"/>
           </a:p>
         </p:txBody>
       </p:sp>
@@ -1661,7 +1667,7 @@
           <a:p>
             <a:pPr lvl="0"/>
             <a:r>
-              <a:rPr lang="en-US" smtClean="0"/>
+              <a:rPr lang="en-US"/>
               <a:t>Click to edit Master text styles</a:t>
             </a:r>
           </a:p>
@@ -1717,38 +1723,37 @@
           <a:p>
             <a:pPr lvl="0"/>
             <a:r>
-              <a:rPr lang="en-US" smtClean="0"/>
+              <a:rPr lang="en-US"/>
               <a:t>Click to edit Master text styles</a:t>
             </a:r>
           </a:p>
           <a:p>
             <a:pPr lvl="1"/>
             <a:r>
-              <a:rPr lang="en-US" smtClean="0"/>
+              <a:rPr lang="en-US"/>
               <a:t>Second level</a:t>
             </a:r>
           </a:p>
           <a:p>
             <a:pPr lvl="2"/>
             <a:r>
-              <a:rPr lang="en-US" smtClean="0"/>
+              <a:rPr lang="en-US"/>
               <a:t>Third level</a:t>
             </a:r>
           </a:p>
           <a:p>
             <a:pPr lvl="3"/>
             <a:r>
-              <a:rPr lang="en-US" smtClean="0"/>
+              <a:rPr lang="en-US"/>
               <a:t>Fourth level</a:t>
             </a:r>
           </a:p>
           <a:p>
             <a:pPr lvl="4"/>
             <a:r>
-              <a:rPr lang="en-US" smtClean="0"/>
+              <a:rPr lang="en-US"/>
               <a:t>Fifth level</a:t>
             </a:r>
-            <a:endParaRPr lang="en-US"/>
           </a:p>
         </p:txBody>
       </p:sp>
@@ -1769,7 +1774,7 @@
           <a:p>
             <a:fld id="{5BCAD085-E8A6-8845-BD4E-CB4CCA059FC4}" type="datetimeFigureOut">
               <a:rPr lang="en-US" smtClean="0"/>
-              <a:t>1/27/13</a:t>
+              <a:t>7/25/26</a:t>
             </a:fld>
             <a:endParaRPr lang="en-US"/>
           </a:p>
@@ -1863,10 +1868,9 @@
           <a:lstStyle/>
           <a:p>
             <a:r>
-              <a:rPr lang="en-US" smtClean="0"/>
+              <a:rPr lang="en-US"/>
               <a:t>Click to edit Master title style</a:t>
             </a:r>
-            <a:endParaRPr lang="en-US"/>
           </a:p>
         </p:txBody>
       </p:sp>
@@ -1887,7 +1891,7 @@
           <a:p>
             <a:fld id="{5BCAD085-E8A6-8845-BD4E-CB4CCA059FC4}" type="datetimeFigureOut">
               <a:rPr lang="en-US" smtClean="0"/>
-              <a:t>1/27/13</a:t>
+              <a:t>7/25/26</a:t>
             </a:fld>
             <a:endParaRPr lang="en-US"/>
           </a:p>
@@ -1982,7 +1986,7 @@
           <a:p>
             <a:fld id="{5BCAD085-E8A6-8845-BD4E-CB4CCA059FC4}" type="datetimeFigureOut">
               <a:rPr lang="en-US" smtClean="0"/>
-              <a:t>1/27/13</a:t>
+              <a:t>7/25/26</a:t>
             </a:fld>
             <a:endParaRPr lang="en-US"/>
           </a:p>
@@ -2085,10 +2089,9 @@
           </a:lstStyle>
           <a:p>
             <a:r>
-              <a:rPr lang="en-US" smtClean="0"/>
+              <a:rPr lang="en-US"/>
               <a:t>Click to edit Master title style</a:t>
             </a:r>
-            <a:endParaRPr lang="en-US"/>
           </a:p>
         </p:txBody>
       </p:sp>
@@ -2142,38 +2145,37 @@
           <a:p>
             <a:pPr lvl="0"/>
             <a:r>
-              <a:rPr lang="en-US" smtClean="0"/>
+              <a:rPr lang="en-US"/>
               <a:t>Click to edit Master text styles</a:t>
             </a:r>
           </a:p>
           <a:p>
             <a:pPr lvl="1"/>
             <a:r>
-              <a:rPr lang="en-US" smtClean="0"/>
+              <a:rPr lang="en-US"/>
               <a:t>Second level</a:t>
             </a:r>
           </a:p>
           <a:p>
             <a:pPr lvl="2"/>
             <a:r>
-              <a:rPr lang="en-US" smtClean="0"/>
+              <a:rPr lang="en-US"/>
               <a:t>Third level</a:t>
             </a:r>
           </a:p>
           <a:p>
             <a:pPr lvl="3"/>
             <a:r>
-              <a:rPr lang="en-US" smtClean="0"/>
+              <a:rPr lang="en-US"/>
               <a:t>Fourth level</a:t>
             </a:r>
           </a:p>
           <a:p>
             <a:pPr lvl="4"/>
             <a:r>
-              <a:rPr lang="en-US" smtClean="0"/>
+              <a:rPr lang="en-US"/>
               <a:t>Fifth level</a:t>
             </a:r>
-            <a:endParaRPr lang="en-US"/>
           </a:p>
         </p:txBody>
       </p:sp>
@@ -2236,7 +2238,7 @@
           <a:p>
             <a:pPr lvl="0"/>
             <a:r>
-              <a:rPr lang="en-US" smtClean="0"/>
+              <a:rPr lang="en-US"/>
               <a:t>Click to edit Master text styles</a:t>
             </a:r>
           </a:p>
@@ -2259,7 +2261,7 @@
           <a:p>
             <a:fld id="{5BCAD085-E8A6-8845-BD4E-CB4CCA059FC4}" type="datetimeFigureOut">
               <a:rPr lang="en-US" smtClean="0"/>
-              <a:t>1/27/13</a:t>
+              <a:t>7/25/26</a:t>
             </a:fld>
             <a:endParaRPr lang="en-US"/>
           </a:p>
@@ -2362,10 +2364,9 @@
           </a:lstStyle>
           <a:p>
             <a:r>
-              <a:rPr lang="en-US" smtClean="0"/>
+              <a:rPr lang="en-US"/>
               <a:t>Click to edit Master title style</a:t>
             </a:r>
-            <a:endParaRPr lang="en-US"/>
           </a:p>
         </p:txBody>
       </p:sp>
@@ -2489,7 +2490,7 @@
           <a:p>
             <a:pPr lvl="0"/>
             <a:r>
-              <a:rPr lang="en-US" smtClean="0"/>
+              <a:rPr lang="en-US"/>
               <a:t>Click to edit Master text styles</a:t>
             </a:r>
           </a:p>
@@ -2512,7 +2513,7 @@
           <a:p>
             <a:fld id="{5BCAD085-E8A6-8845-BD4E-CB4CCA059FC4}" type="datetimeFigureOut">
               <a:rPr lang="en-US" smtClean="0"/>
-              <a:t>1/27/13</a:t>
+              <a:t>7/25/26</a:t>
             </a:fld>
             <a:endParaRPr lang="en-US"/>
           </a:p>
@@ -2621,10 +2622,9 @@
           <a:lstStyle/>
           <a:p>
             <a:r>
-              <a:rPr lang="en-US" smtClean="0"/>
+              <a:rPr lang="en-US"/>
               <a:t>Click to edit Master title style</a:t>
             </a:r>
-            <a:endParaRPr lang="en-US"/>
           </a:p>
         </p:txBody>
       </p:sp>
@@ -2655,38 +2655,37 @@
           <a:p>
             <a:pPr lvl="0"/>
             <a:r>
-              <a:rPr lang="en-US" smtClean="0"/>
+              <a:rPr lang="en-US"/>
               <a:t>Click to edit Master text styles</a:t>
             </a:r>
           </a:p>
           <a:p>
             <a:pPr lvl="1"/>
             <a:r>
-              <a:rPr lang="en-US" smtClean="0"/>
+              <a:rPr lang="en-US"/>
               <a:t>Second level</a:t>
             </a:r>
           </a:p>
           <a:p>
             <a:pPr lvl="2"/>
             <a:r>
-              <a:rPr lang="en-US" smtClean="0"/>
+              <a:rPr lang="en-US"/>
               <a:t>Third level</a:t>
             </a:r>
           </a:p>
           <a:p>
             <a:pPr lvl="3"/>
             <a:r>
-              <a:rPr lang="en-US" smtClean="0"/>
+              <a:rPr lang="en-US"/>
               <a:t>Fourth level</a:t>
             </a:r>
           </a:p>
           <a:p>
             <a:pPr lvl="4"/>
             <a:r>
-              <a:rPr lang="en-US" smtClean="0"/>
+              <a:rPr lang="en-US"/>
               <a:t>Fifth level</a:t>
             </a:r>
-            <a:endParaRPr lang="en-US"/>
           </a:p>
         </p:txBody>
       </p:sp>
@@ -2725,7 +2724,7 @@
           <a:p>
             <a:fld id="{5BCAD085-E8A6-8845-BD4E-CB4CCA059FC4}" type="datetimeFigureOut">
               <a:rPr lang="en-US" smtClean="0"/>
-              <a:t>1/27/13</a:t>
+              <a:t>7/25/26</a:t>
             </a:fld>
             <a:endParaRPr lang="en-US"/>
           </a:p>
@@ -3084,7 +3083,7 @@
 </file>
 
 <file path=ppt/slides/slide1.xml><?xml version="1.0" encoding="utf-8"?>
-<p:sld xmlns:a="http://schemas.openxmlformats.org/drawingml/2006/main" xmlns:p="http://schemas.openxmlformats.org/presentationml/2006/main" xmlns:r="http://schemas.openxmlformats.org/officeDocument/2006/relationships">
+<p:sld xmlns:a="http://schemas.openxmlformats.org/drawingml/2006/main" xmlns:r="http://schemas.openxmlformats.org/officeDocument/2006/relationships" xmlns:p="http://schemas.openxmlformats.org/presentationml/2006/main">
   <p:cSld>
     <p:spTree>
       <p:nvGrpSpPr>
@@ -3092,7 +3091,14 @@
         <p:cNvGrpSpPr/>
         <p:nvPr/>
       </p:nvGrpSpPr>
-      <p:grpSpPr/>
+      <p:grpSpPr>
+        <a:xfrm>
+          <a:off x="0" y="0"/>
+          <a:ext cx="0" cy="0"/>
+          <a:chOff x="0" y="0"/>
+          <a:chExt cx="0" cy="0"/>
+        </a:xfrm>
+      </p:grpSpPr>
       <p:sp>
         <p:nvSpPr>
           <p:cNvPr id="2" name="Rectangle 1"/>
@@ -3133,6 +3139,7 @@
           <a:lstStyle/>
           <a:p>
             <a:pPr algn="ctr"/>
+            <a:endParaRPr/>
           </a:p>
         </p:txBody>
       </p:sp>
@@ -3176,6 +3183,7 @@
           <a:lstStyle/>
           <a:p>
             <a:pPr algn="ctr"/>
+            <a:endParaRPr/>
           </a:p>
         </p:txBody>
       </p:sp>
@@ -3276,7 +3284,7 @@
             <a:pPr algn="l">
               <a:defRPr sz="1600" b="0">
                 <a:solidFill>
-                  <a:srgbClr val="6C757D"/>
+                  <a:srgbClr val="333333"/>
                 </a:solidFill>
                 <a:latin typeface="Segoe UI"/>
               </a:defRPr>
@@ -3327,6 +3335,7 @@
           <a:lstStyle/>
           <a:p>
             <a:pPr algn="ctr"/>
+            <a:endParaRPr/>
           </a:p>
         </p:txBody>
       </p:sp>
@@ -3338,8 +3347,8 @@
         </p:nvSpPr>
         <p:spPr>
           <a:xfrm>
-            <a:off x="1371600" y="4846320"/>
-            <a:ext cx="7315200" cy="457200"/>
+            <a:off x="1371600" y="4754880"/>
+            <a:ext cx="9144000" cy="365760"/>
           </a:xfrm>
           <a:prstGeom prst="rect">
             <a:avLst/>
@@ -3355,13 +3364,422 @@
             <a:pPr algn="l">
               <a:defRPr sz="1300" b="0">
                 <a:solidFill>
-                  <a:srgbClr val="6C757D"/>
-                </a:solidFill>
-                <a:latin typeface="Segoe UI"/>
-              </a:defRPr>
-            </a:pPr>
-            <a:r>
-              <a:t>MSIT Program  |  Enterprise RAG Architecture  |  July 2026</a:t>
+                  <a:srgbClr val="000000"/>
+                </a:solidFill>
+                <a:latin typeface="Segoe UI"/>
+              </a:defRPr>
+            </a:pPr>
+            <a:r>
+              <a:t>Mounica Dayana  |  Eswari Ankitha Datla  |  Rajesh Makala  |  Sandeep Bagam</a:t>
+            </a:r>
+          </a:p>
+        </p:txBody>
+      </p:sp>
+      <p:sp>
+        <p:nvSpPr>
+          <p:cNvPr id="9" name="TextBox 8"/>
+          <p:cNvSpPr txBox="1"/>
+          <p:nvPr/>
+        </p:nvSpPr>
+        <p:spPr>
+          <a:xfrm>
+            <a:off x="1371600" y="5120640"/>
+            <a:ext cx="7315200" cy="365760"/>
+          </a:xfrm>
+          <a:prstGeom prst="rect">
+            <a:avLst/>
+          </a:prstGeom>
+          <a:noFill/>
+        </p:spPr>
+        <p:txBody>
+          <a:bodyPr wrap="square">
+            <a:spAutoFit/>
+          </a:bodyPr>
+          <a:lstStyle/>
+          <a:p>
+            <a:pPr algn="l">
+              <a:defRPr sz="1200" b="0">
+                <a:solidFill>
+                  <a:srgbClr val="333333"/>
+                </a:solidFill>
+                <a:latin typeface="Segoe UI"/>
+              </a:defRPr>
+            </a:pPr>
+            <a:r>
+              <a:t>Ethics in Artificial Intelligence  |  University of the Cumberlands  |  July 2026</a:t>
+            </a:r>
+          </a:p>
+        </p:txBody>
+      </p:sp>
+    </p:spTree>
+  </p:cSld>
+  <p:clrMapOvr>
+    <a:masterClrMapping/>
+  </p:clrMapOvr>
+</p:sld>
+</file>
+
+<file path=ppt/slides/slide10.xml><?xml version="1.0" encoding="utf-8"?>
+<p:sld xmlns:a="http://schemas.openxmlformats.org/drawingml/2006/main" xmlns:r="http://schemas.openxmlformats.org/officeDocument/2006/relationships" xmlns:p="http://schemas.openxmlformats.org/presentationml/2006/main">
+  <p:cSld>
+    <p:spTree>
+      <p:nvGrpSpPr>
+        <p:cNvPr id="1" name=""/>
+        <p:cNvGrpSpPr/>
+        <p:nvPr/>
+      </p:nvGrpSpPr>
+      <p:grpSpPr>
+        <a:xfrm>
+          <a:off x="0" y="0"/>
+          <a:ext cx="0" cy="0"/>
+          <a:chOff x="0" y="0"/>
+          <a:chExt cx="0" cy="0"/>
+        </a:xfrm>
+      </p:grpSpPr>
+      <p:sp>
+        <p:nvSpPr>
+          <p:cNvPr id="2" name="Rectangle 1"/>
+          <p:cNvSpPr/>
+          <p:nvPr/>
+        </p:nvSpPr>
+        <p:spPr>
+          <a:xfrm>
+            <a:off x="0" y="0"/>
+            <a:ext cx="12191695" cy="54864"/>
+          </a:xfrm>
+          <a:prstGeom prst="rect">
+            <a:avLst/>
+          </a:prstGeom>
+          <a:solidFill>
+            <a:srgbClr val="C8102E"/>
+          </a:solidFill>
+          <a:ln>
+            <a:noFill/>
+          </a:ln>
+        </p:spPr>
+        <p:style>
+          <a:lnRef idx="1">
+            <a:schemeClr val="accent1"/>
+          </a:lnRef>
+          <a:fillRef idx="3">
+            <a:schemeClr val="accent1"/>
+          </a:fillRef>
+          <a:effectRef idx="2">
+            <a:schemeClr val="accent1"/>
+          </a:effectRef>
+          <a:fontRef idx="minor">
+            <a:schemeClr val="lt1"/>
+          </a:fontRef>
+        </p:style>
+        <p:txBody>
+          <a:bodyPr rtlCol="0" anchor="ctr"/>
+          <a:lstStyle/>
+          <a:p>
+            <a:pPr algn="ctr"/>
+            <a:endParaRPr/>
+          </a:p>
+        </p:txBody>
+      </p:sp>
+      <p:sp>
+        <p:nvSpPr>
+          <p:cNvPr id="3" name="Rectangle 2"/>
+          <p:cNvSpPr/>
+          <p:nvPr/>
+        </p:nvSpPr>
+        <p:spPr>
+          <a:xfrm>
+            <a:off x="0" y="0"/>
+            <a:ext cx="457200" cy="6858000"/>
+          </a:xfrm>
+          <a:prstGeom prst="rect">
+            <a:avLst/>
+          </a:prstGeom>
+          <a:solidFill>
+            <a:srgbClr val="1B365D"/>
+          </a:solidFill>
+          <a:ln>
+            <a:noFill/>
+          </a:ln>
+        </p:spPr>
+        <p:style>
+          <a:lnRef idx="1">
+            <a:schemeClr val="accent1"/>
+          </a:lnRef>
+          <a:fillRef idx="3">
+            <a:schemeClr val="accent1"/>
+          </a:fillRef>
+          <a:effectRef idx="2">
+            <a:schemeClr val="accent1"/>
+          </a:effectRef>
+          <a:fontRef idx="minor">
+            <a:schemeClr val="lt1"/>
+          </a:fontRef>
+        </p:style>
+        <p:txBody>
+          <a:bodyPr rtlCol="0" anchor="ctr"/>
+          <a:lstStyle/>
+          <a:p>
+            <a:pPr algn="ctr"/>
+            <a:endParaRPr/>
+          </a:p>
+        </p:txBody>
+      </p:sp>
+      <p:sp>
+        <p:nvSpPr>
+          <p:cNvPr id="4" name="TextBox 3"/>
+          <p:cNvSpPr txBox="1"/>
+          <p:nvPr/>
+        </p:nvSpPr>
+        <p:spPr>
+          <a:xfrm>
+            <a:off x="1371600" y="1828800"/>
+            <a:ext cx="9144000" cy="914400"/>
+          </a:xfrm>
+          <a:prstGeom prst="rect">
+            <a:avLst/>
+          </a:prstGeom>
+          <a:noFill/>
+        </p:spPr>
+        <p:txBody>
+          <a:bodyPr wrap="square">
+            <a:spAutoFit/>
+          </a:bodyPr>
+          <a:lstStyle/>
+          <a:p>
+            <a:pPr algn="l">
+              <a:defRPr sz="4400" b="1">
+                <a:solidFill>
+                  <a:srgbClr val="1B365D"/>
+                </a:solidFill>
+                <a:latin typeface="Segoe UI"/>
+              </a:defRPr>
+            </a:pPr>
+            <a:r>
+              <a:t>Thank You</a:t>
+            </a:r>
+          </a:p>
+        </p:txBody>
+      </p:sp>
+      <p:sp>
+        <p:nvSpPr>
+          <p:cNvPr id="5" name="TextBox 4"/>
+          <p:cNvSpPr txBox="1"/>
+          <p:nvPr/>
+        </p:nvSpPr>
+        <p:spPr>
+          <a:xfrm>
+            <a:off x="1371600" y="2926080"/>
+            <a:ext cx="9144000" cy="548640"/>
+          </a:xfrm>
+          <a:prstGeom prst="rect">
+            <a:avLst/>
+          </a:prstGeom>
+          <a:noFill/>
+        </p:spPr>
+        <p:txBody>
+          <a:bodyPr wrap="square">
+            <a:spAutoFit/>
+          </a:bodyPr>
+          <a:lstStyle/>
+          <a:p>
+            <a:pPr algn="l">
+              <a:defRPr sz="2400" b="1">
+                <a:solidFill>
+                  <a:srgbClr val="C8102E"/>
+                </a:solidFill>
+                <a:latin typeface="Segoe UI"/>
+              </a:defRPr>
+            </a:pPr>
+            <a:r>
+              <a:t>Questions &amp; Live Demo</a:t>
+            </a:r>
+          </a:p>
+        </p:txBody>
+      </p:sp>
+      <p:sp>
+        <p:nvSpPr>
+          <p:cNvPr id="6" name="Rectangle 5"/>
+          <p:cNvSpPr/>
+          <p:nvPr/>
+        </p:nvSpPr>
+        <p:spPr>
+          <a:xfrm>
+            <a:off x="1371600" y="3840480"/>
+            <a:ext cx="3657600" cy="27432"/>
+          </a:xfrm>
+          <a:prstGeom prst="rect">
+            <a:avLst/>
+          </a:prstGeom>
+          <a:solidFill>
+            <a:srgbClr val="C8102E"/>
+          </a:solidFill>
+          <a:ln>
+            <a:noFill/>
+          </a:ln>
+        </p:spPr>
+        <p:style>
+          <a:lnRef idx="1">
+            <a:schemeClr val="accent1"/>
+          </a:lnRef>
+          <a:fillRef idx="3">
+            <a:schemeClr val="accent1"/>
+          </a:fillRef>
+          <a:effectRef idx="2">
+            <a:schemeClr val="accent1"/>
+          </a:effectRef>
+          <a:fontRef idx="minor">
+            <a:schemeClr val="lt1"/>
+          </a:fontRef>
+        </p:style>
+        <p:txBody>
+          <a:bodyPr rtlCol="0" anchor="ctr"/>
+          <a:lstStyle/>
+          <a:p>
+            <a:pPr algn="ctr"/>
+            <a:endParaRPr/>
+          </a:p>
+        </p:txBody>
+      </p:sp>
+      <p:sp>
+        <p:nvSpPr>
+          <p:cNvPr id="7" name="TextBox 6"/>
+          <p:cNvSpPr txBox="1"/>
+          <p:nvPr/>
+        </p:nvSpPr>
+        <p:spPr>
+          <a:xfrm>
+            <a:off x="1371600" y="4206240"/>
+            <a:ext cx="9144000" cy="457200"/>
+          </a:xfrm>
+          <a:prstGeom prst="rect">
+            <a:avLst/>
+          </a:prstGeom>
+          <a:noFill/>
+        </p:spPr>
+        <p:txBody>
+          <a:bodyPr wrap="square">
+            <a:spAutoFit/>
+          </a:bodyPr>
+          <a:lstStyle/>
+          <a:p>
+            <a:pPr algn="l">
+              <a:defRPr sz="1400" b="0">
+                <a:solidFill>
+                  <a:srgbClr val="333333"/>
+                </a:solidFill>
+                <a:latin typeface="Segoe UI"/>
+              </a:defRPr>
+            </a:pPr>
+            <a:r>
+              <a:t>Demo: localhost:8080</a:t>
+            </a:r>
+          </a:p>
+        </p:txBody>
+      </p:sp>
+      <p:sp>
+        <p:nvSpPr>
+          <p:cNvPr id="8" name="TextBox 7"/>
+          <p:cNvSpPr txBox="1"/>
+          <p:nvPr/>
+        </p:nvSpPr>
+        <p:spPr>
+          <a:xfrm>
+            <a:off x="1371600" y="4663440"/>
+            <a:ext cx="9144000" cy="457200"/>
+          </a:xfrm>
+          <a:prstGeom prst="rect">
+            <a:avLst/>
+          </a:prstGeom>
+          <a:noFill/>
+        </p:spPr>
+        <p:txBody>
+          <a:bodyPr wrap="square">
+            <a:spAutoFit/>
+          </a:bodyPr>
+          <a:lstStyle/>
+          <a:p>
+            <a:pPr algn="l">
+              <a:defRPr sz="1400" b="0">
+                <a:solidFill>
+                  <a:srgbClr val="333333"/>
+                </a:solidFill>
+                <a:latin typeface="Segoe UI"/>
+              </a:defRPr>
+            </a:pPr>
+            <a:r>
+              <a:t>GitHub: github.com/rmakala38838/uc-rag-chatbot</a:t>
+            </a:r>
+          </a:p>
+        </p:txBody>
+      </p:sp>
+      <p:sp>
+        <p:nvSpPr>
+          <p:cNvPr id="9" name="TextBox 8"/>
+          <p:cNvSpPr txBox="1"/>
+          <p:nvPr/>
+        </p:nvSpPr>
+        <p:spPr>
+          <a:xfrm>
+            <a:off x="1371600" y="5120640"/>
+            <a:ext cx="9144000" cy="365760"/>
+          </a:xfrm>
+          <a:prstGeom prst="rect">
+            <a:avLst/>
+          </a:prstGeom>
+          <a:noFill/>
+        </p:spPr>
+        <p:txBody>
+          <a:bodyPr wrap="square">
+            <a:spAutoFit/>
+          </a:bodyPr>
+          <a:lstStyle/>
+          <a:p>
+            <a:pPr algn="l">
+              <a:defRPr sz="1300" b="0">
+                <a:solidFill>
+                  <a:srgbClr val="000000"/>
+                </a:solidFill>
+                <a:latin typeface="Segoe UI"/>
+              </a:defRPr>
+            </a:pPr>
+            <a:r>
+              <a:t>Mounica Dayana  |  Eswari Ankitha Datla  |  Rajesh Makala  |  Sandeep Bagam</a:t>
+            </a:r>
+          </a:p>
+        </p:txBody>
+      </p:sp>
+      <p:sp>
+        <p:nvSpPr>
+          <p:cNvPr id="10" name="TextBox 9"/>
+          <p:cNvSpPr txBox="1"/>
+          <p:nvPr/>
+        </p:nvSpPr>
+        <p:spPr>
+          <a:xfrm>
+            <a:off x="1371600" y="5486400"/>
+            <a:ext cx="9144000" cy="365760"/>
+          </a:xfrm>
+          <a:prstGeom prst="rect">
+            <a:avLst/>
+          </a:prstGeom>
+          <a:noFill/>
+        </p:spPr>
+        <p:txBody>
+          <a:bodyPr wrap="square">
+            <a:spAutoFit/>
+          </a:bodyPr>
+          <a:lstStyle/>
+          <a:p>
+            <a:pPr algn="l">
+              <a:defRPr sz="1200" b="0">
+                <a:solidFill>
+                  <a:srgbClr val="333333"/>
+                </a:solidFill>
+                <a:latin typeface="Segoe UI"/>
+              </a:defRPr>
+            </a:pPr>
+            <a:r>
+              <a:t>Ethics in Artificial Intelligence  |  University of the Cumberlands  |  July 2026</a:t>
             </a:r>
           </a:p>
         </p:txBody>
@@ -3375,7 +3793,7 @@
 </file>
 
 <file path=ppt/slides/slide2.xml><?xml version="1.0" encoding="utf-8"?>
-<p:sld xmlns:a="http://schemas.openxmlformats.org/drawingml/2006/main" xmlns:p="http://schemas.openxmlformats.org/presentationml/2006/main" xmlns:r="http://schemas.openxmlformats.org/officeDocument/2006/relationships">
+<p:sld xmlns:a="http://schemas.openxmlformats.org/drawingml/2006/main" xmlns:r="http://schemas.openxmlformats.org/officeDocument/2006/relationships" xmlns:p="http://schemas.openxmlformats.org/presentationml/2006/main">
   <p:cSld>
     <p:spTree>
       <p:nvGrpSpPr>
@@ -3383,7 +3801,14 @@
         <p:cNvGrpSpPr/>
         <p:nvPr/>
       </p:nvGrpSpPr>
-      <p:grpSpPr/>
+      <p:grpSpPr>
+        <a:xfrm>
+          <a:off x="0" y="0"/>
+          <a:ext cx="0" cy="0"/>
+          <a:chOff x="0" y="0"/>
+          <a:chExt cx="0" cy="0"/>
+        </a:xfrm>
+      </p:grpSpPr>
       <p:sp>
         <p:nvSpPr>
           <p:cNvPr id="2" name="Rectangle 1"/>
@@ -3424,6 +3849,7 @@
           <a:lstStyle/>
           <a:p>
             <a:pPr algn="ctr"/>
+            <a:endParaRPr/>
           </a:p>
         </p:txBody>
       </p:sp>
@@ -3467,6 +3893,7 @@
           <a:lstStyle/>
           <a:p>
             <a:pPr algn="ctr"/>
+            <a:endParaRPr/>
           </a:p>
         </p:txBody>
       </p:sp>
@@ -3515,7 +3942,7 @@
         <p:spPr>
           <a:xfrm>
             <a:off x="640080" y="1188720"/>
-            <a:ext cx="5303520" cy="502920"/>
+            <a:ext cx="5303520" cy="457200"/>
           </a:xfrm>
           <a:prstGeom prst="roundRect">
             <a:avLst/>
@@ -3542,11 +3969,11 @@
           </a:fontRef>
         </p:style>
         <p:txBody>
-          <a:bodyPr rtlCol="0" anchor="ctr" wrap="square"/>
+          <a:bodyPr wrap="square" rtlCol="0" anchor="ctr"/>
           <a:lstStyle/>
           <a:p>
             <a:pPr algn="ctr">
-              <a:defRPr sz="1300" b="1">
+              <a:defRPr sz="1200" b="1">
                 <a:solidFill>
                   <a:srgbClr val="FFFFFF"/>
                 </a:solidFill>
@@ -3567,8 +3994,8 @@
         </p:nvSpPr>
         <p:spPr>
           <a:xfrm>
-            <a:off x="914400" y="1920240"/>
-            <a:ext cx="5029200" cy="457200"/>
+            <a:off x="914400" y="1828800"/>
+            <a:ext cx="5029200" cy="411480"/>
           </a:xfrm>
           <a:prstGeom prst="rect">
             <a:avLst/>
@@ -3584,13 +4011,13 @@
             <a:pPr algn="l">
               <a:defRPr sz="1300" b="0">
                 <a:solidFill>
-                  <a:srgbClr val="2D3748"/>
-                </a:solidFill>
-                <a:latin typeface="Segoe UI"/>
-              </a:defRPr>
-            </a:pPr>
-            <a:r>
-              <a:t>•  2,400+ pages of information spread across ucumberlands.edu</a:t>
+                  <a:srgbClr val="000000"/>
+                </a:solidFill>
+                <a:latin typeface="Segoe UI"/>
+              </a:defRPr>
+            </a:pPr>
+            <a:r>
+              <a:t>•  2,400+ pages of information across ucumberlands.edu</a:t>
             </a:r>
           </a:p>
         </p:txBody>
@@ -3603,8 +4030,8 @@
         </p:nvSpPr>
         <p:spPr>
           <a:xfrm>
-            <a:off x="914400" y="2423160"/>
-            <a:ext cx="5029200" cy="457200"/>
+            <a:off x="914400" y="2286000"/>
+            <a:ext cx="5029200" cy="411480"/>
           </a:xfrm>
           <a:prstGeom prst="rect">
             <a:avLst/>
@@ -3620,7 +4047,7 @@
             <a:pPr algn="l">
               <a:defRPr sz="1300" b="0">
                 <a:solidFill>
-                  <a:srgbClr val="2D3748"/>
+                  <a:srgbClr val="000000"/>
                 </a:solidFill>
                 <a:latin typeface="Segoe UI"/>
               </a:defRPr>
@@ -3639,8 +4066,8 @@
         </p:nvSpPr>
         <p:spPr>
           <a:xfrm>
-            <a:off x="914400" y="2926080"/>
-            <a:ext cx="5029200" cy="457200"/>
+            <a:off x="914400" y="2743200"/>
+            <a:ext cx="5029200" cy="411480"/>
           </a:xfrm>
           <a:prstGeom prst="rect">
             <a:avLst/>
@@ -3656,7 +4083,7 @@
             <a:pPr algn="l">
               <a:defRPr sz="1300" b="0">
                 <a:solidFill>
-                  <a:srgbClr val="2D3748"/>
+                  <a:srgbClr val="000000"/>
                 </a:solidFill>
                 <a:latin typeface="Segoe UI"/>
               </a:defRPr>
@@ -3676,7 +4103,7 @@
         <p:spPr>
           <a:xfrm>
             <a:off x="6400800" y="1188720"/>
-            <a:ext cx="5303520" cy="502920"/>
+            <a:ext cx="5303520" cy="457200"/>
           </a:xfrm>
           <a:prstGeom prst="roundRect">
             <a:avLst/>
@@ -3703,11 +4130,11 @@
           </a:fontRef>
         </p:style>
         <p:txBody>
-          <a:bodyPr rtlCol="0" anchor="ctr" wrap="square"/>
+          <a:bodyPr wrap="square" rtlCol="0" anchor="ctr"/>
           <a:lstStyle/>
           <a:p>
             <a:pPr algn="ctr">
-              <a:defRPr sz="1300" b="1">
+              <a:defRPr sz="1200" b="1">
                 <a:solidFill>
                   <a:srgbClr val="FFFFFF"/>
                 </a:solidFill>
@@ -3728,8 +4155,8 @@
         </p:nvSpPr>
         <p:spPr>
           <a:xfrm>
-            <a:off x="6675120" y="1920240"/>
-            <a:ext cx="5029200" cy="457200"/>
+            <a:off x="6675120" y="1828800"/>
+            <a:ext cx="5029200" cy="411480"/>
           </a:xfrm>
           <a:prstGeom prst="rect">
             <a:avLst/>
@@ -3745,7 +4172,7 @@
             <a:pPr algn="l">
               <a:defRPr sz="1300" b="0">
                 <a:solidFill>
-                  <a:srgbClr val="2D3748"/>
+                  <a:srgbClr val="000000"/>
                 </a:solidFill>
                 <a:latin typeface="Segoe UI"/>
               </a:defRPr>
@@ -3764,8 +4191,8 @@
         </p:nvSpPr>
         <p:spPr>
           <a:xfrm>
-            <a:off x="6675120" y="2423160"/>
-            <a:ext cx="5029200" cy="457200"/>
+            <a:off x="6675120" y="2286000"/>
+            <a:ext cx="5029200" cy="411480"/>
           </a:xfrm>
           <a:prstGeom prst="rect">
             <a:avLst/>
@@ -3781,7 +4208,7 @@
             <a:pPr algn="l">
               <a:defRPr sz="1300" b="0">
                 <a:solidFill>
-                  <a:srgbClr val="2D3748"/>
+                  <a:srgbClr val="000000"/>
                 </a:solidFill>
                 <a:latin typeface="Segoe UI"/>
               </a:defRPr>
@@ -3800,8 +4227,8 @@
         </p:nvSpPr>
         <p:spPr>
           <a:xfrm>
-            <a:off x="6675120" y="2926080"/>
-            <a:ext cx="5029200" cy="457200"/>
+            <a:off x="6675120" y="2743200"/>
+            <a:ext cx="5029200" cy="411480"/>
           </a:xfrm>
           <a:prstGeom prst="rect">
             <a:avLst/>
@@ -3817,7 +4244,7 @@
             <a:pPr algn="l">
               <a:defRPr sz="1300" b="0">
                 <a:solidFill>
-                  <a:srgbClr val="2D3748"/>
+                  <a:srgbClr val="000000"/>
                 </a:solidFill>
                 <a:latin typeface="Segoe UI"/>
               </a:defRPr>
@@ -3836,7 +4263,7 @@
         </p:nvSpPr>
         <p:spPr>
           <a:xfrm>
-            <a:off x="640080" y="3840480"/>
+            <a:off x="640080" y="3566160"/>
             <a:ext cx="10972800" cy="18288"/>
           </a:xfrm>
           <a:prstGeom prst="rect">
@@ -3868,6 +4295,7 @@
           <a:lstStyle/>
           <a:p>
             <a:pPr algn="ctr"/>
+            <a:endParaRPr/>
           </a:p>
         </p:txBody>
       </p:sp>
@@ -3879,7 +4307,7 @@
         </p:nvSpPr>
         <p:spPr>
           <a:xfrm>
-            <a:off x="914400" y="4114800"/>
+            <a:off x="914400" y="3840480"/>
             <a:ext cx="2286000" cy="548640"/>
           </a:xfrm>
           <a:prstGeom prst="rect">
@@ -3894,7 +4322,7 @@
           <a:lstStyle/>
           <a:p>
             <a:pPr algn="ctr">
-              <a:defRPr sz="2800" b="1">
+              <a:defRPr sz="2600" b="1">
                 <a:solidFill>
                   <a:srgbClr val="C8102E"/>
                 </a:solidFill>
@@ -3915,7 +4343,7 @@
         </p:nvSpPr>
         <p:spPr>
           <a:xfrm>
-            <a:off x="914400" y="4663440"/>
+            <a:off x="914400" y="4343400"/>
             <a:ext cx="2286000" cy="365760"/>
           </a:xfrm>
           <a:prstGeom prst="rect">
@@ -3930,9 +4358,9 @@
           <a:lstStyle/>
           <a:p>
             <a:pPr algn="ctr">
-              <a:defRPr sz="1200" b="0">
-                <a:solidFill>
-                  <a:srgbClr val="6C757D"/>
+              <a:defRPr sz="1100" b="0">
+                <a:solidFill>
+                  <a:srgbClr val="333333"/>
                 </a:solidFill>
                 <a:latin typeface="Segoe UI"/>
               </a:defRPr>
@@ -3951,7 +4379,7 @@
         </p:nvSpPr>
         <p:spPr>
           <a:xfrm>
-            <a:off x="3749039" y="4114800"/>
+            <a:off x="3749039" y="3840480"/>
             <a:ext cx="2286000" cy="548640"/>
           </a:xfrm>
           <a:prstGeom prst="rect">
@@ -3966,7 +4394,7 @@
           <a:lstStyle/>
           <a:p>
             <a:pPr algn="ctr">
-              <a:defRPr sz="2800" b="1">
+              <a:defRPr sz="2600" b="1">
                 <a:solidFill>
                   <a:srgbClr val="C8102E"/>
                 </a:solidFill>
@@ -3987,7 +4415,7 @@
         </p:nvSpPr>
         <p:spPr>
           <a:xfrm>
-            <a:off x="3749039" y="4663440"/>
+            <a:off x="3749039" y="4343400"/>
             <a:ext cx="2286000" cy="365760"/>
           </a:xfrm>
           <a:prstGeom prst="rect">
@@ -4002,9 +4430,9 @@
           <a:lstStyle/>
           <a:p>
             <a:pPr algn="ctr">
-              <a:defRPr sz="1200" b="0">
-                <a:solidFill>
-                  <a:srgbClr val="6C757D"/>
+              <a:defRPr sz="1100" b="0">
+                <a:solidFill>
+                  <a:srgbClr val="333333"/>
                 </a:solidFill>
                 <a:latin typeface="Segoe UI"/>
               </a:defRPr>
@@ -4023,7 +4451,7 @@
         </p:nvSpPr>
         <p:spPr>
           <a:xfrm>
-            <a:off x="6583680" y="4114800"/>
+            <a:off x="6583680" y="3840480"/>
             <a:ext cx="2286000" cy="548640"/>
           </a:xfrm>
           <a:prstGeom prst="rect">
@@ -4038,7 +4466,7 @@
           <a:lstStyle/>
           <a:p>
             <a:pPr algn="ctr">
-              <a:defRPr sz="2800" b="1">
+              <a:defRPr sz="2600" b="1">
                 <a:solidFill>
                   <a:srgbClr val="C8102E"/>
                 </a:solidFill>
@@ -4059,7 +4487,7 @@
         </p:nvSpPr>
         <p:spPr>
           <a:xfrm>
-            <a:off x="6583680" y="4663440"/>
+            <a:off x="6583680" y="4343400"/>
             <a:ext cx="2286000" cy="365760"/>
           </a:xfrm>
           <a:prstGeom prst="rect">
@@ -4074,9 +4502,9 @@
           <a:lstStyle/>
           <a:p>
             <a:pPr algn="ctr">
-              <a:defRPr sz="1200" b="0">
-                <a:solidFill>
-                  <a:srgbClr val="6C757D"/>
+              <a:defRPr sz="1100" b="0">
+                <a:solidFill>
+                  <a:srgbClr val="333333"/>
                 </a:solidFill>
                 <a:latin typeface="Segoe UI"/>
               </a:defRPr>
@@ -4095,7 +4523,7 @@
         </p:nvSpPr>
         <p:spPr>
           <a:xfrm>
-            <a:off x="9418320" y="4114800"/>
+            <a:off x="9418320" y="3840480"/>
             <a:ext cx="2286000" cy="548640"/>
           </a:xfrm>
           <a:prstGeom prst="rect">
@@ -4110,7 +4538,7 @@
           <a:lstStyle/>
           <a:p>
             <a:pPr algn="ctr">
-              <a:defRPr sz="2800" b="1">
+              <a:defRPr sz="2600" b="1">
                 <a:solidFill>
                   <a:srgbClr val="C8102E"/>
                 </a:solidFill>
@@ -4131,7 +4559,7 @@
         </p:nvSpPr>
         <p:spPr>
           <a:xfrm>
-            <a:off x="9418320" y="4663440"/>
+            <a:off x="9418320" y="4343400"/>
             <a:ext cx="2286000" cy="365760"/>
           </a:xfrm>
           <a:prstGeom prst="rect">
@@ -4146,9 +4574,9 @@
           <a:lstStyle/>
           <a:p>
             <a:pPr algn="ctr">
-              <a:defRPr sz="1200" b="0">
-                <a:solidFill>
-                  <a:srgbClr val="6C757D"/>
+              <a:defRPr sz="1100" b="0">
+                <a:solidFill>
+                  <a:srgbClr val="333333"/>
                 </a:solidFill>
                 <a:latin typeface="Segoe UI"/>
               </a:defRPr>
@@ -4168,7 +4596,7 @@
 </file>
 
 <file path=ppt/slides/slide3.xml><?xml version="1.0" encoding="utf-8"?>
-<p:sld xmlns:a="http://schemas.openxmlformats.org/drawingml/2006/main" xmlns:p="http://schemas.openxmlformats.org/presentationml/2006/main" xmlns:r="http://schemas.openxmlformats.org/officeDocument/2006/relationships">
+<p:sld xmlns:a="http://schemas.openxmlformats.org/drawingml/2006/main" xmlns:r="http://schemas.openxmlformats.org/officeDocument/2006/relationships" xmlns:p="http://schemas.openxmlformats.org/presentationml/2006/main">
   <p:cSld>
     <p:spTree>
       <p:nvGrpSpPr>
@@ -4176,7 +4604,14 @@
         <p:cNvGrpSpPr/>
         <p:nvPr/>
       </p:nvGrpSpPr>
-      <p:grpSpPr/>
+      <p:grpSpPr>
+        <a:xfrm>
+          <a:off x="0" y="0"/>
+          <a:ext cx="0" cy="0"/>
+          <a:chOff x="0" y="0"/>
+          <a:chExt cx="0" cy="0"/>
+        </a:xfrm>
+      </p:grpSpPr>
       <p:sp>
         <p:nvSpPr>
           <p:cNvPr id="2" name="Rectangle 1"/>
@@ -4217,6 +4652,7 @@
           <a:lstStyle/>
           <a:p>
             <a:pPr algn="ctr"/>
+            <a:endParaRPr/>
           </a:p>
         </p:txBody>
       </p:sp>
@@ -4260,6 +4696,7 @@
           <a:lstStyle/>
           <a:p>
             <a:pPr algn="ctr"/>
+            <a:endParaRPr/>
           </a:p>
         </p:txBody>
       </p:sp>
@@ -4343,8 +4780,8 @@
         </p:nvSpPr>
         <p:spPr>
           <a:xfrm>
-            <a:off x="640080" y="1463040"/>
-            <a:ext cx="2011680" cy="1051560"/>
+            <a:off x="640080" y="1417320"/>
+            <a:ext cx="2011680" cy="1005840"/>
           </a:xfrm>
           <a:prstGeom prst="roundRect">
             <a:avLst/>
@@ -4373,7 +4810,7 @@
           </a:fontRef>
         </p:style>
         <p:txBody>
-          <a:bodyPr rtlCol="0" anchor="ctr" wrap="square"/>
+          <a:bodyPr wrap="square" rtlCol="0" anchor="ctr"/>
           <a:lstStyle/>
           <a:p>
             <a:pPr algn="ctr">
@@ -4403,8 +4840,8 @@
         </p:nvSpPr>
         <p:spPr>
           <a:xfrm>
-            <a:off x="2971800" y="1463040"/>
-            <a:ext cx="2011680" cy="1051560"/>
+            <a:off x="2971800" y="1417320"/>
+            <a:ext cx="2011680" cy="1005840"/>
           </a:xfrm>
           <a:prstGeom prst="roundRect">
             <a:avLst/>
@@ -4433,7 +4870,7 @@
           </a:fontRef>
         </p:style>
         <p:txBody>
-          <a:bodyPr rtlCol="0" anchor="ctr" wrap="square"/>
+          <a:bodyPr wrap="square" rtlCol="0" anchor="ctr"/>
           <a:lstStyle/>
           <a:p>
             <a:pPr algn="ctr">
@@ -4467,8 +4904,8 @@
         </p:nvSpPr>
         <p:spPr>
           <a:xfrm>
-            <a:off x="5303520" y="1463040"/>
-            <a:ext cx="2011680" cy="1051560"/>
+            <a:off x="5303520" y="1417320"/>
+            <a:ext cx="2011680" cy="1005840"/>
           </a:xfrm>
           <a:prstGeom prst="roundRect">
             <a:avLst/>
@@ -4497,7 +4934,7 @@
           </a:fontRef>
         </p:style>
         <p:txBody>
-          <a:bodyPr rtlCol="0" anchor="ctr" wrap="square"/>
+          <a:bodyPr wrap="square" rtlCol="0" anchor="ctr"/>
           <a:lstStyle/>
           <a:p>
             <a:pPr algn="ctr">
@@ -4531,8 +4968,8 @@
         </p:nvSpPr>
         <p:spPr>
           <a:xfrm>
-            <a:off x="7635240" y="1463040"/>
-            <a:ext cx="2011680" cy="1051560"/>
+            <a:off x="7635240" y="1417320"/>
+            <a:ext cx="2011680" cy="1005840"/>
           </a:xfrm>
           <a:prstGeom prst="roundRect">
             <a:avLst/>
@@ -4561,7 +4998,7 @@
           </a:fontRef>
         </p:style>
         <p:txBody>
-          <a:bodyPr rtlCol="0" anchor="ctr" wrap="square"/>
+          <a:bodyPr wrap="square" rtlCol="0" anchor="ctr"/>
           <a:lstStyle/>
           <a:p>
             <a:pPr algn="ctr">
@@ -4595,8 +5032,8 @@
         </p:nvSpPr>
         <p:spPr>
           <a:xfrm>
-            <a:off x="9966960" y="1463040"/>
-            <a:ext cx="2011680" cy="1051560"/>
+            <a:off x="9966960" y="1417320"/>
+            <a:ext cx="2011680" cy="1005840"/>
           </a:xfrm>
           <a:prstGeom prst="roundRect">
             <a:avLst/>
@@ -4625,7 +5062,7 @@
           </a:fontRef>
         </p:style>
         <p:txBody>
-          <a:bodyPr rtlCol="0" anchor="ctr" wrap="square"/>
+          <a:bodyPr wrap="square" rtlCol="0" anchor="ctr"/>
           <a:lstStyle/>
           <a:p>
             <a:pPr algn="ctr">
@@ -4659,7 +5096,7 @@
         </p:nvCxnSpPr>
         <p:spPr>
           <a:xfrm>
-            <a:off x="2697480" y="1988820"/>
+            <a:off x="2697480" y="1920240"/>
             <a:ext cx="228600" cy="0"/>
           </a:xfrm>
           <a:prstGeom prst="line">
@@ -4694,7 +5131,7 @@
         </p:nvCxnSpPr>
         <p:spPr>
           <a:xfrm>
-            <a:off x="5029200" y="1988820"/>
+            <a:off x="5029200" y="1920240"/>
             <a:ext cx="228600" cy="0"/>
           </a:xfrm>
           <a:prstGeom prst="line">
@@ -4729,7 +5166,7 @@
         </p:nvCxnSpPr>
         <p:spPr>
           <a:xfrm>
-            <a:off x="7360920" y="1988820"/>
+            <a:off x="7360920" y="1920240"/>
             <a:ext cx="228600" cy="0"/>
           </a:xfrm>
           <a:prstGeom prst="line">
@@ -4764,7 +5201,7 @@
         </p:nvCxnSpPr>
         <p:spPr>
           <a:xfrm>
-            <a:off x="9692640" y="1988820"/>
+            <a:off x="9692640" y="1920240"/>
             <a:ext cx="228600" cy="0"/>
           </a:xfrm>
           <a:prstGeom prst="line">
@@ -4799,7 +5236,7 @@
         </p:nvSpPr>
         <p:spPr>
           <a:xfrm>
-            <a:off x="640080" y="2926080"/>
+            <a:off x="640080" y="2834640"/>
             <a:ext cx="3657600" cy="320040"/>
           </a:xfrm>
           <a:prstGeom prst="rect">
@@ -4835,8 +5272,8 @@
         </p:nvSpPr>
         <p:spPr>
           <a:xfrm>
-            <a:off x="640080" y="3291840"/>
-            <a:ext cx="2011680" cy="1051560"/>
+            <a:off x="640080" y="3200400"/>
+            <a:ext cx="2011680" cy="1005840"/>
           </a:xfrm>
           <a:prstGeom prst="roundRect">
             <a:avLst/>
@@ -4865,13 +5302,13 @@
           </a:fontRef>
         </p:style>
         <p:txBody>
-          <a:bodyPr rtlCol="0" anchor="ctr" wrap="square"/>
+          <a:bodyPr wrap="square" rtlCol="0" anchor="ctr"/>
           <a:lstStyle/>
           <a:p>
             <a:pPr algn="ctr">
               <a:defRPr sz="1000" b="0">
                 <a:solidFill>
-                  <a:srgbClr val="2D3748"/>
+                  <a:srgbClr val="000000"/>
                 </a:solidFill>
                 <a:latin typeface="Segoe UI"/>
               </a:defRPr>
@@ -4899,8 +5336,8 @@
         </p:nvSpPr>
         <p:spPr>
           <a:xfrm>
-            <a:off x="2971800" y="3291840"/>
-            <a:ext cx="2011680" cy="1051560"/>
+            <a:off x="2971800" y="3200400"/>
+            <a:ext cx="2011680" cy="1005840"/>
           </a:xfrm>
           <a:prstGeom prst="roundRect">
             <a:avLst/>
@@ -4929,13 +5366,13 @@
           </a:fontRef>
         </p:style>
         <p:txBody>
-          <a:bodyPr rtlCol="0" anchor="ctr" wrap="square"/>
+          <a:bodyPr wrap="square" rtlCol="0" anchor="ctr"/>
           <a:lstStyle/>
           <a:p>
             <a:pPr algn="ctr">
               <a:defRPr sz="1000" b="0">
                 <a:solidFill>
-                  <a:srgbClr val="2D3748"/>
+                  <a:srgbClr val="000000"/>
                 </a:solidFill>
                 <a:latin typeface="Segoe UI"/>
               </a:defRPr>
@@ -4963,8 +5400,8 @@
         </p:nvSpPr>
         <p:spPr>
           <a:xfrm>
-            <a:off x="5303520" y="3291840"/>
-            <a:ext cx="2011680" cy="1051560"/>
+            <a:off x="5303520" y="3200400"/>
+            <a:ext cx="2011680" cy="1005840"/>
           </a:xfrm>
           <a:prstGeom prst="roundRect">
             <a:avLst/>
@@ -4993,13 +5430,13 @@
           </a:fontRef>
         </p:style>
         <p:txBody>
-          <a:bodyPr rtlCol="0" anchor="ctr" wrap="square"/>
+          <a:bodyPr wrap="square" rtlCol="0" anchor="ctr"/>
           <a:lstStyle/>
           <a:p>
             <a:pPr algn="ctr">
               <a:defRPr sz="1000" b="0">
                 <a:solidFill>
-                  <a:srgbClr val="2D3748"/>
+                  <a:srgbClr val="000000"/>
                 </a:solidFill>
                 <a:latin typeface="Segoe UI"/>
               </a:defRPr>
@@ -5027,8 +5464,8 @@
         </p:nvSpPr>
         <p:spPr>
           <a:xfrm>
-            <a:off x="7635240" y="3291840"/>
-            <a:ext cx="2011680" cy="1051560"/>
+            <a:off x="7635240" y="3200400"/>
+            <a:ext cx="2011680" cy="1005840"/>
           </a:xfrm>
           <a:prstGeom prst="roundRect">
             <a:avLst/>
@@ -5057,13 +5494,13 @@
           </a:fontRef>
         </p:style>
         <p:txBody>
-          <a:bodyPr rtlCol="0" anchor="ctr" wrap="square"/>
+          <a:bodyPr wrap="square" rtlCol="0" anchor="ctr"/>
           <a:lstStyle/>
           <a:p>
             <a:pPr algn="ctr">
               <a:defRPr sz="1000" b="0">
                 <a:solidFill>
-                  <a:srgbClr val="2D3748"/>
+                  <a:srgbClr val="000000"/>
                 </a:solidFill>
                 <a:latin typeface="Segoe UI"/>
               </a:defRPr>
@@ -5091,8 +5528,8 @@
         </p:nvSpPr>
         <p:spPr>
           <a:xfrm>
-            <a:off x="9966960" y="3291840"/>
-            <a:ext cx="2011680" cy="1051560"/>
+            <a:off x="9966960" y="3200400"/>
+            <a:ext cx="2011680" cy="1005840"/>
           </a:xfrm>
           <a:prstGeom prst="roundRect">
             <a:avLst/>
@@ -5121,13 +5558,13 @@
           </a:fontRef>
         </p:style>
         <p:txBody>
-          <a:bodyPr rtlCol="0" anchor="ctr" wrap="square"/>
+          <a:bodyPr wrap="square" rtlCol="0" anchor="ctr"/>
           <a:lstStyle/>
           <a:p>
             <a:pPr algn="ctr">
               <a:defRPr sz="1000" b="0">
                 <a:solidFill>
-                  <a:srgbClr val="2D3748"/>
+                  <a:srgbClr val="000000"/>
                 </a:solidFill>
                 <a:latin typeface="Segoe UI"/>
               </a:defRPr>
@@ -5155,7 +5592,7 @@
         </p:nvCxnSpPr>
         <p:spPr>
           <a:xfrm>
-            <a:off x="2697480" y="3817620"/>
+            <a:off x="2697480" y="3703320"/>
             <a:ext cx="228600" cy="0"/>
           </a:xfrm>
           <a:prstGeom prst="line">
@@ -5190,7 +5627,7 @@
         </p:nvCxnSpPr>
         <p:spPr>
           <a:xfrm>
-            <a:off x="5029200" y="3817620"/>
+            <a:off x="5029200" y="3703320"/>
             <a:ext cx="228600" cy="0"/>
           </a:xfrm>
           <a:prstGeom prst="line">
@@ -5225,7 +5662,7 @@
         </p:nvCxnSpPr>
         <p:spPr>
           <a:xfrm>
-            <a:off x="7360920" y="3817620"/>
+            <a:off x="7360920" y="3703320"/>
             <a:ext cx="228600" cy="0"/>
           </a:xfrm>
           <a:prstGeom prst="line">
@@ -5260,7 +5697,7 @@
         </p:nvCxnSpPr>
         <p:spPr>
           <a:xfrm>
-            <a:off x="9692640" y="3817620"/>
+            <a:off x="9692640" y="3703320"/>
             <a:ext cx="228600" cy="0"/>
           </a:xfrm>
           <a:prstGeom prst="line">
@@ -5295,7 +5732,7 @@
         </p:nvCxnSpPr>
         <p:spPr>
           <a:xfrm>
-            <a:off x="6309360" y="2514600"/>
+            <a:off x="6309360" y="2423160"/>
             <a:ext cx="0" cy="777240"/>
           </a:xfrm>
           <a:prstGeom prst="line">
@@ -5303,7 +5740,7 @@
           </a:prstGeom>
           <a:ln w="19050">
             <a:solidFill>
-              <a:srgbClr val="6C757D"/>
+              <a:srgbClr val="333333"/>
             </a:solidFill>
             <a:prstDash val="sysDash"/>
           </a:ln>
@@ -5331,7 +5768,7 @@
         </p:nvSpPr>
         <p:spPr>
           <a:xfrm>
-            <a:off x="640080" y="4754880"/>
+            <a:off x="640080" y="4663440"/>
             <a:ext cx="10972800" cy="365760"/>
           </a:xfrm>
           <a:prstGeom prst="rect">
@@ -5348,13 +5785,13 @@
             <a:pPr algn="ctr">
               <a:defRPr sz="1200" b="0">
                 <a:solidFill>
-                  <a:srgbClr val="6C757D"/>
-                </a:solidFill>
-                <a:latin typeface="Segoe UI"/>
-              </a:defRPr>
-            </a:pPr>
-            <a:r>
-              <a:t>Python  •  FastAPI  •  sentence-transformers  •  ChromaDB (HNSW)  •  AWS Bedrock  •  HTML/CSS/JS</a:t>
+                  <a:srgbClr val="333333"/>
+                </a:solidFill>
+                <a:latin typeface="Segoe UI"/>
+              </a:defRPr>
+            </a:pPr>
+            <a:r>
+              <a:t>Python 3.11  •  FastAPI  •  sentence-transformers  •  ChromaDB (HNSW)  •  AWS Bedrock  •  HTML/CSS/JS</a:t>
             </a:r>
           </a:p>
         </p:txBody>
@@ -5368,7 +5805,7 @@
 </file>
 
 <file path=ppt/slides/slide4.xml><?xml version="1.0" encoding="utf-8"?>
-<p:sld xmlns:a="http://schemas.openxmlformats.org/drawingml/2006/main" xmlns:p="http://schemas.openxmlformats.org/presentationml/2006/main" xmlns:r="http://schemas.openxmlformats.org/officeDocument/2006/relationships">
+<p:sld xmlns:a="http://schemas.openxmlformats.org/drawingml/2006/main" xmlns:r="http://schemas.openxmlformats.org/officeDocument/2006/relationships" xmlns:p="http://schemas.openxmlformats.org/presentationml/2006/main">
   <p:cSld>
     <p:spTree>
       <p:nvGrpSpPr>
@@ -5376,7 +5813,14 @@
         <p:cNvGrpSpPr/>
         <p:nvPr/>
       </p:nvGrpSpPr>
-      <p:grpSpPr/>
+      <p:grpSpPr>
+        <a:xfrm>
+          <a:off x="0" y="0"/>
+          <a:ext cx="0" cy="0"/>
+          <a:chOff x="0" y="0"/>
+          <a:chExt cx="0" cy="0"/>
+        </a:xfrm>
+      </p:grpSpPr>
       <p:sp>
         <p:nvSpPr>
           <p:cNvPr id="2" name="Rectangle 1"/>
@@ -5417,6 +5861,7 @@
           <a:lstStyle/>
           <a:p>
             <a:pPr algn="ctr"/>
+            <a:endParaRPr/>
           </a:p>
         </p:txBody>
       </p:sp>
@@ -5460,6 +5905,7 @@
           <a:lstStyle/>
           <a:p>
             <a:pPr algn="ctr"/>
+            <a:endParaRPr/>
           </a:p>
         </p:txBody>
       </p:sp>
@@ -5535,7 +5981,7 @@
           </a:fontRef>
         </p:style>
         <p:txBody>
-          <a:bodyPr rtlCol="0" anchor="ctr" wrap="square"/>
+          <a:bodyPr wrap="square" rtlCol="0" anchor="ctr"/>
           <a:lstStyle/>
           <a:p>
             <a:pPr algn="ctr">
@@ -5561,7 +6007,7 @@
         <p:spPr>
           <a:xfrm>
             <a:off x="822960" y="1828800"/>
-            <a:ext cx="3291840" cy="411480"/>
+            <a:ext cx="3291840" cy="384048"/>
           </a:xfrm>
           <a:prstGeom prst="rect">
             <a:avLst/>
@@ -5577,7 +6023,7 @@
             <a:pPr algn="l">
               <a:defRPr sz="1200" b="0">
                 <a:solidFill>
-                  <a:srgbClr val="2D3748"/>
+                  <a:srgbClr val="000000"/>
                 </a:solidFill>
                 <a:latin typeface="Segoe UI"/>
               </a:defRPr>
@@ -5596,8 +6042,8 @@
         </p:nvSpPr>
         <p:spPr>
           <a:xfrm>
-            <a:off x="822960" y="2267712"/>
-            <a:ext cx="3291840" cy="411480"/>
+            <a:off x="822960" y="2240280"/>
+            <a:ext cx="3291840" cy="384048"/>
           </a:xfrm>
           <a:prstGeom prst="rect">
             <a:avLst/>
@@ -5613,7 +6059,7 @@
             <a:pPr algn="l">
               <a:defRPr sz="1200" b="0">
                 <a:solidFill>
-                  <a:srgbClr val="2D3748"/>
+                  <a:srgbClr val="000000"/>
                 </a:solidFill>
                 <a:latin typeface="Segoe UI"/>
               </a:defRPr>
@@ -5632,8 +6078,8 @@
         </p:nvSpPr>
         <p:spPr>
           <a:xfrm>
-            <a:off x="822960" y="2706624"/>
-            <a:ext cx="3291840" cy="411480"/>
+            <a:off x="822960" y="2651760"/>
+            <a:ext cx="3291840" cy="384048"/>
           </a:xfrm>
           <a:prstGeom prst="rect">
             <a:avLst/>
@@ -5649,7 +6095,7 @@
             <a:pPr algn="l">
               <a:defRPr sz="1200" b="0">
                 <a:solidFill>
-                  <a:srgbClr val="2D3748"/>
+                  <a:srgbClr val="000000"/>
                 </a:solidFill>
                 <a:latin typeface="Segoe UI"/>
               </a:defRPr>
@@ -5668,8 +6114,8 @@
         </p:nvSpPr>
         <p:spPr>
           <a:xfrm>
-            <a:off x="822960" y="3145536"/>
-            <a:ext cx="3291840" cy="411480"/>
+            <a:off x="822960" y="3063240"/>
+            <a:ext cx="3291840" cy="384048"/>
           </a:xfrm>
           <a:prstGeom prst="rect">
             <a:avLst/>
@@ -5685,7 +6131,7 @@
             <a:pPr algn="l">
               <a:defRPr sz="1200" b="0">
                 <a:solidFill>
-                  <a:srgbClr val="2D3748"/>
+                  <a:srgbClr val="000000"/>
                 </a:solidFill>
                 <a:latin typeface="Segoe UI"/>
               </a:defRPr>
@@ -5704,8 +6150,8 @@
         </p:nvSpPr>
         <p:spPr>
           <a:xfrm>
-            <a:off x="822960" y="3584448"/>
-            <a:ext cx="3291840" cy="411480"/>
+            <a:off x="822960" y="3474720"/>
+            <a:ext cx="3291840" cy="384048"/>
           </a:xfrm>
           <a:prstGeom prst="rect">
             <a:avLst/>
@@ -5721,13 +6167,13 @@
             <a:pPr algn="l">
               <a:defRPr sz="1200" b="0">
                 <a:solidFill>
-                  <a:srgbClr val="2D3748"/>
-                </a:solidFill>
-                <a:latin typeface="Segoe UI"/>
-              </a:defRPr>
-            </a:pPr>
-            <a:r>
-              <a:t>•  BAAI/bge-base-en-v1.5</a:t>
+                  <a:srgbClr val="000000"/>
+                </a:solidFill>
+                <a:latin typeface="Segoe UI"/>
+              </a:defRPr>
+            </a:pPr>
+            <a:r>
+              <a:t>•  BAAI/bge-base-en-v1.5 (768d)</a:t>
             </a:r>
           </a:p>
         </p:txBody>
@@ -5768,7 +6214,7 @@
           </a:fontRef>
         </p:style>
         <p:txBody>
-          <a:bodyPr rtlCol="0" anchor="ctr" wrap="square"/>
+          <a:bodyPr wrap="square" rtlCol="0" anchor="ctr"/>
           <a:lstStyle/>
           <a:p>
             <a:pPr algn="ctr">
@@ -5794,7 +6240,7 @@
         <p:spPr>
           <a:xfrm>
             <a:off x="4663440" y="1828800"/>
-            <a:ext cx="3291840" cy="411480"/>
+            <a:ext cx="3291840" cy="384048"/>
           </a:xfrm>
           <a:prstGeom prst="rect">
             <a:avLst/>
@@ -5810,7 +6256,7 @@
             <a:pPr algn="l">
               <a:defRPr sz="1200" b="0">
                 <a:solidFill>
-                  <a:srgbClr val="2D3748"/>
+                  <a:srgbClr val="000000"/>
                 </a:solidFill>
                 <a:latin typeface="Segoe UI"/>
               </a:defRPr>
@@ -5829,8 +6275,8 @@
         </p:nvSpPr>
         <p:spPr>
           <a:xfrm>
-            <a:off x="4663440" y="2267712"/>
-            <a:ext cx="3291840" cy="411480"/>
+            <a:off x="4663440" y="2240280"/>
+            <a:ext cx="3291840" cy="384048"/>
           </a:xfrm>
           <a:prstGeom prst="rect">
             <a:avLst/>
@@ -5846,7 +6292,7 @@
             <a:pPr algn="l">
               <a:defRPr sz="1200" b="0">
                 <a:solidFill>
-                  <a:srgbClr val="2D3748"/>
+                  <a:srgbClr val="000000"/>
                 </a:solidFill>
                 <a:latin typeface="Segoe UI"/>
               </a:defRPr>
@@ -5865,8 +6311,8 @@
         </p:nvSpPr>
         <p:spPr>
           <a:xfrm>
-            <a:off x="4663440" y="2706624"/>
-            <a:ext cx="3291840" cy="411480"/>
+            <a:off x="4663440" y="2651760"/>
+            <a:ext cx="3291840" cy="384048"/>
           </a:xfrm>
           <a:prstGeom prst="rect">
             <a:avLst/>
@@ -5882,7 +6328,7 @@
             <a:pPr algn="l">
               <a:defRPr sz="1200" b="0">
                 <a:solidFill>
-                  <a:srgbClr val="2D3748"/>
+                  <a:srgbClr val="000000"/>
                 </a:solidFill>
                 <a:latin typeface="Segoe UI"/>
               </a:defRPr>
@@ -5901,8 +6347,8 @@
         </p:nvSpPr>
         <p:spPr>
           <a:xfrm>
-            <a:off x="4663440" y="3145536"/>
-            <a:ext cx="3291840" cy="411480"/>
+            <a:off x="4663440" y="3063240"/>
+            <a:ext cx="3291840" cy="384048"/>
           </a:xfrm>
           <a:prstGeom prst="rect">
             <a:avLst/>
@@ -5918,7 +6364,7 @@
             <a:pPr algn="l">
               <a:defRPr sz="1200" b="0">
                 <a:solidFill>
-                  <a:srgbClr val="2D3748"/>
+                  <a:srgbClr val="000000"/>
                 </a:solidFill>
                 <a:latin typeface="Segoe UI"/>
               </a:defRPr>
@@ -5937,8 +6383,8 @@
         </p:nvSpPr>
         <p:spPr>
           <a:xfrm>
-            <a:off x="4663440" y="3584448"/>
-            <a:ext cx="3291840" cy="411480"/>
+            <a:off x="4663440" y="3474720"/>
+            <a:ext cx="3291840" cy="384048"/>
           </a:xfrm>
           <a:prstGeom prst="rect">
             <a:avLst/>
@@ -5954,7 +6400,7 @@
             <a:pPr algn="l">
               <a:defRPr sz="1200" b="0">
                 <a:solidFill>
-                  <a:srgbClr val="2D3748"/>
+                  <a:srgbClr val="000000"/>
                 </a:solidFill>
                 <a:latin typeface="Segoe UI"/>
               </a:defRPr>
@@ -6001,7 +6447,7 @@
           </a:fontRef>
         </p:style>
         <p:txBody>
-          <a:bodyPr rtlCol="0" anchor="ctr" wrap="square"/>
+          <a:bodyPr wrap="square" rtlCol="0" anchor="ctr"/>
           <a:lstStyle/>
           <a:p>
             <a:pPr algn="ctr">
@@ -6027,7 +6473,7 @@
         <p:spPr>
           <a:xfrm>
             <a:off x="8503920" y="1828800"/>
-            <a:ext cx="3291840" cy="411480"/>
+            <a:ext cx="3291840" cy="384048"/>
           </a:xfrm>
           <a:prstGeom prst="rect">
             <a:avLst/>
@@ -6043,7 +6489,7 @@
             <a:pPr algn="l">
               <a:defRPr sz="1200" b="0">
                 <a:solidFill>
-                  <a:srgbClr val="2D3748"/>
+                  <a:srgbClr val="000000"/>
                 </a:solidFill>
                 <a:latin typeface="Segoe UI"/>
               </a:defRPr>
@@ -6062,8 +6508,8 @@
         </p:nvSpPr>
         <p:spPr>
           <a:xfrm>
-            <a:off x="8503920" y="2267712"/>
-            <a:ext cx="3291840" cy="411480"/>
+            <a:off x="8503920" y="2240280"/>
+            <a:ext cx="3291840" cy="384048"/>
           </a:xfrm>
           <a:prstGeom prst="rect">
             <a:avLst/>
@@ -6079,7 +6525,7 @@
             <a:pPr algn="l">
               <a:defRPr sz="1200" b="0">
                 <a:solidFill>
-                  <a:srgbClr val="2D3748"/>
+                  <a:srgbClr val="000000"/>
                 </a:solidFill>
                 <a:latin typeface="Segoe UI"/>
               </a:defRPr>
@@ -6098,8 +6544,8 @@
         </p:nvSpPr>
         <p:spPr>
           <a:xfrm>
-            <a:off x="8503920" y="2706624"/>
-            <a:ext cx="3291840" cy="411480"/>
+            <a:off x="8503920" y="2651760"/>
+            <a:ext cx="3291840" cy="384048"/>
           </a:xfrm>
           <a:prstGeom prst="rect">
             <a:avLst/>
@@ -6115,7 +6561,7 @@
             <a:pPr algn="l">
               <a:defRPr sz="1200" b="0">
                 <a:solidFill>
-                  <a:srgbClr val="2D3748"/>
+                  <a:srgbClr val="000000"/>
                 </a:solidFill>
                 <a:latin typeface="Segoe UI"/>
               </a:defRPr>
@@ -6134,8 +6580,8 @@
         </p:nvSpPr>
         <p:spPr>
           <a:xfrm>
-            <a:off x="8503920" y="3145536"/>
-            <a:ext cx="3291840" cy="411480"/>
+            <a:off x="8503920" y="3063240"/>
+            <a:ext cx="3291840" cy="384048"/>
           </a:xfrm>
           <a:prstGeom prst="rect">
             <a:avLst/>
@@ -6151,7 +6597,7 @@
             <a:pPr algn="l">
               <a:defRPr sz="1200" b="0">
                 <a:solidFill>
-                  <a:srgbClr val="2D3748"/>
+                  <a:srgbClr val="000000"/>
                 </a:solidFill>
                 <a:latin typeface="Segoe UI"/>
               </a:defRPr>
@@ -6170,8 +6616,8 @@
         </p:nvSpPr>
         <p:spPr>
           <a:xfrm>
-            <a:off x="8503920" y="3584448"/>
-            <a:ext cx="3291840" cy="411480"/>
+            <a:off x="8503920" y="3474720"/>
+            <a:ext cx="3291840" cy="384048"/>
           </a:xfrm>
           <a:prstGeom prst="rect">
             <a:avLst/>
@@ -6187,7 +6633,7 @@
             <a:pPr algn="l">
               <a:defRPr sz="1200" b="0">
                 <a:solidFill>
-                  <a:srgbClr val="2D3748"/>
+                  <a:srgbClr val="000000"/>
                 </a:solidFill>
                 <a:latin typeface="Segoe UI"/>
               </a:defRPr>
@@ -6206,8 +6652,8 @@
         </p:nvSpPr>
         <p:spPr>
           <a:xfrm>
-            <a:off x="640080" y="4389120"/>
-            <a:ext cx="10972800" cy="548640"/>
+            <a:off x="640080" y="4206240"/>
+            <a:ext cx="10972800" cy="502920"/>
           </a:xfrm>
           <a:prstGeom prst="roundRect">
             <a:avLst/>
@@ -6236,7 +6682,7 @@
           </a:fontRef>
         </p:style>
         <p:txBody>
-          <a:bodyPr rtlCol="0" anchor="ctr" wrap="square"/>
+          <a:bodyPr wrap="square" rtlCol="0" anchor="ctr"/>
           <a:lstStyle/>
           <a:p>
             <a:pPr algn="ctr">
@@ -6248,7 +6694,7 @@
               </a:defRPr>
             </a:pPr>
             <a:r>
-              <a:t>Key Decision: Local embeddings (4 min) vs API-based (50 min) — 12x faster with same quality</a:t>
+              <a:t>Key Decision: Local embeddings (4 min) vs API-based (50 min) — 12x faster ingestion with same quality</a:t>
             </a:r>
           </a:p>
         </p:txBody>
@@ -6262,7 +6708,7 @@
 </file>
 
 <file path=ppt/slides/slide5.xml><?xml version="1.0" encoding="utf-8"?>
-<p:sld xmlns:a="http://schemas.openxmlformats.org/drawingml/2006/main" xmlns:p="http://schemas.openxmlformats.org/presentationml/2006/main" xmlns:r="http://schemas.openxmlformats.org/officeDocument/2006/relationships">
+<p:sld xmlns:a="http://schemas.openxmlformats.org/drawingml/2006/main" xmlns:r="http://schemas.openxmlformats.org/officeDocument/2006/relationships" xmlns:p="http://schemas.openxmlformats.org/presentationml/2006/main">
   <p:cSld>
     <p:spTree>
       <p:nvGrpSpPr>
@@ -6270,7 +6716,14 @@
         <p:cNvGrpSpPr/>
         <p:nvPr/>
       </p:nvGrpSpPr>
-      <p:grpSpPr/>
+      <p:grpSpPr>
+        <a:xfrm>
+          <a:off x="0" y="0"/>
+          <a:ext cx="0" cy="0"/>
+          <a:chOff x="0" y="0"/>
+          <a:chExt cx="0" cy="0"/>
+        </a:xfrm>
+      </p:grpSpPr>
       <p:sp>
         <p:nvSpPr>
           <p:cNvPr id="2" name="Rectangle 1"/>
@@ -6311,6 +6764,7 @@
           <a:lstStyle/>
           <a:p>
             <a:pPr algn="ctr"/>
+            <a:endParaRPr/>
           </a:p>
         </p:txBody>
       </p:sp>
@@ -6354,6 +6808,7 @@
           <a:lstStyle/>
           <a:p>
             <a:pPr algn="ctr"/>
+            <a:endParaRPr/>
           </a:p>
         </p:txBody>
       </p:sp>
@@ -6388,7 +6843,7 @@
               </a:defRPr>
             </a:pPr>
             <a:r>
-              <a:t>RAG Retrieval &amp; Grounding</a:t>
+              <a:t>Data Pipeline</a:t>
             </a:r>
           </a:p>
         </p:txBody>
@@ -6453,7 +6908,7 @@
         </p:nvSpPr>
         <p:spPr>
           <a:xfrm>
-            <a:off x="1325880" y="1207008"/>
+            <a:off x="1371600" y="1207008"/>
             <a:ext cx="1371600" cy="320040"/>
           </a:xfrm>
           <a:prstGeom prst="rect">
@@ -6489,8 +6944,8 @@
         </p:nvSpPr>
         <p:spPr>
           <a:xfrm>
-            <a:off x="2560320" y="1207008"/>
-            <a:ext cx="3474720" cy="365760"/>
+            <a:off x="2743200" y="1207008"/>
+            <a:ext cx="4572000" cy="261610"/>
           </a:xfrm>
           <a:prstGeom prst="rect">
             <a:avLst/>
@@ -6506,13 +6961,22 @@
             <a:pPr algn="l">
               <a:defRPr sz="1100" b="0">
                 <a:solidFill>
-                  <a:srgbClr val="2D3748"/>
-                </a:solidFill>
-                <a:latin typeface="Segoe UI"/>
-              </a:defRPr>
-            </a:pPr>
-            <a:r>
-              <a:t>Sitemap + crawl → 2,092 JSON pages</a:t>
+                  <a:srgbClr val="000000"/>
+                </a:solidFill>
+                <a:latin typeface="Segoe UI"/>
+              </a:defRPr>
+            </a:pPr>
+            <a:r>
+              <a:rPr dirty="0"/>
+              <a:t>Sitemap + link crawl → 2,</a:t>
+            </a:r>
+            <a:r>
+              <a:rPr lang="en-US" dirty="0"/>
+              <a:t>65</a:t>
+            </a:r>
+            <a:r>
+              <a:rPr dirty="0"/>
+              <a:t>2 structured JSON pages</a:t>
             </a:r>
           </a:p>
         </p:txBody>
@@ -6525,7 +6989,7 @@
         </p:nvSpPr>
         <p:spPr>
           <a:xfrm>
-            <a:off x="731520" y="1993392"/>
+            <a:off x="731520" y="1965960"/>
             <a:ext cx="384048" cy="384048"/>
           </a:xfrm>
           <a:prstGeom prst="ellipse">
@@ -6577,7 +7041,7 @@
         </p:nvSpPr>
         <p:spPr>
           <a:xfrm>
-            <a:off x="1325880" y="2011680"/>
+            <a:off x="1371600" y="1984248"/>
             <a:ext cx="1371600" cy="320040"/>
           </a:xfrm>
           <a:prstGeom prst="rect">
@@ -6613,8 +7077,8 @@
         </p:nvSpPr>
         <p:spPr>
           <a:xfrm>
-            <a:off x="2560320" y="2011680"/>
-            <a:ext cx="3474720" cy="365760"/>
+            <a:off x="2743200" y="1984248"/>
+            <a:ext cx="4572000" cy="365760"/>
           </a:xfrm>
           <a:prstGeom prst="rect">
             <a:avLst/>
@@ -6630,13 +7094,13 @@
             <a:pPr algn="l">
               <a:defRPr sz="1100" b="0">
                 <a:solidFill>
-                  <a:srgbClr val="2D3748"/>
-                </a:solidFill>
-                <a:latin typeface="Segoe UI"/>
-              </a:defRPr>
-            </a:pPr>
-            <a:r>
-              <a:t>JSON → Markdown with YAML metadata</a:t>
+                  <a:srgbClr val="000000"/>
+                </a:solidFill>
+                <a:latin typeface="Segoe UI"/>
+              </a:defRPr>
+            </a:pPr>
+            <a:r>
+              <a:t>JSON → clean Markdown with YAML front matter</a:t>
             </a:r>
           </a:p>
         </p:txBody>
@@ -6649,7 +7113,7 @@
         </p:nvSpPr>
         <p:spPr>
           <a:xfrm>
-            <a:off x="731520" y="2798064"/>
+            <a:off x="731520" y="2743200"/>
             <a:ext cx="384048" cy="384048"/>
           </a:xfrm>
           <a:prstGeom prst="ellipse">
@@ -6701,7 +7165,7 @@
         </p:nvSpPr>
         <p:spPr>
           <a:xfrm>
-            <a:off x="1325880" y="2816352"/>
+            <a:off x="1371600" y="2761488"/>
             <a:ext cx="1371600" cy="320040"/>
           </a:xfrm>
           <a:prstGeom prst="rect">
@@ -6737,8 +7201,8 @@
         </p:nvSpPr>
         <p:spPr>
           <a:xfrm>
-            <a:off x="2560320" y="2816352"/>
-            <a:ext cx="3474720" cy="365760"/>
+            <a:off x="2743200" y="2761488"/>
+            <a:ext cx="4572000" cy="365760"/>
           </a:xfrm>
           <a:prstGeom prst="rect">
             <a:avLst/>
@@ -6754,13 +7218,13 @@
             <a:pPr algn="l">
               <a:defRPr sz="1100" b="0">
                 <a:solidFill>
-                  <a:srgbClr val="2D3748"/>
-                </a:solidFill>
-                <a:latin typeface="Segoe UI"/>
-              </a:defRPr>
-            </a:pPr>
-            <a:r>
-              <a:t>Heading-based splits, 50–1500 chars</a:t>
+                  <a:srgbClr val="000000"/>
+                </a:solidFill>
+                <a:latin typeface="Segoe UI"/>
+              </a:defRPr>
+            </a:pPr>
+            <a:r>
+              <a:t>Split by headings, sentence-boundary aware (50–1500 chars)</a:t>
             </a:r>
           </a:p>
         </p:txBody>
@@ -6773,7 +7237,7 @@
         </p:nvSpPr>
         <p:spPr>
           <a:xfrm>
-            <a:off x="731520" y="3602736"/>
+            <a:off x="731520" y="3520439"/>
             <a:ext cx="384048" cy="384048"/>
           </a:xfrm>
           <a:prstGeom prst="ellipse">
@@ -6825,7 +7289,7 @@
         </p:nvSpPr>
         <p:spPr>
           <a:xfrm>
-            <a:off x="1325880" y="3621024"/>
+            <a:off x="1371600" y="3538727"/>
             <a:ext cx="1371600" cy="320040"/>
           </a:xfrm>
           <a:prstGeom prst="rect">
@@ -6861,8 +7325,8 @@
         </p:nvSpPr>
         <p:spPr>
           <a:xfrm>
-            <a:off x="2560320" y="3621024"/>
-            <a:ext cx="3474720" cy="365760"/>
+            <a:off x="2743200" y="3538727"/>
+            <a:ext cx="4572000" cy="365760"/>
           </a:xfrm>
           <a:prstGeom prst="rect">
             <a:avLst/>
@@ -6878,13 +7342,13 @@
             <a:pPr algn="l">
               <a:defRPr sz="1100" b="0">
                 <a:solidFill>
-                  <a:srgbClr val="2D3748"/>
-                </a:solidFill>
-                <a:latin typeface="Segoe UI"/>
-              </a:defRPr>
-            </a:pPr>
-            <a:r>
-              <a:t>BGE-base local, 768d, MPS GPU</a:t>
+                  <a:srgbClr val="000000"/>
+                </a:solidFill>
+                <a:latin typeface="Segoe UI"/>
+              </a:defRPr>
+            </a:pPr>
+            <a:r>
+              <a:t>BAAI/bge-base-en-v1.5, 768 dims, Apple Silicon MPS GPU</a:t>
             </a:r>
           </a:p>
         </p:txBody>
@@ -6897,7 +7361,7 @@
         </p:nvSpPr>
         <p:spPr>
           <a:xfrm>
-            <a:off x="731520" y="4407408"/>
+            <a:off x="731520" y="4297680"/>
             <a:ext cx="384048" cy="384048"/>
           </a:xfrm>
           <a:prstGeom prst="ellipse">
@@ -6949,7 +7413,7 @@
         </p:nvSpPr>
         <p:spPr>
           <a:xfrm>
-            <a:off x="1325880" y="4425696"/>
+            <a:off x="1371600" y="4315968"/>
             <a:ext cx="1371600" cy="320040"/>
           </a:xfrm>
           <a:prstGeom prst="rect">
@@ -6985,8 +7449,8 @@
         </p:nvSpPr>
         <p:spPr>
           <a:xfrm>
-            <a:off x="2560320" y="4425696"/>
-            <a:ext cx="3474720" cy="365760"/>
+            <a:off x="2743200" y="4315968"/>
+            <a:ext cx="4572000" cy="365760"/>
           </a:xfrm>
           <a:prstGeom prst="rect">
             <a:avLst/>
@@ -7002,13 +7466,13 @@
             <a:pPr algn="l">
               <a:defRPr sz="1100" b="0">
                 <a:solidFill>
-                  <a:srgbClr val="2D3748"/>
-                </a:solidFill>
-                <a:latin typeface="Segoe UI"/>
-              </a:defRPr>
-            </a:pPr>
-            <a:r>
-              <a:t>ChromaDB, cosine HNSW index</a:t>
+                  <a:srgbClr val="000000"/>
+                </a:solidFill>
+                <a:latin typeface="Segoe UI"/>
+              </a:defRPr>
+            </a:pPr>
+            <a:r>
+              <a:t>ChromaDB cosine HNSW index, persistent storage</a:t>
             </a:r>
           </a:p>
         </p:txBody>
@@ -7021,8 +7485,8 @@
         </p:nvSpPr>
         <p:spPr>
           <a:xfrm>
-            <a:off x="6675120" y="1188720"/>
-            <a:ext cx="4937760" cy="457200"/>
+            <a:off x="7772400" y="1188720"/>
+            <a:ext cx="3931920" cy="411480"/>
           </a:xfrm>
           <a:prstGeom prst="roundRect">
             <a:avLst/>
@@ -7049,11 +7513,11 @@
           </a:fontRef>
         </p:style>
         <p:txBody>
-          <a:bodyPr rtlCol="0" anchor="ctr" wrap="square"/>
+          <a:bodyPr wrap="square" rtlCol="0" anchor="ctr"/>
           <a:lstStyle/>
           <a:p>
             <a:pPr algn="ctr">
-              <a:defRPr sz="1200" b="1">
+              <a:defRPr sz="1100" b="1">
                 <a:solidFill>
                   <a:srgbClr val="FFFFFF"/>
                 </a:solidFill>
@@ -7061,7 +7525,7 @@
               </a:defRPr>
             </a:pPr>
             <a:r>
-              <a:t>RETRIEVAL STRATEGY</a:t>
+              <a:t>CHUNKING STRATEGY</a:t>
             </a:r>
           </a:p>
         </p:txBody>
@@ -7074,8 +7538,8 @@
         </p:nvSpPr>
         <p:spPr>
           <a:xfrm>
-            <a:off x="6858000" y="1828800"/>
-            <a:ext cx="4754880" cy="411480"/>
+            <a:off x="7955279" y="1737360"/>
+            <a:ext cx="3749039" cy="347472"/>
           </a:xfrm>
           <a:prstGeom prst="rect">
             <a:avLst/>
@@ -7091,13 +7555,13 @@
             <a:pPr algn="l">
               <a:defRPr sz="1100" b="0">
                 <a:solidFill>
-                  <a:srgbClr val="2D3748"/>
-                </a:solidFill>
-                <a:latin typeface="Segoe UI"/>
-              </a:defRPr>
-            </a:pPr>
-            <a:r>
-              <a:t>•  Query expansion for pronouns &amp; follow-ups</a:t>
+                  <a:srgbClr val="000000"/>
+                </a:solidFill>
+                <a:latin typeface="Segoe UI"/>
+              </a:defRPr>
+            </a:pPr>
+            <a:r>
+              <a:t>•  Split at markdown headings (##, ###)</a:t>
             </a:r>
           </a:p>
         </p:txBody>
@@ -7110,8 +7574,8 @@
         </p:nvSpPr>
         <p:spPr>
           <a:xfrm>
-            <a:off x="6858000" y="2267712"/>
-            <a:ext cx="4754880" cy="411480"/>
+            <a:off x="7955279" y="2103120"/>
+            <a:ext cx="3749039" cy="347472"/>
           </a:xfrm>
           <a:prstGeom prst="rect">
             <a:avLst/>
@@ -7127,13 +7591,13 @@
             <a:pPr algn="l">
               <a:defRPr sz="1100" b="0">
                 <a:solidFill>
-                  <a:srgbClr val="2D3748"/>
-                </a:solidFill>
-                <a:latin typeface="Segoe UI"/>
-              </a:defRPr>
-            </a:pPr>
-            <a:r>
-              <a:t>•  Same model for indexing and querying</a:t>
+                  <a:srgbClr val="000000"/>
+                </a:solidFill>
+                <a:latin typeface="Segoe UI"/>
+              </a:defRPr>
+            </a:pPr>
+            <a:r>
+              <a:t>•  Context prefix: page title + section</a:t>
             </a:r>
           </a:p>
         </p:txBody>
@@ -7146,8 +7610,8 @@
         </p:nvSpPr>
         <p:spPr>
           <a:xfrm>
-            <a:off x="6858000" y="2706624"/>
-            <a:ext cx="4754880" cy="411480"/>
+            <a:off x="7955279" y="2468880"/>
+            <a:ext cx="3749039" cy="347472"/>
           </a:xfrm>
           <a:prstGeom prst="rect">
             <a:avLst/>
@@ -7163,13 +7627,13 @@
             <a:pPr algn="l">
               <a:defRPr sz="1100" b="0">
                 <a:solidFill>
-                  <a:srgbClr val="2D3748"/>
-                </a:solidFill>
-                <a:latin typeface="Segoe UI"/>
-              </a:defRPr>
-            </a:pPr>
-            <a:r>
-              <a:t>•  Top-15 retrieved, top-10 to LLM</a:t>
+                  <a:srgbClr val="000000"/>
+                </a:solidFill>
+                <a:latin typeface="Segoe UI"/>
+              </a:defRPr>
+            </a:pPr>
+            <a:r>
+              <a:t>•  Sentence-boundary aware splits</a:t>
             </a:r>
           </a:p>
         </p:txBody>
@@ -7182,8 +7646,8 @@
         </p:nvSpPr>
         <p:spPr>
           <a:xfrm>
-            <a:off x="6858000" y="3145536"/>
-            <a:ext cx="4754880" cy="411480"/>
+            <a:off x="7955279" y="2834640"/>
+            <a:ext cx="3749039" cy="347472"/>
           </a:xfrm>
           <a:prstGeom prst="rect">
             <a:avLst/>
@@ -7199,13 +7663,13 @@
             <a:pPr algn="l">
               <a:defRPr sz="1100" b="0">
                 <a:solidFill>
-                  <a:srgbClr val="2D3748"/>
-                </a:solidFill>
-                <a:latin typeface="Segoe UI"/>
-              </a:defRPr>
-            </a:pPr>
-            <a:r>
-              <a:t>•  Relevance threshold: 0.3 minimum</a:t>
+                  <a:srgbClr val="000000"/>
+                </a:solidFill>
+                <a:latin typeface="Segoe UI"/>
+              </a:defRPr>
+            </a:pPr>
+            <a:r>
+              <a:t>•  Min 50 / Max 1500 characters</a:t>
             </a:r>
           </a:p>
         </p:txBody>
@@ -7218,8 +7682,8 @@
         </p:nvSpPr>
         <p:spPr>
           <a:xfrm>
-            <a:off x="6858000" y="3584448"/>
-            <a:ext cx="4754880" cy="411480"/>
+            <a:off x="7955279" y="3200400"/>
+            <a:ext cx="3749039" cy="347472"/>
           </a:xfrm>
           <a:prstGeom prst="rect">
             <a:avLst/>
@@ -7235,49 +7699,13 @@
             <a:pPr algn="l">
               <a:defRPr sz="1100" b="0">
                 <a:solidFill>
-                  <a:srgbClr val="2D3748"/>
-                </a:solidFill>
-                <a:latin typeface="Segoe UI"/>
-              </a:defRPr>
-            </a:pPr>
-            <a:r>
-              <a:t>•  Chat history (3 turns) for context</a:t>
-            </a:r>
-          </a:p>
-        </p:txBody>
-      </p:sp>
-      <p:sp>
-        <p:nvSpPr>
-          <p:cNvPr id="26" name="TextBox 25"/>
-          <p:cNvSpPr txBox="1"/>
-          <p:nvPr/>
-        </p:nvSpPr>
-        <p:spPr>
-          <a:xfrm>
-            <a:off x="6858000" y="4023360"/>
-            <a:ext cx="4754880" cy="411480"/>
-          </a:xfrm>
-          <a:prstGeom prst="rect">
-            <a:avLst/>
-          </a:prstGeom>
-          <a:noFill/>
-        </p:spPr>
-        <p:txBody>
-          <a:bodyPr wrap="square">
-            <a:spAutoFit/>
-          </a:bodyPr>
-          <a:lstStyle/>
-          <a:p>
-            <a:pPr algn="l">
-              <a:defRPr sz="1100" b="0">
-                <a:solidFill>
-                  <a:srgbClr val="2D3748"/>
-                </a:solidFill>
-                <a:latin typeface="Segoe UI"/>
-              </a:defRPr>
-            </a:pPr>
-            <a:r>
-              <a:t>•  Grounded: only answers from retrieved data</a:t>
+                  <a:srgbClr val="000000"/>
+                </a:solidFill>
+                <a:latin typeface="Segoe UI"/>
+              </a:defRPr>
+            </a:pPr>
+            <a:r>
+              <a:t>•  ~10 chunks per page average</a:t>
             </a:r>
           </a:p>
         </p:txBody>
@@ -7291,7 +7719,7 @@
 </file>
 
 <file path=ppt/slides/slide6.xml><?xml version="1.0" encoding="utf-8"?>
-<p:sld xmlns:a="http://schemas.openxmlformats.org/drawingml/2006/main" xmlns:p="http://schemas.openxmlformats.org/presentationml/2006/main" xmlns:r="http://schemas.openxmlformats.org/officeDocument/2006/relationships">
+<p:sld xmlns:a="http://schemas.openxmlformats.org/drawingml/2006/main" xmlns:r="http://schemas.openxmlformats.org/officeDocument/2006/relationships" xmlns:p="http://schemas.openxmlformats.org/presentationml/2006/main">
   <p:cSld>
     <p:spTree>
       <p:nvGrpSpPr>
@@ -7299,7 +7727,14 @@
         <p:cNvGrpSpPr/>
         <p:nvPr/>
       </p:nvGrpSpPr>
-      <p:grpSpPr/>
+      <p:grpSpPr>
+        <a:xfrm>
+          <a:off x="0" y="0"/>
+          <a:ext cx="0" cy="0"/>
+          <a:chOff x="0" y="0"/>
+          <a:chExt cx="0" cy="0"/>
+        </a:xfrm>
+      </p:grpSpPr>
       <p:sp>
         <p:nvSpPr>
           <p:cNvPr id="2" name="Rectangle 1"/>
@@ -7340,6 +7775,7 @@
           <a:lstStyle/>
           <a:p>
             <a:pPr algn="ctr"/>
+            <a:endParaRPr/>
           </a:p>
         </p:txBody>
       </p:sp>
@@ -7383,6 +7819,7 @@
           <a:lstStyle/>
           <a:p>
             <a:pPr algn="ctr"/>
+            <a:endParaRPr/>
           </a:p>
         </p:txBody>
       </p:sp>
@@ -7417,7 +7854,7 @@
               </a:defRPr>
             </a:pPr>
             <a:r>
-              <a:t>Demo &amp; Summary</a:t>
+              <a:t>Retrieval &amp; Grounding Design</a:t>
             </a:r>
           </a:p>
         </p:txBody>
@@ -7431,7 +7868,276 @@
         <p:spPr>
           <a:xfrm>
             <a:off x="640080" y="1188720"/>
-            <a:ext cx="5029200" cy="457200"/>
+            <a:ext cx="5029200" cy="411480"/>
+          </a:xfrm>
+          <a:prstGeom prst="roundRect">
+            <a:avLst/>
+          </a:prstGeom>
+          <a:solidFill>
+            <a:srgbClr val="1B365D"/>
+          </a:solidFill>
+          <a:ln>
+            <a:noFill/>
+          </a:ln>
+        </p:spPr>
+        <p:style>
+          <a:lnRef idx="1">
+            <a:schemeClr val="accent1"/>
+          </a:lnRef>
+          <a:fillRef idx="3">
+            <a:schemeClr val="accent1"/>
+          </a:fillRef>
+          <a:effectRef idx="2">
+            <a:schemeClr val="accent1"/>
+          </a:effectRef>
+          <a:fontRef idx="minor">
+            <a:schemeClr val="lt1"/>
+          </a:fontRef>
+        </p:style>
+        <p:txBody>
+          <a:bodyPr wrap="square" rtlCol="0" anchor="ctr"/>
+          <a:lstStyle/>
+          <a:p>
+            <a:pPr algn="ctr">
+              <a:defRPr sz="1100" b="1">
+                <a:solidFill>
+                  <a:srgbClr val="FFFFFF"/>
+                </a:solidFill>
+                <a:latin typeface="Segoe UI"/>
+              </a:defRPr>
+            </a:pPr>
+            <a:r>
+              <a:t>RETRIEVAL STRATEGY</a:t>
+            </a:r>
+          </a:p>
+        </p:txBody>
+      </p:sp>
+      <p:sp>
+        <p:nvSpPr>
+          <p:cNvPr id="6" name="TextBox 5"/>
+          <p:cNvSpPr txBox="1"/>
+          <p:nvPr/>
+        </p:nvSpPr>
+        <p:spPr>
+          <a:xfrm>
+            <a:off x="822960" y="1737360"/>
+            <a:ext cx="4846320" cy="365760"/>
+          </a:xfrm>
+          <a:prstGeom prst="rect">
+            <a:avLst/>
+          </a:prstGeom>
+          <a:noFill/>
+        </p:spPr>
+        <p:txBody>
+          <a:bodyPr wrap="square">
+            <a:spAutoFit/>
+          </a:bodyPr>
+          <a:lstStyle/>
+          <a:p>
+            <a:pPr algn="l">
+              <a:defRPr sz="1200" b="0">
+                <a:solidFill>
+                  <a:srgbClr val="000000"/>
+                </a:solidFill>
+                <a:latin typeface="Segoe UI"/>
+              </a:defRPr>
+            </a:pPr>
+            <a:r>
+              <a:t>•  Query expansion resolves pronouns &amp; follow-ups</a:t>
+            </a:r>
+          </a:p>
+        </p:txBody>
+      </p:sp>
+      <p:sp>
+        <p:nvSpPr>
+          <p:cNvPr id="7" name="TextBox 6"/>
+          <p:cNvSpPr txBox="1"/>
+          <p:nvPr/>
+        </p:nvSpPr>
+        <p:spPr>
+          <a:xfrm>
+            <a:off x="822960" y="2130552"/>
+            <a:ext cx="4846320" cy="365760"/>
+          </a:xfrm>
+          <a:prstGeom prst="rect">
+            <a:avLst/>
+          </a:prstGeom>
+          <a:noFill/>
+        </p:spPr>
+        <p:txBody>
+          <a:bodyPr wrap="square">
+            <a:spAutoFit/>
+          </a:bodyPr>
+          <a:lstStyle/>
+          <a:p>
+            <a:pPr algn="l">
+              <a:defRPr sz="1200" b="0">
+                <a:solidFill>
+                  <a:srgbClr val="000000"/>
+                </a:solidFill>
+                <a:latin typeface="Segoe UI"/>
+              </a:defRPr>
+            </a:pPr>
+            <a:r>
+              <a:t>•  Same BGE model for indexing and querying</a:t>
+            </a:r>
+          </a:p>
+        </p:txBody>
+      </p:sp>
+      <p:sp>
+        <p:nvSpPr>
+          <p:cNvPr id="8" name="TextBox 7"/>
+          <p:cNvSpPr txBox="1"/>
+          <p:nvPr/>
+        </p:nvSpPr>
+        <p:spPr>
+          <a:xfrm>
+            <a:off x="822960" y="2523744"/>
+            <a:ext cx="4846320" cy="365760"/>
+          </a:xfrm>
+          <a:prstGeom prst="rect">
+            <a:avLst/>
+          </a:prstGeom>
+          <a:noFill/>
+        </p:spPr>
+        <p:txBody>
+          <a:bodyPr wrap="square">
+            <a:spAutoFit/>
+          </a:bodyPr>
+          <a:lstStyle/>
+          <a:p>
+            <a:pPr algn="l">
+              <a:defRPr sz="1200" b="0">
+                <a:solidFill>
+                  <a:srgbClr val="000000"/>
+                </a:solidFill>
+                <a:latin typeface="Segoe UI"/>
+              </a:defRPr>
+            </a:pPr>
+            <a:r>
+              <a:t>•  Top-15 retrieved via cosine similarity</a:t>
+            </a:r>
+          </a:p>
+        </p:txBody>
+      </p:sp>
+      <p:sp>
+        <p:nvSpPr>
+          <p:cNvPr id="9" name="TextBox 8"/>
+          <p:cNvSpPr txBox="1"/>
+          <p:nvPr/>
+        </p:nvSpPr>
+        <p:spPr>
+          <a:xfrm>
+            <a:off x="822960" y="2916936"/>
+            <a:ext cx="4846320" cy="365760"/>
+          </a:xfrm>
+          <a:prstGeom prst="rect">
+            <a:avLst/>
+          </a:prstGeom>
+          <a:noFill/>
+        </p:spPr>
+        <p:txBody>
+          <a:bodyPr wrap="square">
+            <a:spAutoFit/>
+          </a:bodyPr>
+          <a:lstStyle/>
+          <a:p>
+            <a:pPr algn="l">
+              <a:defRPr sz="1200" b="0">
+                <a:solidFill>
+                  <a:srgbClr val="000000"/>
+                </a:solidFill>
+                <a:latin typeface="Segoe UI"/>
+              </a:defRPr>
+            </a:pPr>
+            <a:r>
+              <a:t>•  Top-10 chunks passed as LLM context</a:t>
+            </a:r>
+          </a:p>
+        </p:txBody>
+      </p:sp>
+      <p:sp>
+        <p:nvSpPr>
+          <p:cNvPr id="10" name="TextBox 9"/>
+          <p:cNvSpPr txBox="1"/>
+          <p:nvPr/>
+        </p:nvSpPr>
+        <p:spPr>
+          <a:xfrm>
+            <a:off x="822960" y="3310128"/>
+            <a:ext cx="4846320" cy="365760"/>
+          </a:xfrm>
+          <a:prstGeom prst="rect">
+            <a:avLst/>
+          </a:prstGeom>
+          <a:noFill/>
+        </p:spPr>
+        <p:txBody>
+          <a:bodyPr wrap="square">
+            <a:spAutoFit/>
+          </a:bodyPr>
+          <a:lstStyle/>
+          <a:p>
+            <a:pPr algn="l">
+              <a:defRPr sz="1200" b="0">
+                <a:solidFill>
+                  <a:srgbClr val="000000"/>
+                </a:solidFill>
+                <a:latin typeface="Segoe UI"/>
+              </a:defRPr>
+            </a:pPr>
+            <a:r>
+              <a:t>•  Relevance threshold: 0.3 minimum score</a:t>
+            </a:r>
+          </a:p>
+        </p:txBody>
+      </p:sp>
+      <p:sp>
+        <p:nvSpPr>
+          <p:cNvPr id="11" name="TextBox 10"/>
+          <p:cNvSpPr txBox="1"/>
+          <p:nvPr/>
+        </p:nvSpPr>
+        <p:spPr>
+          <a:xfrm>
+            <a:off x="822960" y="3703320"/>
+            <a:ext cx="4846320" cy="365760"/>
+          </a:xfrm>
+          <a:prstGeom prst="rect">
+            <a:avLst/>
+          </a:prstGeom>
+          <a:noFill/>
+        </p:spPr>
+        <p:txBody>
+          <a:bodyPr wrap="square">
+            <a:spAutoFit/>
+          </a:bodyPr>
+          <a:lstStyle/>
+          <a:p>
+            <a:pPr algn="l">
+              <a:defRPr sz="1200" b="0">
+                <a:solidFill>
+                  <a:srgbClr val="000000"/>
+                </a:solidFill>
+                <a:latin typeface="Segoe UI"/>
+              </a:defRPr>
+            </a:pPr>
+            <a:r>
+              <a:t>•  Chat history (last 3 turns) maintained</a:t>
+            </a:r>
+          </a:p>
+        </p:txBody>
+      </p:sp>
+      <p:sp>
+        <p:nvSpPr>
+          <p:cNvPr id="12" name="Rounded Rectangle 11"/>
+          <p:cNvSpPr/>
+          <p:nvPr/>
+        </p:nvSpPr>
+        <p:spPr>
+          <a:xfrm>
+            <a:off x="6217920" y="1188720"/>
+            <a:ext cx="5303520" cy="411480"/>
           </a:xfrm>
           <a:prstGeom prst="roundRect">
             <a:avLst/>
@@ -7458,11 +8164,11 @@
           </a:fontRef>
         </p:style>
         <p:txBody>
-          <a:bodyPr rtlCol="0" anchor="ctr" wrap="square"/>
+          <a:bodyPr wrap="square" rtlCol="0" anchor="ctr"/>
           <a:lstStyle/>
           <a:p>
             <a:pPr algn="ctr">
-              <a:defRPr sz="1200" b="1">
+              <a:defRPr sz="1100" b="1">
                 <a:solidFill>
                   <a:srgbClr val="FFFFFF"/>
                 </a:solidFill>
@@ -7470,7 +8176,480 @@
               </a:defRPr>
             </a:pPr>
             <a:r>
-              <a:t>USER INTERFACE</a:t>
+              <a:t>GROUNDING &amp; REFUSAL</a:t>
+            </a:r>
+          </a:p>
+        </p:txBody>
+      </p:sp>
+      <p:sp>
+        <p:nvSpPr>
+          <p:cNvPr id="13" name="TextBox 12"/>
+          <p:cNvSpPr txBox="1"/>
+          <p:nvPr/>
+        </p:nvSpPr>
+        <p:spPr>
+          <a:xfrm>
+            <a:off x="6400800" y="1737360"/>
+            <a:ext cx="5120640" cy="365760"/>
+          </a:xfrm>
+          <a:prstGeom prst="rect">
+            <a:avLst/>
+          </a:prstGeom>
+          <a:noFill/>
+        </p:spPr>
+        <p:txBody>
+          <a:bodyPr wrap="square">
+            <a:spAutoFit/>
+          </a:bodyPr>
+          <a:lstStyle/>
+          <a:p>
+            <a:pPr algn="l">
+              <a:defRPr sz="1200" b="0">
+                <a:solidFill>
+                  <a:srgbClr val="000000"/>
+                </a:solidFill>
+                <a:latin typeface="Segoe UI"/>
+              </a:defRPr>
+            </a:pPr>
+            <a:r>
+              <a:t>•  Answers ONLY from retrieved university content</a:t>
+            </a:r>
+          </a:p>
+        </p:txBody>
+      </p:sp>
+      <p:sp>
+        <p:nvSpPr>
+          <p:cNvPr id="14" name="TextBox 13"/>
+          <p:cNvSpPr txBox="1"/>
+          <p:nvPr/>
+        </p:nvSpPr>
+        <p:spPr>
+          <a:xfrm>
+            <a:off x="6400800" y="2130552"/>
+            <a:ext cx="5120640" cy="365760"/>
+          </a:xfrm>
+          <a:prstGeom prst="rect">
+            <a:avLst/>
+          </a:prstGeom>
+          <a:noFill/>
+        </p:spPr>
+        <p:txBody>
+          <a:bodyPr wrap="square">
+            <a:spAutoFit/>
+          </a:bodyPr>
+          <a:lstStyle/>
+          <a:p>
+            <a:pPr algn="l">
+              <a:defRPr sz="1200" b="0">
+                <a:solidFill>
+                  <a:srgbClr val="000000"/>
+                </a:solidFill>
+                <a:latin typeface="Segoe UI"/>
+              </a:defRPr>
+            </a:pPr>
+            <a:r>
+              <a:t>•  No hallucinated or external information</a:t>
+            </a:r>
+          </a:p>
+        </p:txBody>
+      </p:sp>
+      <p:sp>
+        <p:nvSpPr>
+          <p:cNvPr id="15" name="TextBox 14"/>
+          <p:cNvSpPr txBox="1"/>
+          <p:nvPr/>
+        </p:nvSpPr>
+        <p:spPr>
+          <a:xfrm>
+            <a:off x="6400800" y="2523744"/>
+            <a:ext cx="5120640" cy="365760"/>
+          </a:xfrm>
+          <a:prstGeom prst="rect">
+            <a:avLst/>
+          </a:prstGeom>
+          <a:noFill/>
+        </p:spPr>
+        <p:txBody>
+          <a:bodyPr wrap="square">
+            <a:spAutoFit/>
+          </a:bodyPr>
+          <a:lstStyle/>
+          <a:p>
+            <a:pPr algn="l">
+              <a:defRPr sz="1200" b="0">
+                <a:solidFill>
+                  <a:srgbClr val="000000"/>
+                </a:solidFill>
+                <a:latin typeface="Segoe UI"/>
+              </a:defRPr>
+            </a:pPr>
+            <a:r>
+              <a:t>•  Every factual claim cited with source URL</a:t>
+            </a:r>
+          </a:p>
+        </p:txBody>
+      </p:sp>
+      <p:sp>
+        <p:nvSpPr>
+          <p:cNvPr id="16" name="TextBox 15"/>
+          <p:cNvSpPr txBox="1"/>
+          <p:nvPr/>
+        </p:nvSpPr>
+        <p:spPr>
+          <a:xfrm>
+            <a:off x="6400800" y="2916936"/>
+            <a:ext cx="5120640" cy="365760"/>
+          </a:xfrm>
+          <a:prstGeom prst="rect">
+            <a:avLst/>
+          </a:prstGeom>
+          <a:noFill/>
+        </p:spPr>
+        <p:txBody>
+          <a:bodyPr wrap="square">
+            <a:spAutoFit/>
+          </a:bodyPr>
+          <a:lstStyle/>
+          <a:p>
+            <a:pPr algn="l">
+              <a:defRPr sz="1200" b="0">
+                <a:solidFill>
+                  <a:srgbClr val="000000"/>
+                </a:solidFill>
+                <a:latin typeface="Segoe UI"/>
+              </a:defRPr>
+            </a:pPr>
+            <a:r>
+              <a:t>•  Low-confidence queries trigger refusal path</a:t>
+            </a:r>
+          </a:p>
+        </p:txBody>
+      </p:sp>
+      <p:sp>
+        <p:nvSpPr>
+          <p:cNvPr id="17" name="TextBox 16"/>
+          <p:cNvSpPr txBox="1"/>
+          <p:nvPr/>
+        </p:nvSpPr>
+        <p:spPr>
+          <a:xfrm>
+            <a:off x="6400800" y="3310128"/>
+            <a:ext cx="5120640" cy="365760"/>
+          </a:xfrm>
+          <a:prstGeom prst="rect">
+            <a:avLst/>
+          </a:prstGeom>
+          <a:noFill/>
+        </p:spPr>
+        <p:txBody>
+          <a:bodyPr wrap="square">
+            <a:spAutoFit/>
+          </a:bodyPr>
+          <a:lstStyle/>
+          <a:p>
+            <a:pPr algn="l">
+              <a:defRPr sz="1200" b="0">
+                <a:solidFill>
+                  <a:srgbClr val="000000"/>
+                </a:solidFill>
+                <a:latin typeface="Segoe UI"/>
+              </a:defRPr>
+            </a:pPr>
+            <a:r>
+              <a:t>•  Refusal template with contact info &amp; links</a:t>
+            </a:r>
+          </a:p>
+        </p:txBody>
+      </p:sp>
+      <p:sp>
+        <p:nvSpPr>
+          <p:cNvPr id="18" name="TextBox 17"/>
+          <p:cNvSpPr txBox="1"/>
+          <p:nvPr/>
+        </p:nvSpPr>
+        <p:spPr>
+          <a:xfrm>
+            <a:off x="6400800" y="3703320"/>
+            <a:ext cx="5120640" cy="365760"/>
+          </a:xfrm>
+          <a:prstGeom prst="rect">
+            <a:avLst/>
+          </a:prstGeom>
+          <a:noFill/>
+        </p:spPr>
+        <p:txBody>
+          <a:bodyPr wrap="square">
+            <a:spAutoFit/>
+          </a:bodyPr>
+          <a:lstStyle/>
+          <a:p>
+            <a:pPr algn="l">
+              <a:defRPr sz="1200" b="0">
+                <a:solidFill>
+                  <a:srgbClr val="000000"/>
+                </a:solidFill>
+                <a:latin typeface="Segoe UI"/>
+              </a:defRPr>
+            </a:pPr>
+            <a:r>
+              <a:t>•  Out-of-domain questions detected and refused</a:t>
+            </a:r>
+          </a:p>
+        </p:txBody>
+      </p:sp>
+      <p:sp>
+        <p:nvSpPr>
+          <p:cNvPr id="19" name="Rounded Rectangle 18"/>
+          <p:cNvSpPr/>
+          <p:nvPr/>
+        </p:nvSpPr>
+        <p:spPr>
+          <a:xfrm>
+            <a:off x="640080" y="4297680"/>
+            <a:ext cx="10972800" cy="548640"/>
+          </a:xfrm>
+          <a:prstGeom prst="roundRect">
+            <a:avLst/>
+          </a:prstGeom>
+          <a:solidFill>
+            <a:srgbClr val="F8F9FA"/>
+          </a:solidFill>
+          <a:ln w="19050">
+            <a:solidFill>
+              <a:srgbClr val="E2E5EA"/>
+            </a:solidFill>
+          </a:ln>
+        </p:spPr>
+        <p:style>
+          <a:lnRef idx="1">
+            <a:schemeClr val="accent1"/>
+          </a:lnRef>
+          <a:fillRef idx="3">
+            <a:schemeClr val="accent1"/>
+          </a:fillRef>
+          <a:effectRef idx="2">
+            <a:schemeClr val="accent1"/>
+          </a:effectRef>
+          <a:fontRef idx="minor">
+            <a:schemeClr val="lt1"/>
+          </a:fontRef>
+        </p:style>
+        <p:txBody>
+          <a:bodyPr wrap="square" rtlCol="0" anchor="ctr"/>
+          <a:lstStyle/>
+          <a:p>
+            <a:pPr algn="ctr">
+              <a:defRPr sz="1100" b="0">
+                <a:solidFill>
+                  <a:srgbClr val="1B365D"/>
+                </a:solidFill>
+                <a:latin typeface="Segoe UI"/>
+              </a:defRPr>
+            </a:pPr>
+            <a:r>
+              <a:t>Query Expansion Example:  "tell me more"  →  "PhD in AI — tell me more"  (prepends topic from chat history)</a:t>
+            </a:r>
+          </a:p>
+        </p:txBody>
+      </p:sp>
+    </p:spTree>
+  </p:cSld>
+  <p:clrMapOvr>
+    <a:masterClrMapping/>
+  </p:clrMapOvr>
+</p:sld>
+</file>
+
+<file path=ppt/slides/slide7.xml><?xml version="1.0" encoding="utf-8"?>
+<p:sld xmlns:a="http://schemas.openxmlformats.org/drawingml/2006/main" xmlns:r="http://schemas.openxmlformats.org/officeDocument/2006/relationships" xmlns:p="http://schemas.openxmlformats.org/presentationml/2006/main">
+  <p:cSld>
+    <p:spTree>
+      <p:nvGrpSpPr>
+        <p:cNvPr id="1" name=""/>
+        <p:cNvGrpSpPr/>
+        <p:nvPr/>
+      </p:nvGrpSpPr>
+      <p:grpSpPr>
+        <a:xfrm>
+          <a:off x="0" y="0"/>
+          <a:ext cx="0" cy="0"/>
+          <a:chOff x="0" y="0"/>
+          <a:chExt cx="0" cy="0"/>
+        </a:xfrm>
+      </p:grpSpPr>
+      <p:sp>
+        <p:nvSpPr>
+          <p:cNvPr id="2" name="Rectangle 1"/>
+          <p:cNvSpPr/>
+          <p:nvPr/>
+        </p:nvSpPr>
+        <p:spPr>
+          <a:xfrm>
+            <a:off x="0" y="0"/>
+            <a:ext cx="12191695" cy="868680"/>
+          </a:xfrm>
+          <a:prstGeom prst="rect">
+            <a:avLst/>
+          </a:prstGeom>
+          <a:solidFill>
+            <a:srgbClr val="FFFFFF"/>
+          </a:solidFill>
+          <a:ln>
+            <a:noFill/>
+          </a:ln>
+        </p:spPr>
+        <p:style>
+          <a:lnRef idx="1">
+            <a:schemeClr val="accent1"/>
+          </a:lnRef>
+          <a:fillRef idx="3">
+            <a:schemeClr val="accent1"/>
+          </a:fillRef>
+          <a:effectRef idx="2">
+            <a:schemeClr val="accent1"/>
+          </a:effectRef>
+          <a:fontRef idx="minor">
+            <a:schemeClr val="lt1"/>
+          </a:fontRef>
+        </p:style>
+        <p:txBody>
+          <a:bodyPr rtlCol="0" anchor="ctr"/>
+          <a:lstStyle/>
+          <a:p>
+            <a:pPr algn="ctr"/>
+            <a:endParaRPr/>
+          </a:p>
+        </p:txBody>
+      </p:sp>
+      <p:sp>
+        <p:nvSpPr>
+          <p:cNvPr id="3" name="Rectangle 2"/>
+          <p:cNvSpPr/>
+          <p:nvPr/>
+        </p:nvSpPr>
+        <p:spPr>
+          <a:xfrm>
+            <a:off x="0" y="850392"/>
+            <a:ext cx="12191695" cy="36576"/>
+          </a:xfrm>
+          <a:prstGeom prst="rect">
+            <a:avLst/>
+          </a:prstGeom>
+          <a:solidFill>
+            <a:srgbClr val="C8102E"/>
+          </a:solidFill>
+          <a:ln>
+            <a:noFill/>
+          </a:ln>
+        </p:spPr>
+        <p:style>
+          <a:lnRef idx="1">
+            <a:schemeClr val="accent1"/>
+          </a:lnRef>
+          <a:fillRef idx="3">
+            <a:schemeClr val="accent1"/>
+          </a:fillRef>
+          <a:effectRef idx="2">
+            <a:schemeClr val="accent1"/>
+          </a:effectRef>
+          <a:fontRef idx="minor">
+            <a:schemeClr val="lt1"/>
+          </a:fontRef>
+        </p:style>
+        <p:txBody>
+          <a:bodyPr rtlCol="0" anchor="ctr"/>
+          <a:lstStyle/>
+          <a:p>
+            <a:pPr algn="ctr"/>
+            <a:endParaRPr/>
+          </a:p>
+        </p:txBody>
+      </p:sp>
+      <p:sp>
+        <p:nvSpPr>
+          <p:cNvPr id="4" name="TextBox 3"/>
+          <p:cNvSpPr txBox="1"/>
+          <p:nvPr/>
+        </p:nvSpPr>
+        <p:spPr>
+          <a:xfrm>
+            <a:off x="640080" y="182880"/>
+            <a:ext cx="9144000" cy="640080"/>
+          </a:xfrm>
+          <a:prstGeom prst="rect">
+            <a:avLst/>
+          </a:prstGeom>
+          <a:noFill/>
+        </p:spPr>
+        <p:txBody>
+          <a:bodyPr wrap="none" anchor="ctr">
+            <a:spAutoFit/>
+          </a:bodyPr>
+          <a:lstStyle/>
+          <a:p>
+            <a:pPr>
+              <a:defRPr sz="2400" b="1">
+                <a:solidFill>
+                  <a:srgbClr val="1B365D"/>
+                </a:solidFill>
+                <a:latin typeface="Segoe UI"/>
+              </a:defRPr>
+            </a:pPr>
+            <a:r>
+              <a:t>UI/UX Design</a:t>
+            </a:r>
+          </a:p>
+        </p:txBody>
+      </p:sp>
+      <p:sp>
+        <p:nvSpPr>
+          <p:cNvPr id="5" name="Rounded Rectangle 4"/>
+          <p:cNvSpPr/>
+          <p:nvPr/>
+        </p:nvSpPr>
+        <p:spPr>
+          <a:xfrm>
+            <a:off x="640080" y="1188720"/>
+            <a:ext cx="5029200" cy="411480"/>
+          </a:xfrm>
+          <a:prstGeom prst="roundRect">
+            <a:avLst/>
+          </a:prstGeom>
+          <a:solidFill>
+            <a:srgbClr val="C8102E"/>
+          </a:solidFill>
+          <a:ln>
+            <a:noFill/>
+          </a:ln>
+        </p:spPr>
+        <p:style>
+          <a:lnRef idx="1">
+            <a:schemeClr val="accent1"/>
+          </a:lnRef>
+          <a:fillRef idx="3">
+            <a:schemeClr val="accent1"/>
+          </a:fillRef>
+          <a:effectRef idx="2">
+            <a:schemeClr val="accent1"/>
+          </a:effectRef>
+          <a:fontRef idx="minor">
+            <a:schemeClr val="lt1"/>
+          </a:fontRef>
+        </p:style>
+        <p:txBody>
+          <a:bodyPr wrap="square" rtlCol="0" anchor="ctr"/>
+          <a:lstStyle/>
+          <a:p>
+            <a:pPr algn="ctr">
+              <a:defRPr sz="1100" b="1">
+                <a:solidFill>
+                  <a:srgbClr val="FFFFFF"/>
+                </a:solidFill>
+                <a:latin typeface="Segoe UI"/>
+              </a:defRPr>
+            </a:pPr>
+            <a:r>
+              <a:t>BRAND IDENTITY</a:t>
             </a:r>
           </a:p>
         </p:txBody>
@@ -7483,8 +8662,8 @@
         </p:nvSpPr>
         <p:spPr>
           <a:xfrm>
-            <a:off x="822960" y="1828800"/>
-            <a:ext cx="4846320" cy="384048"/>
+            <a:off x="822960" y="1737360"/>
+            <a:ext cx="4846320" cy="365760"/>
           </a:xfrm>
           <a:prstGeom prst="rect">
             <a:avLst/>
@@ -7500,13 +8679,13 @@
             <a:pPr algn="l">
               <a:defRPr sz="1200" b="0">
                 <a:solidFill>
-                  <a:srgbClr val="2D3748"/>
-                </a:solidFill>
-                <a:latin typeface="Segoe UI"/>
-              </a:defRPr>
-            </a:pPr>
-            <a:r>
-              <a:t>•  White header + red accent (matching UC website)</a:t>
+                  <a:srgbClr val="000000"/>
+                </a:solidFill>
+                <a:latin typeface="Segoe UI"/>
+              </a:defRPr>
+            </a:pPr>
+            <a:r>
+              <a:t>•  UC official colors: Crimson #C8102E + Navy #1B365D</a:t>
             </a:r>
           </a:p>
         </p:txBody>
@@ -7519,8 +8698,8 @@
         </p:nvSpPr>
         <p:spPr>
           <a:xfrm>
-            <a:off x="822960" y="2240280"/>
-            <a:ext cx="4846320" cy="384048"/>
+            <a:off x="822960" y="2130552"/>
+            <a:ext cx="4846320" cy="365760"/>
           </a:xfrm>
           <a:prstGeom prst="rect">
             <a:avLst/>
@@ -7536,13 +8715,13 @@
             <a:pPr algn="l">
               <a:defRPr sz="1200" b="0">
                 <a:solidFill>
-                  <a:srgbClr val="2D3748"/>
-                </a:solidFill>
-                <a:latin typeface="Segoe UI"/>
-              </a:defRPr>
-            </a:pPr>
-            <a:r>
-              <a:t>•  Red hero section with call-to-action</a:t>
+                  <a:srgbClr val="000000"/>
+                </a:solidFill>
+                <a:latin typeface="Segoe UI"/>
+              </a:defRPr>
+            </a:pPr>
+            <a:r>
+              <a:t>•  White header with red accent border</a:t>
             </a:r>
           </a:p>
         </p:txBody>
@@ -7555,8 +8734,8 @@
         </p:nvSpPr>
         <p:spPr>
           <a:xfrm>
-            <a:off x="822960" y="2651760"/>
-            <a:ext cx="4846320" cy="384048"/>
+            <a:off x="822960" y="2523744"/>
+            <a:ext cx="4846320" cy="365760"/>
           </a:xfrm>
           <a:prstGeom prst="rect">
             <a:avLst/>
@@ -7572,13 +8751,13 @@
             <a:pPr algn="l">
               <a:defRPr sz="1200" b="0">
                 <a:solidFill>
-                  <a:srgbClr val="2D3748"/>
-                </a:solidFill>
-                <a:latin typeface="Segoe UI"/>
-              </a:defRPr>
-            </a:pPr>
-            <a:r>
-              <a:t>•  Topic cards for quick questions</a:t>
+                  <a:srgbClr val="000000"/>
+                </a:solidFill>
+                <a:latin typeface="Segoe UI"/>
+              </a:defRPr>
+            </a:pPr>
+            <a:r>
+              <a:t>•  Red hero banner with white text</a:t>
             </a:r>
           </a:p>
         </p:txBody>
@@ -7591,8 +8770,8 @@
         </p:nvSpPr>
         <p:spPr>
           <a:xfrm>
-            <a:off x="822960" y="3063240"/>
-            <a:ext cx="4846320" cy="384048"/>
+            <a:off x="822960" y="2916936"/>
+            <a:ext cx="4846320" cy="365760"/>
           </a:xfrm>
           <a:prstGeom prst="rect">
             <a:avLst/>
@@ -7608,13 +8787,13 @@
             <a:pPr algn="l">
               <a:defRPr sz="1200" b="0">
                 <a:solidFill>
-                  <a:srgbClr val="2D3748"/>
-                </a:solidFill>
-                <a:latin typeface="Segoe UI"/>
-              </a:defRPr>
-            </a:pPr>
-            <a:r>
-              <a:t>•  Floating chat widget (480px panel)</a:t>
+                  <a:srgbClr val="000000"/>
+                </a:solidFill>
+                <a:latin typeface="Segoe UI"/>
+              </a:defRPr>
+            </a:pPr>
+            <a:r>
+              <a:t>•  Merriweather headings + Open Sans body</a:t>
             </a:r>
           </a:p>
         </p:txBody>
@@ -7627,8 +8806,8 @@
         </p:nvSpPr>
         <p:spPr>
           <a:xfrm>
-            <a:off x="822960" y="3474720"/>
-            <a:ext cx="4846320" cy="384048"/>
+            <a:off x="822960" y="3310128"/>
+            <a:ext cx="4846320" cy="365760"/>
           </a:xfrm>
           <a:prstGeom prst="rect">
             <a:avLst/>
@@ -7644,13 +8823,13 @@
             <a:pPr algn="l">
               <a:defRPr sz="1200" b="0">
                 <a:solidFill>
-                  <a:srgbClr val="2D3748"/>
-                </a:solidFill>
-                <a:latin typeface="Segoe UI"/>
-              </a:defRPr>
-            </a:pPr>
-            <a:r>
-              <a:t>•  Professional tone, clickable source links</a:t>
+                  <a:srgbClr val="000000"/>
+                </a:solidFill>
+                <a:latin typeface="Segoe UI"/>
+              </a:defRPr>
+            </a:pPr>
+            <a:r>
+              <a:t>•  Card-based topic browsing layout</a:t>
             </a:r>
           </a:p>
         </p:txBody>
@@ -7664,7 +8843,7 @@
         <p:spPr>
           <a:xfrm>
             <a:off x="6217920" y="1188720"/>
-            <a:ext cx="5303520" cy="457200"/>
+            <a:ext cx="5303520" cy="411480"/>
           </a:xfrm>
           <a:prstGeom prst="roundRect">
             <a:avLst/>
@@ -7691,11 +8870,11 @@
           </a:fontRef>
         </p:style>
         <p:txBody>
-          <a:bodyPr rtlCol="0" anchor="ctr" wrap="square"/>
+          <a:bodyPr wrap="square" rtlCol="0" anchor="ctr"/>
           <a:lstStyle/>
           <a:p>
             <a:pPr algn="ctr">
-              <a:defRPr sz="1200" b="1">
+              <a:defRPr sz="1100" b="1">
                 <a:solidFill>
                   <a:srgbClr val="FFFFFF"/>
                 </a:solidFill>
@@ -7703,7 +8882,7 @@
               </a:defRPr>
             </a:pPr>
             <a:r>
-              <a:t>PROJECT HIGHLIGHTS</a:t>
+              <a:t>CHAT WIDGET</a:t>
             </a:r>
           </a:p>
         </p:txBody>
@@ -7716,8 +8895,8 @@
         </p:nvSpPr>
         <p:spPr>
           <a:xfrm>
-            <a:off x="6400800" y="1828800"/>
-            <a:ext cx="5029200" cy="384048"/>
+            <a:off x="6400800" y="1737360"/>
+            <a:ext cx="5120640" cy="365760"/>
           </a:xfrm>
           <a:prstGeom prst="rect">
             <a:avLst/>
@@ -7733,13 +8912,13 @@
             <a:pPr algn="l">
               <a:defRPr sz="1200" b="0">
                 <a:solidFill>
-                  <a:srgbClr val="2D3748"/>
-                </a:solidFill>
-                <a:latin typeface="Segoe UI"/>
-              </a:defRPr>
-            </a:pPr>
-            <a:r>
-              <a:t>•  End-to-end RAG: scrape → embed → answer</a:t>
+                  <a:srgbClr val="000000"/>
+                </a:solidFill>
+                <a:latin typeface="Segoe UI"/>
+              </a:defRPr>
+            </a:pPr>
+            <a:r>
+              <a:t>•  Floating button (bottom-right, 68px)</a:t>
             </a:r>
           </a:p>
         </p:txBody>
@@ -7752,8 +8931,8 @@
         </p:nvSpPr>
         <p:spPr>
           <a:xfrm>
-            <a:off x="6400800" y="2240280"/>
-            <a:ext cx="5029200" cy="384048"/>
+            <a:off x="6400800" y="2130552"/>
+            <a:ext cx="5120640" cy="365760"/>
           </a:xfrm>
           <a:prstGeom prst="rect">
             <a:avLst/>
@@ -7769,13 +8948,13 @@
             <a:pPr algn="l">
               <a:defRPr sz="1200" b="0">
                 <a:solidFill>
-                  <a:srgbClr val="2D3748"/>
-                </a:solidFill>
-                <a:latin typeface="Segoe UI"/>
-              </a:defRPr>
-            </a:pPr>
-            <a:r>
-              <a:t>•  Local + cloud AI (embeddings + LLM)</a:t>
+                  <a:srgbClr val="000000"/>
+                </a:solidFill>
+                <a:latin typeface="Segoe UI"/>
+              </a:defRPr>
+            </a:pPr>
+            <a:r>
+              <a:t>•  480px panel with navy header</a:t>
             </a:r>
           </a:p>
         </p:txBody>
@@ -7788,8 +8967,8 @@
         </p:nvSpPr>
         <p:spPr>
           <a:xfrm>
-            <a:off x="6400800" y="2651760"/>
-            <a:ext cx="5029200" cy="384048"/>
+            <a:off x="6400800" y="2523744"/>
+            <a:ext cx="5120640" cy="365760"/>
           </a:xfrm>
           <a:prstGeom prst="rect">
             <a:avLst/>
@@ -7805,13 +8984,13 @@
             <a:pPr algn="l">
               <a:defRPr sz="1200" b="0">
                 <a:solidFill>
-                  <a:srgbClr val="2D3748"/>
-                </a:solidFill>
-                <a:latin typeface="Segoe UI"/>
-              </a:defRPr>
-            </a:pPr>
-            <a:r>
-              <a:t>•  Sub-3-second response time</a:t>
+                  <a:srgbClr val="000000"/>
+                </a:solidFill>
+                <a:latin typeface="Segoe UI"/>
+              </a:defRPr>
+            </a:pPr>
+            <a:r>
+              <a:t>•  Typing indicator (3-dot animation)</a:t>
             </a:r>
           </a:p>
         </p:txBody>
@@ -7824,8 +9003,8 @@
         </p:nvSpPr>
         <p:spPr>
           <a:xfrm>
-            <a:off x="6400800" y="3063240"/>
-            <a:ext cx="5029200" cy="384048"/>
+            <a:off x="6400800" y="2916936"/>
+            <a:ext cx="5120640" cy="365760"/>
           </a:xfrm>
           <a:prstGeom prst="rect">
             <a:avLst/>
@@ -7841,13 +9020,13 @@
             <a:pPr algn="l">
               <a:defRPr sz="1200" b="0">
                 <a:solidFill>
-                  <a:srgbClr val="2D3748"/>
-                </a:solidFill>
-                <a:latin typeface="Segoe UI"/>
-              </a:defRPr>
-            </a:pPr>
-            <a:r>
-              <a:t>•  Extensible: streaming, analytics, Docker</a:t>
+                  <a:srgbClr val="000000"/>
+                </a:solidFill>
+                <a:latin typeface="Segoe UI"/>
+              </a:defRPr>
+            </a:pPr>
+            <a:r>
+              <a:t>•  Navy user bubbles / white bot cards</a:t>
             </a:r>
           </a:p>
         </p:txBody>
@@ -7860,8 +9039,8 @@
         </p:nvSpPr>
         <p:spPr>
           <a:xfrm>
-            <a:off x="6400800" y="3474720"/>
-            <a:ext cx="5029200" cy="384048"/>
+            <a:off x="6400800" y="3310128"/>
+            <a:ext cx="5120640" cy="365760"/>
           </a:xfrm>
           <a:prstGeom prst="rect">
             <a:avLst/>
@@ -7877,27 +9056,1129 @@
             <a:pPr algn="l">
               <a:defRPr sz="1200" b="0">
                 <a:solidFill>
-                  <a:srgbClr val="2D3748"/>
-                </a:solidFill>
-                <a:latin typeface="Segoe UI"/>
-              </a:defRPr>
-            </a:pPr>
-            <a:r>
-              <a:t>•  Production-ready architecture</a:t>
-            </a:r>
-          </a:p>
-        </p:txBody>
-      </p:sp>
-      <p:sp>
-        <p:nvSpPr>
-          <p:cNvPr id="17" name="Rectangle 16"/>
+                  <a:srgbClr val="000000"/>
+                </a:solidFill>
+                <a:latin typeface="Segoe UI"/>
+              </a:defRPr>
+            </a:pPr>
+            <a:r>
+              <a:t>•  Clickable red links for citations</a:t>
+            </a:r>
+          </a:p>
+        </p:txBody>
+      </p:sp>
+      <p:sp>
+        <p:nvSpPr>
+          <p:cNvPr id="17" name="Rounded Rectangle 16"/>
           <p:cNvSpPr/>
           <p:nvPr/>
         </p:nvSpPr>
         <p:spPr>
           <a:xfrm>
-            <a:off x="640080" y="4206240"/>
-            <a:ext cx="10972800" cy="18288"/>
+            <a:off x="640080" y="4023360"/>
+            <a:ext cx="10972800" cy="411480"/>
+          </a:xfrm>
+          <a:prstGeom prst="roundRect">
+            <a:avLst/>
+          </a:prstGeom>
+          <a:solidFill>
+            <a:srgbClr val="F8F9FA"/>
+          </a:solidFill>
+          <a:ln w="19050">
+            <a:solidFill>
+              <a:srgbClr val="E2E5EA"/>
+            </a:solidFill>
+          </a:ln>
+        </p:spPr>
+        <p:style>
+          <a:lnRef idx="1">
+            <a:schemeClr val="accent1"/>
+          </a:lnRef>
+          <a:fillRef idx="3">
+            <a:schemeClr val="accent1"/>
+          </a:fillRef>
+          <a:effectRef idx="2">
+            <a:schemeClr val="accent1"/>
+          </a:effectRef>
+          <a:fontRef idx="minor">
+            <a:schemeClr val="lt1"/>
+          </a:fontRef>
+        </p:style>
+        <p:txBody>
+          <a:bodyPr wrap="square" rtlCol="0" anchor="ctr"/>
+          <a:lstStyle/>
+          <a:p>
+            <a:pPr algn="ctr">
+              <a:defRPr sz="1100" b="0">
+                <a:solidFill>
+                  <a:srgbClr val="1B365D"/>
+                </a:solidFill>
+                <a:latin typeface="Segoe UI"/>
+              </a:defRPr>
+            </a:pPr>
+            <a:r>
+              <a:t>Response Rules: Professional tone  •  No emojis  •  2-4 paragraphs  •  Clickable URLs  •  Never says 'based on context'</a:t>
+            </a:r>
+          </a:p>
+        </p:txBody>
+      </p:sp>
+    </p:spTree>
+  </p:cSld>
+  <p:clrMapOvr>
+    <a:masterClrMapping/>
+  </p:clrMapOvr>
+</p:sld>
+</file>
+
+<file path=ppt/slides/slide8.xml><?xml version="1.0" encoding="utf-8"?>
+<p:sld xmlns:a="http://schemas.openxmlformats.org/drawingml/2006/main" xmlns:r="http://schemas.openxmlformats.org/officeDocument/2006/relationships" xmlns:p="http://schemas.openxmlformats.org/presentationml/2006/main">
+  <p:cSld>
+    <p:spTree>
+      <p:nvGrpSpPr>
+        <p:cNvPr id="1" name=""/>
+        <p:cNvGrpSpPr/>
+        <p:nvPr/>
+      </p:nvGrpSpPr>
+      <p:grpSpPr>
+        <a:xfrm>
+          <a:off x="0" y="0"/>
+          <a:ext cx="0" cy="0"/>
+          <a:chOff x="0" y="0"/>
+          <a:chExt cx="0" cy="0"/>
+        </a:xfrm>
+      </p:grpSpPr>
+      <p:sp>
+        <p:nvSpPr>
+          <p:cNvPr id="2" name="Rectangle 1"/>
+          <p:cNvSpPr/>
+          <p:nvPr/>
+        </p:nvSpPr>
+        <p:spPr>
+          <a:xfrm>
+            <a:off x="0" y="0"/>
+            <a:ext cx="12191695" cy="868680"/>
+          </a:xfrm>
+          <a:prstGeom prst="rect">
+            <a:avLst/>
+          </a:prstGeom>
+          <a:solidFill>
+            <a:srgbClr val="FFFFFF"/>
+          </a:solidFill>
+          <a:ln>
+            <a:noFill/>
+          </a:ln>
+        </p:spPr>
+        <p:style>
+          <a:lnRef idx="1">
+            <a:schemeClr val="accent1"/>
+          </a:lnRef>
+          <a:fillRef idx="3">
+            <a:schemeClr val="accent1"/>
+          </a:fillRef>
+          <a:effectRef idx="2">
+            <a:schemeClr val="accent1"/>
+          </a:effectRef>
+          <a:fontRef idx="minor">
+            <a:schemeClr val="lt1"/>
+          </a:fontRef>
+        </p:style>
+        <p:txBody>
+          <a:bodyPr rtlCol="0" anchor="ctr"/>
+          <a:lstStyle/>
+          <a:p>
+            <a:pPr algn="ctr"/>
+            <a:endParaRPr/>
+          </a:p>
+        </p:txBody>
+      </p:sp>
+      <p:sp>
+        <p:nvSpPr>
+          <p:cNvPr id="3" name="Rectangle 2"/>
+          <p:cNvSpPr/>
+          <p:nvPr/>
+        </p:nvSpPr>
+        <p:spPr>
+          <a:xfrm>
+            <a:off x="0" y="850392"/>
+            <a:ext cx="12191695" cy="36576"/>
+          </a:xfrm>
+          <a:prstGeom prst="rect">
+            <a:avLst/>
+          </a:prstGeom>
+          <a:solidFill>
+            <a:srgbClr val="C8102E"/>
+          </a:solidFill>
+          <a:ln>
+            <a:noFill/>
+          </a:ln>
+        </p:spPr>
+        <p:style>
+          <a:lnRef idx="1">
+            <a:schemeClr val="accent1"/>
+          </a:lnRef>
+          <a:fillRef idx="3">
+            <a:schemeClr val="accent1"/>
+          </a:fillRef>
+          <a:effectRef idx="2">
+            <a:schemeClr val="accent1"/>
+          </a:effectRef>
+          <a:fontRef idx="minor">
+            <a:schemeClr val="lt1"/>
+          </a:fontRef>
+        </p:style>
+        <p:txBody>
+          <a:bodyPr rtlCol="0" anchor="ctr"/>
+          <a:lstStyle/>
+          <a:p>
+            <a:pPr algn="ctr"/>
+            <a:endParaRPr/>
+          </a:p>
+        </p:txBody>
+      </p:sp>
+      <p:sp>
+        <p:nvSpPr>
+          <p:cNvPr id="4" name="TextBox 3"/>
+          <p:cNvSpPr txBox="1"/>
+          <p:nvPr/>
+        </p:nvSpPr>
+        <p:spPr>
+          <a:xfrm>
+            <a:off x="640080" y="182880"/>
+            <a:ext cx="9144000" cy="640080"/>
+          </a:xfrm>
+          <a:prstGeom prst="rect">
+            <a:avLst/>
+          </a:prstGeom>
+          <a:noFill/>
+        </p:spPr>
+        <p:txBody>
+          <a:bodyPr wrap="none" anchor="ctr">
+            <a:spAutoFit/>
+          </a:bodyPr>
+          <a:lstStyle/>
+          <a:p>
+            <a:pPr>
+              <a:defRPr sz="2400" b="1">
+                <a:solidFill>
+                  <a:srgbClr val="1B365D"/>
+                </a:solidFill>
+                <a:latin typeface="Segoe UI"/>
+              </a:defRPr>
+            </a:pPr>
+            <a:r>
+              <a:t>Evaluation Results — 50 Golden Questions (Two Methods)</a:t>
+            </a:r>
+          </a:p>
+        </p:txBody>
+      </p:sp>
+      <p:sp>
+        <p:nvSpPr>
+          <p:cNvPr id="5" name="Rounded Rectangle 4"/>
+          <p:cNvSpPr/>
+          <p:nvPr/>
+        </p:nvSpPr>
+        <p:spPr>
+          <a:xfrm>
+            <a:off x="457200" y="1051560"/>
+            <a:ext cx="5486400" cy="365760"/>
+          </a:xfrm>
+          <a:prstGeom prst="roundRect">
+            <a:avLst/>
+          </a:prstGeom>
+          <a:solidFill>
+            <a:srgbClr val="1B365D"/>
+          </a:solidFill>
+          <a:ln>
+            <a:noFill/>
+          </a:ln>
+        </p:spPr>
+        <p:style>
+          <a:lnRef idx="1">
+            <a:schemeClr val="accent1"/>
+          </a:lnRef>
+          <a:fillRef idx="3">
+            <a:schemeClr val="accent1"/>
+          </a:fillRef>
+          <a:effectRef idx="2">
+            <a:schemeClr val="accent1"/>
+          </a:effectRef>
+          <a:fontRef idx="minor">
+            <a:schemeClr val="lt1"/>
+          </a:fontRef>
+        </p:style>
+        <p:txBody>
+          <a:bodyPr wrap="square" rtlCol="0" anchor="ctr"/>
+          <a:lstStyle/>
+          <a:p>
+            <a:pPr algn="ctr">
+              <a:defRPr sz="1000" b="1">
+                <a:solidFill>
+                  <a:srgbClr val="FFFFFF"/>
+                </a:solidFill>
+                <a:latin typeface="Segoe UI"/>
+              </a:defRPr>
+            </a:pPr>
+            <a:r>
+              <a:t>METHOD 1: KEYWORD-BASED METRICS</a:t>
+            </a:r>
+          </a:p>
+        </p:txBody>
+      </p:sp>
+      <p:sp>
+        <p:nvSpPr>
+          <p:cNvPr id="6" name="TextBox 5"/>
+          <p:cNvSpPr txBox="1"/>
+          <p:nvPr/>
+        </p:nvSpPr>
+        <p:spPr>
+          <a:xfrm>
+            <a:off x="457200" y="1508760"/>
+            <a:ext cx="1051560" cy="411480"/>
+          </a:xfrm>
+          <a:prstGeom prst="rect">
+            <a:avLst/>
+          </a:prstGeom>
+          <a:noFill/>
+        </p:spPr>
+        <p:txBody>
+          <a:bodyPr wrap="square">
+            <a:spAutoFit/>
+          </a:bodyPr>
+          <a:lstStyle/>
+          <a:p>
+            <a:pPr algn="ctr">
+              <a:defRPr sz="1800" b="1">
+                <a:solidFill>
+                  <a:srgbClr val="C8102E"/>
+                </a:solidFill>
+                <a:latin typeface="Segoe UI"/>
+              </a:defRPr>
+            </a:pPr>
+            <a:r>
+              <a:t>89.8%</a:t>
+            </a:r>
+          </a:p>
+        </p:txBody>
+      </p:sp>
+      <p:sp>
+        <p:nvSpPr>
+          <p:cNvPr id="7" name="TextBox 6"/>
+          <p:cNvSpPr txBox="1"/>
+          <p:nvPr/>
+        </p:nvSpPr>
+        <p:spPr>
+          <a:xfrm>
+            <a:off x="457200" y="1920240"/>
+            <a:ext cx="1051560" cy="274320"/>
+          </a:xfrm>
+          <a:prstGeom prst="rect">
+            <a:avLst/>
+          </a:prstGeom>
+          <a:noFill/>
+        </p:spPr>
+        <p:txBody>
+          <a:bodyPr wrap="square">
+            <a:spAutoFit/>
+          </a:bodyPr>
+          <a:lstStyle/>
+          <a:p>
+            <a:pPr algn="ctr">
+              <a:defRPr sz="1000" b="0">
+                <a:solidFill>
+                  <a:srgbClr val="333333"/>
+                </a:solidFill>
+                <a:latin typeface="Segoe UI"/>
+              </a:defRPr>
+            </a:pPr>
+            <a:r>
+              <a:t>P@5</a:t>
+            </a:r>
+          </a:p>
+        </p:txBody>
+      </p:sp>
+      <p:sp>
+        <p:nvSpPr>
+          <p:cNvPr id="8" name="TextBox 7"/>
+          <p:cNvSpPr txBox="1"/>
+          <p:nvPr/>
+        </p:nvSpPr>
+        <p:spPr>
+          <a:xfrm>
+            <a:off x="1554480" y="1508760"/>
+            <a:ext cx="1051560" cy="411480"/>
+          </a:xfrm>
+          <a:prstGeom prst="rect">
+            <a:avLst/>
+          </a:prstGeom>
+          <a:noFill/>
+        </p:spPr>
+        <p:txBody>
+          <a:bodyPr wrap="square">
+            <a:spAutoFit/>
+          </a:bodyPr>
+          <a:lstStyle/>
+          <a:p>
+            <a:pPr algn="ctr">
+              <a:defRPr sz="1800" b="1">
+                <a:solidFill>
+                  <a:srgbClr val="C8102E"/>
+                </a:solidFill>
+                <a:latin typeface="Segoe UI"/>
+              </a:defRPr>
+            </a:pPr>
+            <a:r>
+              <a:t>88.7%</a:t>
+            </a:r>
+          </a:p>
+        </p:txBody>
+      </p:sp>
+      <p:sp>
+        <p:nvSpPr>
+          <p:cNvPr id="9" name="TextBox 8"/>
+          <p:cNvSpPr txBox="1"/>
+          <p:nvPr/>
+        </p:nvSpPr>
+        <p:spPr>
+          <a:xfrm>
+            <a:off x="1554480" y="1920240"/>
+            <a:ext cx="1051560" cy="274320"/>
+          </a:xfrm>
+          <a:prstGeom prst="rect">
+            <a:avLst/>
+          </a:prstGeom>
+          <a:noFill/>
+        </p:spPr>
+        <p:txBody>
+          <a:bodyPr wrap="square">
+            <a:spAutoFit/>
+          </a:bodyPr>
+          <a:lstStyle/>
+          <a:p>
+            <a:pPr algn="ctr">
+              <a:defRPr sz="1000" b="0">
+                <a:solidFill>
+                  <a:srgbClr val="333333"/>
+                </a:solidFill>
+                <a:latin typeface="Segoe UI"/>
+              </a:defRPr>
+            </a:pPr>
+            <a:r>
+              <a:t>R@10</a:t>
+            </a:r>
+          </a:p>
+        </p:txBody>
+      </p:sp>
+      <p:sp>
+        <p:nvSpPr>
+          <p:cNvPr id="10" name="TextBox 9"/>
+          <p:cNvSpPr txBox="1"/>
+          <p:nvPr/>
+        </p:nvSpPr>
+        <p:spPr>
+          <a:xfrm>
+            <a:off x="2651760" y="1508760"/>
+            <a:ext cx="1051560" cy="411480"/>
+          </a:xfrm>
+          <a:prstGeom prst="rect">
+            <a:avLst/>
+          </a:prstGeom>
+          <a:noFill/>
+        </p:spPr>
+        <p:txBody>
+          <a:bodyPr wrap="square">
+            <a:spAutoFit/>
+          </a:bodyPr>
+          <a:lstStyle/>
+          <a:p>
+            <a:pPr algn="ctr">
+              <a:defRPr sz="1800" b="1">
+                <a:solidFill>
+                  <a:srgbClr val="C8102E"/>
+                </a:solidFill>
+                <a:latin typeface="Segoe UI"/>
+              </a:defRPr>
+            </a:pPr>
+            <a:r>
+              <a:t>73.6%</a:t>
+            </a:r>
+          </a:p>
+        </p:txBody>
+      </p:sp>
+      <p:sp>
+        <p:nvSpPr>
+          <p:cNvPr id="11" name="TextBox 10"/>
+          <p:cNvSpPr txBox="1"/>
+          <p:nvPr/>
+        </p:nvSpPr>
+        <p:spPr>
+          <a:xfrm>
+            <a:off x="2651760" y="1920240"/>
+            <a:ext cx="1051560" cy="274320"/>
+          </a:xfrm>
+          <a:prstGeom prst="rect">
+            <a:avLst/>
+          </a:prstGeom>
+          <a:noFill/>
+        </p:spPr>
+        <p:txBody>
+          <a:bodyPr wrap="square">
+            <a:spAutoFit/>
+          </a:bodyPr>
+          <a:lstStyle/>
+          <a:p>
+            <a:pPr algn="ctr">
+              <a:defRPr sz="1000" b="0">
+                <a:solidFill>
+                  <a:srgbClr val="333333"/>
+                </a:solidFill>
+                <a:latin typeface="Segoe UI"/>
+              </a:defRPr>
+            </a:pPr>
+            <a:r>
+              <a:t>Accuracy</a:t>
+            </a:r>
+          </a:p>
+        </p:txBody>
+      </p:sp>
+      <p:sp>
+        <p:nvSpPr>
+          <p:cNvPr id="12" name="TextBox 11"/>
+          <p:cNvSpPr txBox="1"/>
+          <p:nvPr/>
+        </p:nvSpPr>
+        <p:spPr>
+          <a:xfrm>
+            <a:off x="3749039" y="1508760"/>
+            <a:ext cx="1051560" cy="411480"/>
+          </a:xfrm>
+          <a:prstGeom prst="rect">
+            <a:avLst/>
+          </a:prstGeom>
+          <a:noFill/>
+        </p:spPr>
+        <p:txBody>
+          <a:bodyPr wrap="square">
+            <a:spAutoFit/>
+          </a:bodyPr>
+          <a:lstStyle/>
+          <a:p>
+            <a:pPr algn="ctr">
+              <a:defRPr sz="1800" b="1">
+                <a:solidFill>
+                  <a:srgbClr val="C8102E"/>
+                </a:solidFill>
+                <a:latin typeface="Segoe UI"/>
+              </a:defRPr>
+            </a:pPr>
+            <a:r>
+              <a:t>100%</a:t>
+            </a:r>
+          </a:p>
+        </p:txBody>
+      </p:sp>
+      <p:sp>
+        <p:nvSpPr>
+          <p:cNvPr id="13" name="TextBox 12"/>
+          <p:cNvSpPr txBox="1"/>
+          <p:nvPr/>
+        </p:nvSpPr>
+        <p:spPr>
+          <a:xfrm>
+            <a:off x="3749039" y="1920240"/>
+            <a:ext cx="1051560" cy="274320"/>
+          </a:xfrm>
+          <a:prstGeom prst="rect">
+            <a:avLst/>
+          </a:prstGeom>
+          <a:noFill/>
+        </p:spPr>
+        <p:txBody>
+          <a:bodyPr wrap="square">
+            <a:spAutoFit/>
+          </a:bodyPr>
+          <a:lstStyle/>
+          <a:p>
+            <a:pPr algn="ctr">
+              <a:defRPr sz="1000" b="0">
+                <a:solidFill>
+                  <a:srgbClr val="333333"/>
+                </a:solidFill>
+                <a:latin typeface="Segoe UI"/>
+              </a:defRPr>
+            </a:pPr>
+            <a:r>
+              <a:t>Faithful</a:t>
+            </a:r>
+          </a:p>
+        </p:txBody>
+      </p:sp>
+      <p:sp>
+        <p:nvSpPr>
+          <p:cNvPr id="14" name="TextBox 13"/>
+          <p:cNvSpPr txBox="1"/>
+          <p:nvPr/>
+        </p:nvSpPr>
+        <p:spPr>
+          <a:xfrm>
+            <a:off x="4846320" y="1508760"/>
+            <a:ext cx="1051560" cy="411480"/>
+          </a:xfrm>
+          <a:prstGeom prst="rect">
+            <a:avLst/>
+          </a:prstGeom>
+          <a:noFill/>
+        </p:spPr>
+        <p:txBody>
+          <a:bodyPr wrap="square">
+            <a:spAutoFit/>
+          </a:bodyPr>
+          <a:lstStyle/>
+          <a:p>
+            <a:pPr algn="ctr">
+              <a:defRPr sz="1800" b="1">
+                <a:solidFill>
+                  <a:srgbClr val="C8102E"/>
+                </a:solidFill>
+                <a:latin typeface="Segoe UI"/>
+              </a:defRPr>
+            </a:pPr>
+            <a:r>
+              <a:t>90%</a:t>
+            </a:r>
+          </a:p>
+        </p:txBody>
+      </p:sp>
+      <p:sp>
+        <p:nvSpPr>
+          <p:cNvPr id="15" name="TextBox 14"/>
+          <p:cNvSpPr txBox="1"/>
+          <p:nvPr/>
+        </p:nvSpPr>
+        <p:spPr>
+          <a:xfrm>
+            <a:off x="4846320" y="1920240"/>
+            <a:ext cx="1051560" cy="274320"/>
+          </a:xfrm>
+          <a:prstGeom prst="rect">
+            <a:avLst/>
+          </a:prstGeom>
+          <a:noFill/>
+        </p:spPr>
+        <p:txBody>
+          <a:bodyPr wrap="square">
+            <a:spAutoFit/>
+          </a:bodyPr>
+          <a:lstStyle/>
+          <a:p>
+            <a:pPr algn="ctr">
+              <a:defRPr sz="1000" b="0">
+                <a:solidFill>
+                  <a:srgbClr val="333333"/>
+                </a:solidFill>
+                <a:latin typeface="Segoe UI"/>
+              </a:defRPr>
+            </a:pPr>
+            <a:r>
+              <a:t>Refusal</a:t>
+            </a:r>
+          </a:p>
+        </p:txBody>
+      </p:sp>
+      <p:sp>
+        <p:nvSpPr>
+          <p:cNvPr id="16" name="TextBox 15"/>
+          <p:cNvSpPr txBox="1"/>
+          <p:nvPr/>
+        </p:nvSpPr>
+        <p:spPr>
+          <a:xfrm>
+            <a:off x="457200" y="2286000"/>
+            <a:ext cx="5486400" cy="228600"/>
+          </a:xfrm>
+          <a:prstGeom prst="rect">
+            <a:avLst/>
+          </a:prstGeom>
+          <a:noFill/>
+        </p:spPr>
+        <p:txBody>
+          <a:bodyPr wrap="square">
+            <a:spAutoFit/>
+          </a:bodyPr>
+          <a:lstStyle/>
+          <a:p>
+            <a:pPr algn="l">
+              <a:defRPr sz="1000" b="0">
+                <a:solidFill>
+                  <a:srgbClr val="333333"/>
+                </a:solidFill>
+                <a:latin typeface="Segoe UI"/>
+              </a:defRPr>
+            </a:pPr>
+            <a:r>
+              <a:t>Automated keyword matching against expected terms per question</a:t>
+            </a:r>
+          </a:p>
+        </p:txBody>
+      </p:sp>
+      <p:sp>
+        <p:nvSpPr>
+          <p:cNvPr id="17" name="Rounded Rectangle 16"/>
+          <p:cNvSpPr/>
+          <p:nvPr/>
+        </p:nvSpPr>
+        <p:spPr>
+          <a:xfrm>
+            <a:off x="6217920" y="1051560"/>
+            <a:ext cx="5486400" cy="365760"/>
+          </a:xfrm>
+          <a:prstGeom prst="roundRect">
+            <a:avLst/>
+          </a:prstGeom>
+          <a:solidFill>
+            <a:srgbClr val="C8102E"/>
+          </a:solidFill>
+          <a:ln>
+            <a:noFill/>
+          </a:ln>
+        </p:spPr>
+        <p:style>
+          <a:lnRef idx="1">
+            <a:schemeClr val="accent1"/>
+          </a:lnRef>
+          <a:fillRef idx="3">
+            <a:schemeClr val="accent1"/>
+          </a:fillRef>
+          <a:effectRef idx="2">
+            <a:schemeClr val="accent1"/>
+          </a:effectRef>
+          <a:fontRef idx="minor">
+            <a:schemeClr val="lt1"/>
+          </a:fontRef>
+        </p:style>
+        <p:txBody>
+          <a:bodyPr wrap="square" rtlCol="0" anchor="ctr"/>
+          <a:lstStyle/>
+          <a:p>
+            <a:pPr algn="ctr">
+              <a:defRPr sz="1000" b="1">
+                <a:solidFill>
+                  <a:srgbClr val="FFFFFF"/>
+                </a:solidFill>
+                <a:latin typeface="Segoe UI"/>
+              </a:defRPr>
+            </a:pPr>
+            <a:r>
+              <a:t>METHOD 2: LLM-AS-JUDGE (Claude Opus)</a:t>
+            </a:r>
+          </a:p>
+        </p:txBody>
+      </p:sp>
+      <p:sp>
+        <p:nvSpPr>
+          <p:cNvPr id="18" name="TextBox 17"/>
+          <p:cNvSpPr txBox="1"/>
+          <p:nvPr/>
+        </p:nvSpPr>
+        <p:spPr>
+          <a:xfrm>
+            <a:off x="6217920" y="1508760"/>
+            <a:ext cx="1051560" cy="411480"/>
+          </a:xfrm>
+          <a:prstGeom prst="rect">
+            <a:avLst/>
+          </a:prstGeom>
+          <a:noFill/>
+        </p:spPr>
+        <p:txBody>
+          <a:bodyPr wrap="square">
+            <a:spAutoFit/>
+          </a:bodyPr>
+          <a:lstStyle/>
+          <a:p>
+            <a:pPr algn="ctr">
+              <a:defRPr sz="1800" b="1">
+                <a:solidFill>
+                  <a:srgbClr val="C8102E"/>
+                </a:solidFill>
+                <a:latin typeface="Segoe UI"/>
+              </a:defRPr>
+            </a:pPr>
+            <a:r>
+              <a:t>80.8%</a:t>
+            </a:r>
+          </a:p>
+        </p:txBody>
+      </p:sp>
+      <p:sp>
+        <p:nvSpPr>
+          <p:cNvPr id="19" name="TextBox 18"/>
+          <p:cNvSpPr txBox="1"/>
+          <p:nvPr/>
+        </p:nvSpPr>
+        <p:spPr>
+          <a:xfrm>
+            <a:off x="6217920" y="1920240"/>
+            <a:ext cx="1051560" cy="274320"/>
+          </a:xfrm>
+          <a:prstGeom prst="rect">
+            <a:avLst/>
+          </a:prstGeom>
+          <a:noFill/>
+        </p:spPr>
+        <p:txBody>
+          <a:bodyPr wrap="square">
+            <a:spAutoFit/>
+          </a:bodyPr>
+          <a:lstStyle/>
+          <a:p>
+            <a:pPr algn="ctr">
+              <a:defRPr sz="1000" b="0">
+                <a:solidFill>
+                  <a:srgbClr val="333333"/>
+                </a:solidFill>
+                <a:latin typeface="Segoe UI"/>
+              </a:defRPr>
+            </a:pPr>
+            <a:r>
+              <a:t>Overall</a:t>
+            </a:r>
+          </a:p>
+        </p:txBody>
+      </p:sp>
+      <p:sp>
+        <p:nvSpPr>
+          <p:cNvPr id="20" name="TextBox 19"/>
+          <p:cNvSpPr txBox="1"/>
+          <p:nvPr/>
+        </p:nvSpPr>
+        <p:spPr>
+          <a:xfrm>
+            <a:off x="7315200" y="1508760"/>
+            <a:ext cx="1051560" cy="411480"/>
+          </a:xfrm>
+          <a:prstGeom prst="rect">
+            <a:avLst/>
+          </a:prstGeom>
+          <a:noFill/>
+        </p:spPr>
+        <p:txBody>
+          <a:bodyPr wrap="square">
+            <a:spAutoFit/>
+          </a:bodyPr>
+          <a:lstStyle/>
+          <a:p>
+            <a:pPr algn="ctr">
+              <a:defRPr sz="1800" b="1">
+                <a:solidFill>
+                  <a:srgbClr val="C8102E"/>
+                </a:solidFill>
+                <a:latin typeface="Segoe UI"/>
+              </a:defRPr>
+            </a:pPr>
+            <a:r>
+              <a:t>87.2%</a:t>
+            </a:r>
+          </a:p>
+        </p:txBody>
+      </p:sp>
+      <p:sp>
+        <p:nvSpPr>
+          <p:cNvPr id="21" name="TextBox 20"/>
+          <p:cNvSpPr txBox="1"/>
+          <p:nvPr/>
+        </p:nvSpPr>
+        <p:spPr>
+          <a:xfrm>
+            <a:off x="7315200" y="1920240"/>
+            <a:ext cx="1051560" cy="274320"/>
+          </a:xfrm>
+          <a:prstGeom prst="rect">
+            <a:avLst/>
+          </a:prstGeom>
+          <a:noFill/>
+        </p:spPr>
+        <p:txBody>
+          <a:bodyPr wrap="square">
+            <a:spAutoFit/>
+          </a:bodyPr>
+          <a:lstStyle/>
+          <a:p>
+            <a:pPr algn="ctr">
+              <a:defRPr sz="1000" b="0">
+                <a:solidFill>
+                  <a:srgbClr val="333333"/>
+                </a:solidFill>
+                <a:latin typeface="Segoe UI"/>
+              </a:defRPr>
+            </a:pPr>
+            <a:r>
+              <a:t>Relevance</a:t>
+            </a:r>
+          </a:p>
+        </p:txBody>
+      </p:sp>
+      <p:sp>
+        <p:nvSpPr>
+          <p:cNvPr id="22" name="TextBox 21"/>
+          <p:cNvSpPr txBox="1"/>
+          <p:nvPr/>
+        </p:nvSpPr>
+        <p:spPr>
+          <a:xfrm>
+            <a:off x="8412480" y="1508760"/>
+            <a:ext cx="1051560" cy="411480"/>
+          </a:xfrm>
+          <a:prstGeom prst="rect">
+            <a:avLst/>
+          </a:prstGeom>
+          <a:noFill/>
+        </p:spPr>
+        <p:txBody>
+          <a:bodyPr wrap="square">
+            <a:spAutoFit/>
+          </a:bodyPr>
+          <a:lstStyle/>
+          <a:p>
+            <a:pPr algn="ctr">
+              <a:defRPr sz="1800" b="1">
+                <a:solidFill>
+                  <a:srgbClr val="C8102E"/>
+                </a:solidFill>
+                <a:latin typeface="Segoe UI"/>
+              </a:defRPr>
+            </a:pPr>
+            <a:r>
+              <a:t>82.8%</a:t>
+            </a:r>
+          </a:p>
+        </p:txBody>
+      </p:sp>
+      <p:sp>
+        <p:nvSpPr>
+          <p:cNvPr id="23" name="TextBox 22"/>
+          <p:cNvSpPr txBox="1"/>
+          <p:nvPr/>
+        </p:nvSpPr>
+        <p:spPr>
+          <a:xfrm>
+            <a:off x="8412480" y="1920240"/>
+            <a:ext cx="1051560" cy="274320"/>
+          </a:xfrm>
+          <a:prstGeom prst="rect">
+            <a:avLst/>
+          </a:prstGeom>
+          <a:noFill/>
+        </p:spPr>
+        <p:txBody>
+          <a:bodyPr wrap="square">
+            <a:spAutoFit/>
+          </a:bodyPr>
+          <a:lstStyle/>
+          <a:p>
+            <a:pPr algn="ctr">
+              <a:defRPr sz="1000" b="0">
+                <a:solidFill>
+                  <a:srgbClr val="333333"/>
+                </a:solidFill>
+                <a:latin typeface="Segoe UI"/>
+              </a:defRPr>
+            </a:pPr>
+            <a:r>
+              <a:t>Faithful</a:t>
+            </a:r>
+          </a:p>
+        </p:txBody>
+      </p:sp>
+      <p:sp>
+        <p:nvSpPr>
+          <p:cNvPr id="24" name="TextBox 23"/>
+          <p:cNvSpPr txBox="1"/>
+          <p:nvPr/>
+        </p:nvSpPr>
+        <p:spPr>
+          <a:xfrm>
+            <a:off x="9509759" y="1508760"/>
+            <a:ext cx="1051560" cy="411480"/>
+          </a:xfrm>
+          <a:prstGeom prst="rect">
+            <a:avLst/>
+          </a:prstGeom>
+          <a:noFill/>
+        </p:spPr>
+        <p:txBody>
+          <a:bodyPr wrap="square">
+            <a:spAutoFit/>
+          </a:bodyPr>
+          <a:lstStyle/>
+          <a:p>
+            <a:pPr algn="ctr">
+              <a:defRPr sz="1800" b="1">
+                <a:solidFill>
+                  <a:srgbClr val="C8102E"/>
+                </a:solidFill>
+                <a:latin typeface="Segoe UI"/>
+              </a:defRPr>
+            </a:pPr>
+            <a:r>
+              <a:t>76.4%</a:t>
+            </a:r>
+          </a:p>
+        </p:txBody>
+      </p:sp>
+      <p:sp>
+        <p:nvSpPr>
+          <p:cNvPr id="25" name="TextBox 24"/>
+          <p:cNvSpPr txBox="1"/>
+          <p:nvPr/>
+        </p:nvSpPr>
+        <p:spPr>
+          <a:xfrm>
+            <a:off x="9509759" y="1920240"/>
+            <a:ext cx="1051560" cy="274320"/>
+          </a:xfrm>
+          <a:prstGeom prst="rect">
+            <a:avLst/>
+          </a:prstGeom>
+          <a:noFill/>
+        </p:spPr>
+        <p:txBody>
+          <a:bodyPr wrap="square">
+            <a:spAutoFit/>
+          </a:bodyPr>
+          <a:lstStyle/>
+          <a:p>
+            <a:pPr algn="ctr">
+              <a:defRPr sz="1000" b="0">
+                <a:solidFill>
+                  <a:srgbClr val="333333"/>
+                </a:solidFill>
+                <a:latin typeface="Segoe UI"/>
+              </a:defRPr>
+            </a:pPr>
+            <a:r>
+              <a:t>Complete</a:t>
+            </a:r>
+          </a:p>
+        </p:txBody>
+      </p:sp>
+      <p:sp>
+        <p:nvSpPr>
+          <p:cNvPr id="26" name="TextBox 25"/>
+          <p:cNvSpPr txBox="1"/>
+          <p:nvPr/>
+        </p:nvSpPr>
+        <p:spPr>
+          <a:xfrm>
+            <a:off x="10607040" y="1508760"/>
+            <a:ext cx="1051560" cy="411480"/>
+          </a:xfrm>
+          <a:prstGeom prst="rect">
+            <a:avLst/>
+          </a:prstGeom>
+          <a:noFill/>
+        </p:spPr>
+        <p:txBody>
+          <a:bodyPr wrap="square">
+            <a:spAutoFit/>
+          </a:bodyPr>
+          <a:lstStyle/>
+          <a:p>
+            <a:pPr algn="ctr">
+              <a:defRPr sz="1800" b="1">
+                <a:solidFill>
+                  <a:srgbClr val="C8102E"/>
+                </a:solidFill>
+                <a:latin typeface="Segoe UI"/>
+              </a:defRPr>
+            </a:pPr>
+            <a:r>
+              <a:t>84.0%</a:t>
+            </a:r>
+          </a:p>
+        </p:txBody>
+      </p:sp>
+      <p:sp>
+        <p:nvSpPr>
+          <p:cNvPr id="27" name="TextBox 26"/>
+          <p:cNvSpPr txBox="1"/>
+          <p:nvPr/>
+        </p:nvSpPr>
+        <p:spPr>
+          <a:xfrm>
+            <a:off x="10607040" y="1920240"/>
+            <a:ext cx="1051560" cy="274320"/>
+          </a:xfrm>
+          <a:prstGeom prst="rect">
+            <a:avLst/>
+          </a:prstGeom>
+          <a:noFill/>
+        </p:spPr>
+        <p:txBody>
+          <a:bodyPr wrap="square">
+            <a:spAutoFit/>
+          </a:bodyPr>
+          <a:lstStyle/>
+          <a:p>
+            <a:pPr algn="ctr">
+              <a:defRPr sz="1000" b="0">
+                <a:solidFill>
+                  <a:srgbClr val="333333"/>
+                </a:solidFill>
+                <a:latin typeface="Segoe UI"/>
+              </a:defRPr>
+            </a:pPr>
+            <a:r>
+              <a:t>Citation</a:t>
+            </a:r>
+          </a:p>
+        </p:txBody>
+      </p:sp>
+      <p:sp>
+        <p:nvSpPr>
+          <p:cNvPr id="28" name="TextBox 27"/>
+          <p:cNvSpPr txBox="1"/>
+          <p:nvPr/>
+        </p:nvSpPr>
+        <p:spPr>
+          <a:xfrm>
+            <a:off x="6217920" y="2286000"/>
+            <a:ext cx="5486400" cy="228600"/>
+          </a:xfrm>
+          <a:prstGeom prst="rect">
+            <a:avLst/>
+          </a:prstGeom>
+          <a:noFill/>
+        </p:spPr>
+        <p:txBody>
+          <a:bodyPr wrap="square">
+            <a:spAutoFit/>
+          </a:bodyPr>
+          <a:lstStyle/>
+          <a:p>
+            <a:pPr algn="l">
+              <a:defRPr sz="1000" b="0">
+                <a:solidFill>
+                  <a:srgbClr val="333333"/>
+                </a:solidFill>
+                <a:latin typeface="Segoe UI"/>
+              </a:defRPr>
+            </a:pPr>
+            <a:r>
+              <a:t>Claude Opus evaluates each response vs ground-truth on 5 dimensions</a:t>
+            </a:r>
+          </a:p>
+        </p:txBody>
+      </p:sp>
+      <p:sp>
+        <p:nvSpPr>
+          <p:cNvPr id="29" name="Rectangle 28"/>
+          <p:cNvSpPr/>
+          <p:nvPr/>
+        </p:nvSpPr>
+        <p:spPr>
+          <a:xfrm>
+            <a:off x="457200" y="2560320"/>
+            <a:ext cx="11247120" cy="18288"/>
           </a:xfrm>
           <a:prstGeom prst="rect">
             <a:avLst/>
@@ -7928,6 +10209,2517 @@
           <a:lstStyle/>
           <a:p>
             <a:pPr algn="ctr"/>
+            <a:endParaRPr/>
+          </a:p>
+        </p:txBody>
+      </p:sp>
+      <p:sp>
+        <p:nvSpPr>
+          <p:cNvPr id="30" name="TextBox 29"/>
+          <p:cNvSpPr txBox="1"/>
+          <p:nvPr/>
+        </p:nvSpPr>
+        <p:spPr>
+          <a:xfrm>
+            <a:off x="457200" y="2743200"/>
+            <a:ext cx="5486400" cy="274320"/>
+          </a:xfrm>
+          <a:prstGeom prst="rect">
+            <a:avLst/>
+          </a:prstGeom>
+          <a:noFill/>
+        </p:spPr>
+        <p:txBody>
+          <a:bodyPr wrap="square">
+            <a:spAutoFit/>
+          </a:bodyPr>
+          <a:lstStyle/>
+          <a:p>
+            <a:pPr algn="l">
+              <a:defRPr sz="1100" b="1">
+                <a:solidFill>
+                  <a:srgbClr val="C8102E"/>
+                </a:solidFill>
+                <a:latin typeface="Segoe UI"/>
+              </a:defRPr>
+            </a:pPr>
+            <a:r>
+              <a:t>LLM-AS-JUDGE PER-CATEGORY (Claude Opus Evaluator)</a:t>
+            </a:r>
+          </a:p>
+        </p:txBody>
+      </p:sp>
+      <p:sp>
+        <p:nvSpPr>
+          <p:cNvPr id="31" name="TextBox 30"/>
+          <p:cNvSpPr txBox="1"/>
+          <p:nvPr/>
+        </p:nvSpPr>
+        <p:spPr>
+          <a:xfrm>
+            <a:off x="457200" y="3108960"/>
+            <a:ext cx="1143000" cy="274320"/>
+          </a:xfrm>
+          <a:prstGeom prst="rect">
+            <a:avLst/>
+          </a:prstGeom>
+          <a:noFill/>
+        </p:spPr>
+        <p:txBody>
+          <a:bodyPr wrap="square">
+            <a:spAutoFit/>
+          </a:bodyPr>
+          <a:lstStyle/>
+          <a:p>
+            <a:pPr algn="l">
+              <a:defRPr sz="1100" b="1">
+                <a:solidFill>
+                  <a:srgbClr val="1B365D"/>
+                </a:solidFill>
+                <a:latin typeface="Segoe UI"/>
+              </a:defRPr>
+            </a:pPr>
+            <a:r>
+              <a:t>Category</a:t>
+            </a:r>
+          </a:p>
+        </p:txBody>
+      </p:sp>
+      <p:sp>
+        <p:nvSpPr>
+          <p:cNvPr id="32" name="TextBox 31"/>
+          <p:cNvSpPr txBox="1"/>
+          <p:nvPr/>
+        </p:nvSpPr>
+        <p:spPr>
+          <a:xfrm>
+            <a:off x="1645920" y="3108960"/>
+            <a:ext cx="1143000" cy="274320"/>
+          </a:xfrm>
+          <a:prstGeom prst="rect">
+            <a:avLst/>
+          </a:prstGeom>
+          <a:noFill/>
+        </p:spPr>
+        <p:txBody>
+          <a:bodyPr wrap="square">
+            <a:spAutoFit/>
+          </a:bodyPr>
+          <a:lstStyle/>
+          <a:p>
+            <a:pPr algn="l">
+              <a:defRPr sz="1100" b="1">
+                <a:solidFill>
+                  <a:srgbClr val="1B365D"/>
+                </a:solidFill>
+                <a:latin typeface="Segoe UI"/>
+              </a:defRPr>
+            </a:pPr>
+            <a:r>
+              <a:t>Correct</a:t>
+            </a:r>
+          </a:p>
+        </p:txBody>
+      </p:sp>
+      <p:sp>
+        <p:nvSpPr>
+          <p:cNvPr id="33" name="TextBox 32"/>
+          <p:cNvSpPr txBox="1"/>
+          <p:nvPr/>
+        </p:nvSpPr>
+        <p:spPr>
+          <a:xfrm>
+            <a:off x="2834640" y="3108960"/>
+            <a:ext cx="1143000" cy="274320"/>
+          </a:xfrm>
+          <a:prstGeom prst="rect">
+            <a:avLst/>
+          </a:prstGeom>
+          <a:noFill/>
+        </p:spPr>
+        <p:txBody>
+          <a:bodyPr wrap="square">
+            <a:spAutoFit/>
+          </a:bodyPr>
+          <a:lstStyle/>
+          <a:p>
+            <a:pPr algn="l">
+              <a:defRPr sz="1100" b="1">
+                <a:solidFill>
+                  <a:srgbClr val="1B365D"/>
+                </a:solidFill>
+                <a:latin typeface="Segoe UI"/>
+              </a:defRPr>
+            </a:pPr>
+            <a:r>
+              <a:t>Complete</a:t>
+            </a:r>
+          </a:p>
+        </p:txBody>
+      </p:sp>
+      <p:sp>
+        <p:nvSpPr>
+          <p:cNvPr id="34" name="TextBox 33"/>
+          <p:cNvSpPr txBox="1"/>
+          <p:nvPr/>
+        </p:nvSpPr>
+        <p:spPr>
+          <a:xfrm>
+            <a:off x="4023360" y="3108960"/>
+            <a:ext cx="1143000" cy="274320"/>
+          </a:xfrm>
+          <a:prstGeom prst="rect">
+            <a:avLst/>
+          </a:prstGeom>
+          <a:noFill/>
+        </p:spPr>
+        <p:txBody>
+          <a:bodyPr wrap="square">
+            <a:spAutoFit/>
+          </a:bodyPr>
+          <a:lstStyle/>
+          <a:p>
+            <a:pPr algn="l">
+              <a:defRPr sz="1100" b="1">
+                <a:solidFill>
+                  <a:srgbClr val="1B365D"/>
+                </a:solidFill>
+                <a:latin typeface="Segoe UI"/>
+              </a:defRPr>
+            </a:pPr>
+            <a:r>
+              <a:t>Faithful</a:t>
+            </a:r>
+          </a:p>
+        </p:txBody>
+      </p:sp>
+      <p:sp>
+        <p:nvSpPr>
+          <p:cNvPr id="35" name="TextBox 34"/>
+          <p:cNvSpPr txBox="1"/>
+          <p:nvPr/>
+        </p:nvSpPr>
+        <p:spPr>
+          <a:xfrm>
+            <a:off x="5212080" y="3108960"/>
+            <a:ext cx="1143000" cy="274320"/>
+          </a:xfrm>
+          <a:prstGeom prst="rect">
+            <a:avLst/>
+          </a:prstGeom>
+          <a:noFill/>
+        </p:spPr>
+        <p:txBody>
+          <a:bodyPr wrap="square">
+            <a:spAutoFit/>
+          </a:bodyPr>
+          <a:lstStyle/>
+          <a:p>
+            <a:pPr algn="l">
+              <a:defRPr sz="1100" b="1">
+                <a:solidFill>
+                  <a:srgbClr val="1B365D"/>
+                </a:solidFill>
+                <a:latin typeface="Segoe UI"/>
+              </a:defRPr>
+            </a:pPr>
+            <a:r>
+              <a:t>Relevant</a:t>
+            </a:r>
+          </a:p>
+        </p:txBody>
+      </p:sp>
+      <p:sp>
+        <p:nvSpPr>
+          <p:cNvPr id="36" name="TextBox 35"/>
+          <p:cNvSpPr txBox="1"/>
+          <p:nvPr/>
+        </p:nvSpPr>
+        <p:spPr>
+          <a:xfrm>
+            <a:off x="6400800" y="3108960"/>
+            <a:ext cx="1143000" cy="274320"/>
+          </a:xfrm>
+          <a:prstGeom prst="rect">
+            <a:avLst/>
+          </a:prstGeom>
+          <a:noFill/>
+        </p:spPr>
+        <p:txBody>
+          <a:bodyPr wrap="square">
+            <a:spAutoFit/>
+          </a:bodyPr>
+          <a:lstStyle/>
+          <a:p>
+            <a:pPr algn="l">
+              <a:defRPr sz="1100" b="1">
+                <a:solidFill>
+                  <a:srgbClr val="1B365D"/>
+                </a:solidFill>
+                <a:latin typeface="Segoe UI"/>
+              </a:defRPr>
+            </a:pPr>
+            <a:r>
+              <a:t>Citation</a:t>
+            </a:r>
+          </a:p>
+        </p:txBody>
+      </p:sp>
+      <p:sp>
+        <p:nvSpPr>
+          <p:cNvPr id="37" name="TextBox 36"/>
+          <p:cNvSpPr txBox="1"/>
+          <p:nvPr/>
+        </p:nvSpPr>
+        <p:spPr>
+          <a:xfrm>
+            <a:off x="457200" y="3410712"/>
+            <a:ext cx="1271238" cy="261610"/>
+          </a:xfrm>
+          <a:prstGeom prst="rect">
+            <a:avLst/>
+          </a:prstGeom>
+          <a:noFill/>
+        </p:spPr>
+        <p:txBody>
+          <a:bodyPr wrap="square">
+            <a:spAutoFit/>
+          </a:bodyPr>
+          <a:lstStyle/>
+          <a:p>
+            <a:pPr algn="l">
+              <a:defRPr sz="1100" b="0">
+                <a:solidFill>
+                  <a:srgbClr val="000000"/>
+                </a:solidFill>
+                <a:latin typeface="Segoe UI"/>
+              </a:defRPr>
+            </a:pPr>
+            <a:r>
+              <a:rPr dirty="0"/>
+              <a:t>Admissions (10)</a:t>
+            </a:r>
+          </a:p>
+        </p:txBody>
+      </p:sp>
+      <p:sp>
+        <p:nvSpPr>
+          <p:cNvPr id="38" name="TextBox 37"/>
+          <p:cNvSpPr txBox="1"/>
+          <p:nvPr/>
+        </p:nvSpPr>
+        <p:spPr>
+          <a:xfrm>
+            <a:off x="1645920" y="3410712"/>
+            <a:ext cx="1143000" cy="274320"/>
+          </a:xfrm>
+          <a:prstGeom prst="rect">
+            <a:avLst/>
+          </a:prstGeom>
+          <a:noFill/>
+        </p:spPr>
+        <p:txBody>
+          <a:bodyPr wrap="square">
+            <a:spAutoFit/>
+          </a:bodyPr>
+          <a:lstStyle/>
+          <a:p>
+            <a:pPr algn="l">
+              <a:defRPr sz="1100" b="0">
+                <a:solidFill>
+                  <a:srgbClr val="000000"/>
+                </a:solidFill>
+                <a:latin typeface="Segoe UI"/>
+              </a:defRPr>
+            </a:pPr>
+            <a:r>
+              <a:t>70%</a:t>
+            </a:r>
+          </a:p>
+        </p:txBody>
+      </p:sp>
+      <p:sp>
+        <p:nvSpPr>
+          <p:cNvPr id="39" name="TextBox 38"/>
+          <p:cNvSpPr txBox="1"/>
+          <p:nvPr/>
+        </p:nvSpPr>
+        <p:spPr>
+          <a:xfrm>
+            <a:off x="2834640" y="3410712"/>
+            <a:ext cx="1143000" cy="274320"/>
+          </a:xfrm>
+          <a:prstGeom prst="rect">
+            <a:avLst/>
+          </a:prstGeom>
+          <a:noFill/>
+        </p:spPr>
+        <p:txBody>
+          <a:bodyPr wrap="square">
+            <a:spAutoFit/>
+          </a:bodyPr>
+          <a:lstStyle/>
+          <a:p>
+            <a:pPr algn="l">
+              <a:defRPr sz="1100" b="0">
+                <a:solidFill>
+                  <a:srgbClr val="000000"/>
+                </a:solidFill>
+                <a:latin typeface="Segoe UI"/>
+              </a:defRPr>
+            </a:pPr>
+            <a:r>
+              <a:t>70%</a:t>
+            </a:r>
+          </a:p>
+        </p:txBody>
+      </p:sp>
+      <p:sp>
+        <p:nvSpPr>
+          <p:cNvPr id="40" name="TextBox 39"/>
+          <p:cNvSpPr txBox="1"/>
+          <p:nvPr/>
+        </p:nvSpPr>
+        <p:spPr>
+          <a:xfrm>
+            <a:off x="4023360" y="3410712"/>
+            <a:ext cx="1143000" cy="274320"/>
+          </a:xfrm>
+          <a:prstGeom prst="rect">
+            <a:avLst/>
+          </a:prstGeom>
+          <a:noFill/>
+        </p:spPr>
+        <p:txBody>
+          <a:bodyPr wrap="square">
+            <a:spAutoFit/>
+          </a:bodyPr>
+          <a:lstStyle/>
+          <a:p>
+            <a:pPr algn="l">
+              <a:defRPr sz="1100" b="0">
+                <a:solidFill>
+                  <a:srgbClr val="000000"/>
+                </a:solidFill>
+                <a:latin typeface="Segoe UI"/>
+              </a:defRPr>
+            </a:pPr>
+            <a:r>
+              <a:t>76%</a:t>
+            </a:r>
+          </a:p>
+        </p:txBody>
+      </p:sp>
+      <p:sp>
+        <p:nvSpPr>
+          <p:cNvPr id="41" name="TextBox 40"/>
+          <p:cNvSpPr txBox="1"/>
+          <p:nvPr/>
+        </p:nvSpPr>
+        <p:spPr>
+          <a:xfrm>
+            <a:off x="5212080" y="3410712"/>
+            <a:ext cx="1143000" cy="274320"/>
+          </a:xfrm>
+          <a:prstGeom prst="rect">
+            <a:avLst/>
+          </a:prstGeom>
+          <a:noFill/>
+        </p:spPr>
+        <p:txBody>
+          <a:bodyPr wrap="square">
+            <a:spAutoFit/>
+          </a:bodyPr>
+          <a:lstStyle/>
+          <a:p>
+            <a:pPr algn="l">
+              <a:defRPr sz="1100" b="0">
+                <a:solidFill>
+                  <a:srgbClr val="000000"/>
+                </a:solidFill>
+                <a:latin typeface="Segoe UI"/>
+              </a:defRPr>
+            </a:pPr>
+            <a:r>
+              <a:t>84%</a:t>
+            </a:r>
+          </a:p>
+        </p:txBody>
+      </p:sp>
+      <p:sp>
+        <p:nvSpPr>
+          <p:cNvPr id="42" name="TextBox 41"/>
+          <p:cNvSpPr txBox="1"/>
+          <p:nvPr/>
+        </p:nvSpPr>
+        <p:spPr>
+          <a:xfrm>
+            <a:off x="6400800" y="3410712"/>
+            <a:ext cx="1143000" cy="274320"/>
+          </a:xfrm>
+          <a:prstGeom prst="rect">
+            <a:avLst/>
+          </a:prstGeom>
+          <a:noFill/>
+        </p:spPr>
+        <p:txBody>
+          <a:bodyPr wrap="square">
+            <a:spAutoFit/>
+          </a:bodyPr>
+          <a:lstStyle/>
+          <a:p>
+            <a:pPr algn="l">
+              <a:defRPr sz="1100" b="0">
+                <a:solidFill>
+                  <a:srgbClr val="000000"/>
+                </a:solidFill>
+                <a:latin typeface="Segoe UI"/>
+              </a:defRPr>
+            </a:pPr>
+            <a:r>
+              <a:t>84%</a:t>
+            </a:r>
+          </a:p>
+        </p:txBody>
+      </p:sp>
+      <p:sp>
+        <p:nvSpPr>
+          <p:cNvPr id="43" name="TextBox 42"/>
+          <p:cNvSpPr txBox="1"/>
+          <p:nvPr/>
+        </p:nvSpPr>
+        <p:spPr>
+          <a:xfrm>
+            <a:off x="457200" y="3712463"/>
+            <a:ext cx="1143000" cy="274320"/>
+          </a:xfrm>
+          <a:prstGeom prst="rect">
+            <a:avLst/>
+          </a:prstGeom>
+          <a:noFill/>
+        </p:spPr>
+        <p:txBody>
+          <a:bodyPr wrap="square">
+            <a:spAutoFit/>
+          </a:bodyPr>
+          <a:lstStyle/>
+          <a:p>
+            <a:pPr algn="l">
+              <a:defRPr sz="1100" b="0">
+                <a:solidFill>
+                  <a:srgbClr val="000000"/>
+                </a:solidFill>
+                <a:latin typeface="Segoe UI"/>
+              </a:defRPr>
+            </a:pPr>
+            <a:r>
+              <a:t>Academics (10)</a:t>
+            </a:r>
+          </a:p>
+        </p:txBody>
+      </p:sp>
+      <p:sp>
+        <p:nvSpPr>
+          <p:cNvPr id="44" name="TextBox 43"/>
+          <p:cNvSpPr txBox="1"/>
+          <p:nvPr/>
+        </p:nvSpPr>
+        <p:spPr>
+          <a:xfrm>
+            <a:off x="1645920" y="3712463"/>
+            <a:ext cx="1143000" cy="274320"/>
+          </a:xfrm>
+          <a:prstGeom prst="rect">
+            <a:avLst/>
+          </a:prstGeom>
+          <a:noFill/>
+        </p:spPr>
+        <p:txBody>
+          <a:bodyPr wrap="square">
+            <a:spAutoFit/>
+          </a:bodyPr>
+          <a:lstStyle/>
+          <a:p>
+            <a:pPr algn="l">
+              <a:defRPr sz="1100" b="0">
+                <a:solidFill>
+                  <a:srgbClr val="000000"/>
+                </a:solidFill>
+                <a:latin typeface="Segoe UI"/>
+              </a:defRPr>
+            </a:pPr>
+            <a:r>
+              <a:t>66%</a:t>
+            </a:r>
+          </a:p>
+        </p:txBody>
+      </p:sp>
+      <p:sp>
+        <p:nvSpPr>
+          <p:cNvPr id="45" name="TextBox 44"/>
+          <p:cNvSpPr txBox="1"/>
+          <p:nvPr/>
+        </p:nvSpPr>
+        <p:spPr>
+          <a:xfrm>
+            <a:off x="2834640" y="3712463"/>
+            <a:ext cx="1143000" cy="274320"/>
+          </a:xfrm>
+          <a:prstGeom prst="rect">
+            <a:avLst/>
+          </a:prstGeom>
+          <a:noFill/>
+        </p:spPr>
+        <p:txBody>
+          <a:bodyPr wrap="square">
+            <a:spAutoFit/>
+          </a:bodyPr>
+          <a:lstStyle/>
+          <a:p>
+            <a:pPr algn="l">
+              <a:defRPr sz="1100" b="0">
+                <a:solidFill>
+                  <a:srgbClr val="000000"/>
+                </a:solidFill>
+                <a:latin typeface="Segoe UI"/>
+              </a:defRPr>
+            </a:pPr>
+            <a:r>
+              <a:t>68%</a:t>
+            </a:r>
+          </a:p>
+        </p:txBody>
+      </p:sp>
+      <p:sp>
+        <p:nvSpPr>
+          <p:cNvPr id="46" name="TextBox 45"/>
+          <p:cNvSpPr txBox="1"/>
+          <p:nvPr/>
+        </p:nvSpPr>
+        <p:spPr>
+          <a:xfrm>
+            <a:off x="4023360" y="3712463"/>
+            <a:ext cx="1143000" cy="274320"/>
+          </a:xfrm>
+          <a:prstGeom prst="rect">
+            <a:avLst/>
+          </a:prstGeom>
+          <a:noFill/>
+        </p:spPr>
+        <p:txBody>
+          <a:bodyPr wrap="square">
+            <a:spAutoFit/>
+          </a:bodyPr>
+          <a:lstStyle/>
+          <a:p>
+            <a:pPr algn="l">
+              <a:defRPr sz="1100" b="0">
+                <a:solidFill>
+                  <a:srgbClr val="000000"/>
+                </a:solidFill>
+                <a:latin typeface="Segoe UI"/>
+              </a:defRPr>
+            </a:pPr>
+            <a:r>
+              <a:t>80%</a:t>
+            </a:r>
+          </a:p>
+        </p:txBody>
+      </p:sp>
+      <p:sp>
+        <p:nvSpPr>
+          <p:cNvPr id="47" name="TextBox 46"/>
+          <p:cNvSpPr txBox="1"/>
+          <p:nvPr/>
+        </p:nvSpPr>
+        <p:spPr>
+          <a:xfrm>
+            <a:off x="5212080" y="3712463"/>
+            <a:ext cx="1143000" cy="274320"/>
+          </a:xfrm>
+          <a:prstGeom prst="rect">
+            <a:avLst/>
+          </a:prstGeom>
+          <a:noFill/>
+        </p:spPr>
+        <p:txBody>
+          <a:bodyPr wrap="square">
+            <a:spAutoFit/>
+          </a:bodyPr>
+          <a:lstStyle/>
+          <a:p>
+            <a:pPr algn="l">
+              <a:defRPr sz="1100" b="0">
+                <a:solidFill>
+                  <a:srgbClr val="000000"/>
+                </a:solidFill>
+                <a:latin typeface="Segoe UI"/>
+              </a:defRPr>
+            </a:pPr>
+            <a:r>
+              <a:t>82%</a:t>
+            </a:r>
+          </a:p>
+        </p:txBody>
+      </p:sp>
+      <p:sp>
+        <p:nvSpPr>
+          <p:cNvPr id="48" name="TextBox 47"/>
+          <p:cNvSpPr txBox="1"/>
+          <p:nvPr/>
+        </p:nvSpPr>
+        <p:spPr>
+          <a:xfrm>
+            <a:off x="6400800" y="3712463"/>
+            <a:ext cx="1143000" cy="274320"/>
+          </a:xfrm>
+          <a:prstGeom prst="rect">
+            <a:avLst/>
+          </a:prstGeom>
+          <a:noFill/>
+        </p:spPr>
+        <p:txBody>
+          <a:bodyPr wrap="square">
+            <a:spAutoFit/>
+          </a:bodyPr>
+          <a:lstStyle/>
+          <a:p>
+            <a:pPr algn="l">
+              <a:defRPr sz="1100" b="0">
+                <a:solidFill>
+                  <a:srgbClr val="000000"/>
+                </a:solidFill>
+                <a:latin typeface="Segoe UI"/>
+              </a:defRPr>
+            </a:pPr>
+            <a:r>
+              <a:t>78%</a:t>
+            </a:r>
+          </a:p>
+        </p:txBody>
+      </p:sp>
+      <p:sp>
+        <p:nvSpPr>
+          <p:cNvPr id="49" name="TextBox 48"/>
+          <p:cNvSpPr txBox="1"/>
+          <p:nvPr/>
+        </p:nvSpPr>
+        <p:spPr>
+          <a:xfrm>
+            <a:off x="457199" y="4014215"/>
+            <a:ext cx="1271239" cy="261610"/>
+          </a:xfrm>
+          <a:prstGeom prst="rect">
+            <a:avLst/>
+          </a:prstGeom>
+          <a:noFill/>
+        </p:spPr>
+        <p:txBody>
+          <a:bodyPr wrap="square">
+            <a:spAutoFit/>
+          </a:bodyPr>
+          <a:lstStyle/>
+          <a:p>
+            <a:pPr algn="l">
+              <a:defRPr sz="1100" b="0">
+                <a:solidFill>
+                  <a:srgbClr val="000000"/>
+                </a:solidFill>
+                <a:latin typeface="Segoe UI"/>
+              </a:defRPr>
+            </a:pPr>
+            <a:r>
+              <a:t>Tuition &amp; Aid (8)</a:t>
+            </a:r>
+          </a:p>
+        </p:txBody>
+      </p:sp>
+      <p:sp>
+        <p:nvSpPr>
+          <p:cNvPr id="50" name="TextBox 49"/>
+          <p:cNvSpPr txBox="1"/>
+          <p:nvPr/>
+        </p:nvSpPr>
+        <p:spPr>
+          <a:xfrm>
+            <a:off x="1645920" y="4014215"/>
+            <a:ext cx="1143000" cy="274320"/>
+          </a:xfrm>
+          <a:prstGeom prst="rect">
+            <a:avLst/>
+          </a:prstGeom>
+          <a:noFill/>
+        </p:spPr>
+        <p:txBody>
+          <a:bodyPr wrap="square">
+            <a:spAutoFit/>
+          </a:bodyPr>
+          <a:lstStyle/>
+          <a:p>
+            <a:pPr algn="l">
+              <a:defRPr sz="1100" b="0">
+                <a:solidFill>
+                  <a:srgbClr val="000000"/>
+                </a:solidFill>
+                <a:latin typeface="Segoe UI"/>
+              </a:defRPr>
+            </a:pPr>
+            <a:r>
+              <a:t>85%</a:t>
+            </a:r>
+          </a:p>
+        </p:txBody>
+      </p:sp>
+      <p:sp>
+        <p:nvSpPr>
+          <p:cNvPr id="51" name="TextBox 50"/>
+          <p:cNvSpPr txBox="1"/>
+          <p:nvPr/>
+        </p:nvSpPr>
+        <p:spPr>
+          <a:xfrm>
+            <a:off x="2834640" y="4014215"/>
+            <a:ext cx="1143000" cy="274320"/>
+          </a:xfrm>
+          <a:prstGeom prst="rect">
+            <a:avLst/>
+          </a:prstGeom>
+          <a:noFill/>
+        </p:spPr>
+        <p:txBody>
+          <a:bodyPr wrap="square">
+            <a:spAutoFit/>
+          </a:bodyPr>
+          <a:lstStyle/>
+          <a:p>
+            <a:pPr algn="l">
+              <a:defRPr sz="1100" b="0">
+                <a:solidFill>
+                  <a:srgbClr val="000000"/>
+                </a:solidFill>
+                <a:latin typeface="Segoe UI"/>
+              </a:defRPr>
+            </a:pPr>
+            <a:r>
+              <a:t>88%</a:t>
+            </a:r>
+          </a:p>
+        </p:txBody>
+      </p:sp>
+      <p:sp>
+        <p:nvSpPr>
+          <p:cNvPr id="52" name="TextBox 51"/>
+          <p:cNvSpPr txBox="1"/>
+          <p:nvPr/>
+        </p:nvSpPr>
+        <p:spPr>
+          <a:xfrm>
+            <a:off x="4023360" y="4014215"/>
+            <a:ext cx="1143000" cy="274320"/>
+          </a:xfrm>
+          <a:prstGeom prst="rect">
+            <a:avLst/>
+          </a:prstGeom>
+          <a:noFill/>
+        </p:spPr>
+        <p:txBody>
+          <a:bodyPr wrap="square">
+            <a:spAutoFit/>
+          </a:bodyPr>
+          <a:lstStyle/>
+          <a:p>
+            <a:pPr algn="l">
+              <a:defRPr sz="1100" b="0">
+                <a:solidFill>
+                  <a:srgbClr val="000000"/>
+                </a:solidFill>
+                <a:latin typeface="Segoe UI"/>
+              </a:defRPr>
+            </a:pPr>
+            <a:r>
+              <a:t>88%</a:t>
+            </a:r>
+          </a:p>
+        </p:txBody>
+      </p:sp>
+      <p:sp>
+        <p:nvSpPr>
+          <p:cNvPr id="53" name="TextBox 52"/>
+          <p:cNvSpPr txBox="1"/>
+          <p:nvPr/>
+        </p:nvSpPr>
+        <p:spPr>
+          <a:xfrm>
+            <a:off x="5212080" y="4014215"/>
+            <a:ext cx="1143000" cy="274320"/>
+          </a:xfrm>
+          <a:prstGeom prst="rect">
+            <a:avLst/>
+          </a:prstGeom>
+          <a:noFill/>
+        </p:spPr>
+        <p:txBody>
+          <a:bodyPr wrap="square">
+            <a:spAutoFit/>
+          </a:bodyPr>
+          <a:lstStyle/>
+          <a:p>
+            <a:pPr algn="l">
+              <a:defRPr sz="1100" b="0">
+                <a:solidFill>
+                  <a:srgbClr val="000000"/>
+                </a:solidFill>
+                <a:latin typeface="Segoe UI"/>
+              </a:defRPr>
+            </a:pPr>
+            <a:r>
+              <a:t>98%</a:t>
+            </a:r>
+          </a:p>
+        </p:txBody>
+      </p:sp>
+      <p:sp>
+        <p:nvSpPr>
+          <p:cNvPr id="54" name="TextBox 53"/>
+          <p:cNvSpPr txBox="1"/>
+          <p:nvPr/>
+        </p:nvSpPr>
+        <p:spPr>
+          <a:xfrm>
+            <a:off x="6400800" y="4014215"/>
+            <a:ext cx="1143000" cy="274320"/>
+          </a:xfrm>
+          <a:prstGeom prst="rect">
+            <a:avLst/>
+          </a:prstGeom>
+          <a:noFill/>
+        </p:spPr>
+        <p:txBody>
+          <a:bodyPr wrap="square">
+            <a:spAutoFit/>
+          </a:bodyPr>
+          <a:lstStyle/>
+          <a:p>
+            <a:pPr algn="l">
+              <a:defRPr sz="1100" b="0">
+                <a:solidFill>
+                  <a:srgbClr val="000000"/>
+                </a:solidFill>
+                <a:latin typeface="Segoe UI"/>
+              </a:defRPr>
+            </a:pPr>
+            <a:r>
+              <a:t>95%</a:t>
+            </a:r>
+          </a:p>
+        </p:txBody>
+      </p:sp>
+      <p:sp>
+        <p:nvSpPr>
+          <p:cNvPr id="55" name="TextBox 54"/>
+          <p:cNvSpPr txBox="1"/>
+          <p:nvPr/>
+        </p:nvSpPr>
+        <p:spPr>
+          <a:xfrm>
+            <a:off x="457200" y="4315968"/>
+            <a:ext cx="1143000" cy="274320"/>
+          </a:xfrm>
+          <a:prstGeom prst="rect">
+            <a:avLst/>
+          </a:prstGeom>
+          <a:noFill/>
+        </p:spPr>
+        <p:txBody>
+          <a:bodyPr wrap="square">
+            <a:spAutoFit/>
+          </a:bodyPr>
+          <a:lstStyle/>
+          <a:p>
+            <a:pPr algn="l">
+              <a:defRPr sz="1100" b="0">
+                <a:solidFill>
+                  <a:srgbClr val="000000"/>
+                </a:solidFill>
+                <a:latin typeface="Segoe UI"/>
+              </a:defRPr>
+            </a:pPr>
+            <a:r>
+              <a:t>Student Life (7)</a:t>
+            </a:r>
+          </a:p>
+        </p:txBody>
+      </p:sp>
+      <p:sp>
+        <p:nvSpPr>
+          <p:cNvPr id="56" name="TextBox 55"/>
+          <p:cNvSpPr txBox="1"/>
+          <p:nvPr/>
+        </p:nvSpPr>
+        <p:spPr>
+          <a:xfrm>
+            <a:off x="1645920" y="4315968"/>
+            <a:ext cx="1143000" cy="274320"/>
+          </a:xfrm>
+          <a:prstGeom prst="rect">
+            <a:avLst/>
+          </a:prstGeom>
+          <a:noFill/>
+        </p:spPr>
+        <p:txBody>
+          <a:bodyPr wrap="square">
+            <a:spAutoFit/>
+          </a:bodyPr>
+          <a:lstStyle/>
+          <a:p>
+            <a:pPr algn="l">
+              <a:defRPr sz="1100" b="0">
+                <a:solidFill>
+                  <a:srgbClr val="000000"/>
+                </a:solidFill>
+                <a:latin typeface="Segoe UI"/>
+              </a:defRPr>
+            </a:pPr>
+            <a:r>
+              <a:t>71%</a:t>
+            </a:r>
+          </a:p>
+        </p:txBody>
+      </p:sp>
+      <p:sp>
+        <p:nvSpPr>
+          <p:cNvPr id="57" name="TextBox 56"/>
+          <p:cNvSpPr txBox="1"/>
+          <p:nvPr/>
+        </p:nvSpPr>
+        <p:spPr>
+          <a:xfrm>
+            <a:off x="2834640" y="4315968"/>
+            <a:ext cx="1143000" cy="274320"/>
+          </a:xfrm>
+          <a:prstGeom prst="rect">
+            <a:avLst/>
+          </a:prstGeom>
+          <a:noFill/>
+        </p:spPr>
+        <p:txBody>
+          <a:bodyPr wrap="square">
+            <a:spAutoFit/>
+          </a:bodyPr>
+          <a:lstStyle/>
+          <a:p>
+            <a:pPr algn="l">
+              <a:defRPr sz="1100" b="0">
+                <a:solidFill>
+                  <a:srgbClr val="000000"/>
+                </a:solidFill>
+                <a:latin typeface="Segoe UI"/>
+              </a:defRPr>
+            </a:pPr>
+            <a:r>
+              <a:t>77%</a:t>
+            </a:r>
+          </a:p>
+        </p:txBody>
+      </p:sp>
+      <p:sp>
+        <p:nvSpPr>
+          <p:cNvPr id="58" name="TextBox 57"/>
+          <p:cNvSpPr txBox="1"/>
+          <p:nvPr/>
+        </p:nvSpPr>
+        <p:spPr>
+          <a:xfrm>
+            <a:off x="4023360" y="4315968"/>
+            <a:ext cx="1143000" cy="274320"/>
+          </a:xfrm>
+          <a:prstGeom prst="rect">
+            <a:avLst/>
+          </a:prstGeom>
+          <a:noFill/>
+        </p:spPr>
+        <p:txBody>
+          <a:bodyPr wrap="square">
+            <a:spAutoFit/>
+          </a:bodyPr>
+          <a:lstStyle/>
+          <a:p>
+            <a:pPr algn="l">
+              <a:defRPr sz="1100" b="0">
+                <a:solidFill>
+                  <a:srgbClr val="000000"/>
+                </a:solidFill>
+                <a:latin typeface="Segoe UI"/>
+              </a:defRPr>
+            </a:pPr>
+            <a:r>
+              <a:t>86%</a:t>
+            </a:r>
+          </a:p>
+        </p:txBody>
+      </p:sp>
+      <p:sp>
+        <p:nvSpPr>
+          <p:cNvPr id="59" name="TextBox 58"/>
+          <p:cNvSpPr txBox="1"/>
+          <p:nvPr/>
+        </p:nvSpPr>
+        <p:spPr>
+          <a:xfrm>
+            <a:off x="5212080" y="4315968"/>
+            <a:ext cx="1143000" cy="274320"/>
+          </a:xfrm>
+          <a:prstGeom prst="rect">
+            <a:avLst/>
+          </a:prstGeom>
+          <a:noFill/>
+        </p:spPr>
+        <p:txBody>
+          <a:bodyPr wrap="square">
+            <a:spAutoFit/>
+          </a:bodyPr>
+          <a:lstStyle/>
+          <a:p>
+            <a:pPr algn="l">
+              <a:defRPr sz="1100" b="0">
+                <a:solidFill>
+                  <a:srgbClr val="000000"/>
+                </a:solidFill>
+                <a:latin typeface="Segoe UI"/>
+              </a:defRPr>
+            </a:pPr>
+            <a:r>
+              <a:t>91%</a:t>
+            </a:r>
+          </a:p>
+        </p:txBody>
+      </p:sp>
+      <p:sp>
+        <p:nvSpPr>
+          <p:cNvPr id="60" name="TextBox 59"/>
+          <p:cNvSpPr txBox="1"/>
+          <p:nvPr/>
+        </p:nvSpPr>
+        <p:spPr>
+          <a:xfrm>
+            <a:off x="6400800" y="4315968"/>
+            <a:ext cx="1143000" cy="274320"/>
+          </a:xfrm>
+          <a:prstGeom prst="rect">
+            <a:avLst/>
+          </a:prstGeom>
+          <a:noFill/>
+        </p:spPr>
+        <p:txBody>
+          <a:bodyPr wrap="square">
+            <a:spAutoFit/>
+          </a:bodyPr>
+          <a:lstStyle/>
+          <a:p>
+            <a:pPr algn="l">
+              <a:defRPr sz="1100" b="0">
+                <a:solidFill>
+                  <a:srgbClr val="000000"/>
+                </a:solidFill>
+                <a:latin typeface="Segoe UI"/>
+              </a:defRPr>
+            </a:pPr>
+            <a:r>
+              <a:t>89%</a:t>
+            </a:r>
+          </a:p>
+        </p:txBody>
+      </p:sp>
+      <p:sp>
+        <p:nvSpPr>
+          <p:cNvPr id="61" name="TextBox 60"/>
+          <p:cNvSpPr txBox="1"/>
+          <p:nvPr/>
+        </p:nvSpPr>
+        <p:spPr>
+          <a:xfrm>
+            <a:off x="457200" y="4617720"/>
+            <a:ext cx="1143000" cy="274320"/>
+          </a:xfrm>
+          <a:prstGeom prst="rect">
+            <a:avLst/>
+          </a:prstGeom>
+          <a:noFill/>
+        </p:spPr>
+        <p:txBody>
+          <a:bodyPr wrap="square">
+            <a:spAutoFit/>
+          </a:bodyPr>
+          <a:lstStyle/>
+          <a:p>
+            <a:pPr algn="l">
+              <a:defRPr sz="1100" b="0">
+                <a:solidFill>
+                  <a:srgbClr val="000000"/>
+                </a:solidFill>
+                <a:latin typeface="Segoe UI"/>
+              </a:defRPr>
+            </a:pPr>
+            <a:r>
+              <a:t>General (10)</a:t>
+            </a:r>
+          </a:p>
+        </p:txBody>
+      </p:sp>
+      <p:sp>
+        <p:nvSpPr>
+          <p:cNvPr id="62" name="TextBox 61"/>
+          <p:cNvSpPr txBox="1"/>
+          <p:nvPr/>
+        </p:nvSpPr>
+        <p:spPr>
+          <a:xfrm>
+            <a:off x="1645920" y="4617720"/>
+            <a:ext cx="1143000" cy="274320"/>
+          </a:xfrm>
+          <a:prstGeom prst="rect">
+            <a:avLst/>
+          </a:prstGeom>
+          <a:noFill/>
+        </p:spPr>
+        <p:txBody>
+          <a:bodyPr wrap="square">
+            <a:spAutoFit/>
+          </a:bodyPr>
+          <a:lstStyle/>
+          <a:p>
+            <a:pPr algn="l">
+              <a:defRPr sz="1100" b="0">
+                <a:solidFill>
+                  <a:srgbClr val="000000"/>
+                </a:solidFill>
+                <a:latin typeface="Segoe UI"/>
+              </a:defRPr>
+            </a:pPr>
+            <a:r>
+              <a:t>76%</a:t>
+            </a:r>
+          </a:p>
+        </p:txBody>
+      </p:sp>
+      <p:sp>
+        <p:nvSpPr>
+          <p:cNvPr id="63" name="TextBox 62"/>
+          <p:cNvSpPr txBox="1"/>
+          <p:nvPr/>
+        </p:nvSpPr>
+        <p:spPr>
+          <a:xfrm>
+            <a:off x="2834640" y="4617720"/>
+            <a:ext cx="1143000" cy="274320"/>
+          </a:xfrm>
+          <a:prstGeom prst="rect">
+            <a:avLst/>
+          </a:prstGeom>
+          <a:noFill/>
+        </p:spPr>
+        <p:txBody>
+          <a:bodyPr wrap="square">
+            <a:spAutoFit/>
+          </a:bodyPr>
+          <a:lstStyle/>
+          <a:p>
+            <a:pPr algn="l">
+              <a:defRPr sz="1100" b="0">
+                <a:solidFill>
+                  <a:srgbClr val="000000"/>
+                </a:solidFill>
+                <a:latin typeface="Segoe UI"/>
+              </a:defRPr>
+            </a:pPr>
+            <a:r>
+              <a:t>78%</a:t>
+            </a:r>
+          </a:p>
+        </p:txBody>
+      </p:sp>
+      <p:sp>
+        <p:nvSpPr>
+          <p:cNvPr id="64" name="TextBox 63"/>
+          <p:cNvSpPr txBox="1"/>
+          <p:nvPr/>
+        </p:nvSpPr>
+        <p:spPr>
+          <a:xfrm>
+            <a:off x="4023360" y="4617720"/>
+            <a:ext cx="1143000" cy="274320"/>
+          </a:xfrm>
+          <a:prstGeom prst="rect">
+            <a:avLst/>
+          </a:prstGeom>
+          <a:noFill/>
+        </p:spPr>
+        <p:txBody>
+          <a:bodyPr wrap="square">
+            <a:spAutoFit/>
+          </a:bodyPr>
+          <a:lstStyle/>
+          <a:p>
+            <a:pPr algn="l">
+              <a:defRPr sz="1100" b="0">
+                <a:solidFill>
+                  <a:srgbClr val="000000"/>
+                </a:solidFill>
+                <a:latin typeface="Segoe UI"/>
+              </a:defRPr>
+            </a:pPr>
+            <a:r>
+              <a:t>86%</a:t>
+            </a:r>
+          </a:p>
+        </p:txBody>
+      </p:sp>
+      <p:sp>
+        <p:nvSpPr>
+          <p:cNvPr id="65" name="TextBox 64"/>
+          <p:cNvSpPr txBox="1"/>
+          <p:nvPr/>
+        </p:nvSpPr>
+        <p:spPr>
+          <a:xfrm>
+            <a:off x="5212080" y="4617720"/>
+            <a:ext cx="1143000" cy="274320"/>
+          </a:xfrm>
+          <a:prstGeom prst="rect">
+            <a:avLst/>
+          </a:prstGeom>
+          <a:noFill/>
+        </p:spPr>
+        <p:txBody>
+          <a:bodyPr wrap="square">
+            <a:spAutoFit/>
+          </a:bodyPr>
+          <a:lstStyle/>
+          <a:p>
+            <a:pPr algn="l">
+              <a:defRPr sz="1100" b="0">
+                <a:solidFill>
+                  <a:srgbClr val="000000"/>
+                </a:solidFill>
+                <a:latin typeface="Segoe UI"/>
+              </a:defRPr>
+            </a:pPr>
+            <a:r>
+              <a:t>90%</a:t>
+            </a:r>
+          </a:p>
+        </p:txBody>
+      </p:sp>
+      <p:sp>
+        <p:nvSpPr>
+          <p:cNvPr id="66" name="TextBox 65"/>
+          <p:cNvSpPr txBox="1"/>
+          <p:nvPr/>
+        </p:nvSpPr>
+        <p:spPr>
+          <a:xfrm>
+            <a:off x="6400800" y="4617720"/>
+            <a:ext cx="1143000" cy="274320"/>
+          </a:xfrm>
+          <a:prstGeom prst="rect">
+            <a:avLst/>
+          </a:prstGeom>
+          <a:noFill/>
+        </p:spPr>
+        <p:txBody>
+          <a:bodyPr wrap="square">
+            <a:spAutoFit/>
+          </a:bodyPr>
+          <a:lstStyle/>
+          <a:p>
+            <a:pPr algn="l">
+              <a:defRPr sz="1100" b="0">
+                <a:solidFill>
+                  <a:srgbClr val="000000"/>
+                </a:solidFill>
+                <a:latin typeface="Segoe UI"/>
+              </a:defRPr>
+            </a:pPr>
+            <a:r>
+              <a:t>78%</a:t>
+            </a:r>
+          </a:p>
+        </p:txBody>
+      </p:sp>
+      <p:sp>
+        <p:nvSpPr>
+          <p:cNvPr id="67" name="TextBox 66"/>
+          <p:cNvSpPr txBox="1"/>
+          <p:nvPr/>
+        </p:nvSpPr>
+        <p:spPr>
+          <a:xfrm>
+            <a:off x="457200" y="4919472"/>
+            <a:ext cx="1271238" cy="261610"/>
+          </a:xfrm>
+          <a:prstGeom prst="rect">
+            <a:avLst/>
+          </a:prstGeom>
+          <a:noFill/>
+        </p:spPr>
+        <p:txBody>
+          <a:bodyPr wrap="square">
+            <a:spAutoFit/>
+          </a:bodyPr>
+          <a:lstStyle/>
+          <a:p>
+            <a:pPr algn="l">
+              <a:defRPr sz="1100" b="0">
+                <a:solidFill>
+                  <a:srgbClr val="000000"/>
+                </a:solidFill>
+                <a:latin typeface="Segoe UI"/>
+              </a:defRPr>
+            </a:pPr>
+            <a:r>
+              <a:rPr dirty="0" err="1"/>
+              <a:t>OutofDomain</a:t>
+            </a:r>
+            <a:r>
+              <a:rPr dirty="0"/>
+              <a:t> (5)</a:t>
+            </a:r>
+          </a:p>
+        </p:txBody>
+      </p:sp>
+      <p:sp>
+        <p:nvSpPr>
+          <p:cNvPr id="68" name="TextBox 67"/>
+          <p:cNvSpPr txBox="1"/>
+          <p:nvPr/>
+        </p:nvSpPr>
+        <p:spPr>
+          <a:xfrm>
+            <a:off x="1645920" y="4919472"/>
+            <a:ext cx="1143000" cy="274320"/>
+          </a:xfrm>
+          <a:prstGeom prst="rect">
+            <a:avLst/>
+          </a:prstGeom>
+          <a:noFill/>
+        </p:spPr>
+        <p:txBody>
+          <a:bodyPr wrap="square">
+            <a:spAutoFit/>
+          </a:bodyPr>
+          <a:lstStyle/>
+          <a:p>
+            <a:pPr algn="l">
+              <a:defRPr sz="1100" b="0">
+                <a:solidFill>
+                  <a:srgbClr val="000000"/>
+                </a:solidFill>
+                <a:latin typeface="Segoe UI"/>
+              </a:defRPr>
+            </a:pPr>
+            <a:r>
+              <a:t>76%</a:t>
+            </a:r>
+          </a:p>
+        </p:txBody>
+      </p:sp>
+      <p:sp>
+        <p:nvSpPr>
+          <p:cNvPr id="69" name="TextBox 68"/>
+          <p:cNvSpPr txBox="1"/>
+          <p:nvPr/>
+        </p:nvSpPr>
+        <p:spPr>
+          <a:xfrm>
+            <a:off x="2834640" y="4919472"/>
+            <a:ext cx="1143000" cy="274320"/>
+          </a:xfrm>
+          <a:prstGeom prst="rect">
+            <a:avLst/>
+          </a:prstGeom>
+          <a:noFill/>
+        </p:spPr>
+        <p:txBody>
+          <a:bodyPr wrap="square">
+            <a:spAutoFit/>
+          </a:bodyPr>
+          <a:lstStyle/>
+          <a:p>
+            <a:pPr algn="l">
+              <a:defRPr sz="1100" b="0">
+                <a:solidFill>
+                  <a:srgbClr val="000000"/>
+                </a:solidFill>
+                <a:latin typeface="Segoe UI"/>
+              </a:defRPr>
+            </a:pPr>
+            <a:r>
+              <a:t>84%</a:t>
+            </a:r>
+          </a:p>
+        </p:txBody>
+      </p:sp>
+      <p:sp>
+        <p:nvSpPr>
+          <p:cNvPr id="70" name="TextBox 69"/>
+          <p:cNvSpPr txBox="1"/>
+          <p:nvPr/>
+        </p:nvSpPr>
+        <p:spPr>
+          <a:xfrm>
+            <a:off x="4023360" y="4919472"/>
+            <a:ext cx="1143000" cy="274320"/>
+          </a:xfrm>
+          <a:prstGeom prst="rect">
+            <a:avLst/>
+          </a:prstGeom>
+          <a:noFill/>
+        </p:spPr>
+        <p:txBody>
+          <a:bodyPr wrap="square">
+            <a:spAutoFit/>
+          </a:bodyPr>
+          <a:lstStyle/>
+          <a:p>
+            <a:pPr algn="l">
+              <a:defRPr sz="1100" b="0">
+                <a:solidFill>
+                  <a:srgbClr val="000000"/>
+                </a:solidFill>
+                <a:latin typeface="Segoe UI"/>
+              </a:defRPr>
+            </a:pPr>
+            <a:r>
+              <a:t>84%</a:t>
+            </a:r>
+          </a:p>
+        </p:txBody>
+      </p:sp>
+      <p:sp>
+        <p:nvSpPr>
+          <p:cNvPr id="71" name="TextBox 70"/>
+          <p:cNvSpPr txBox="1"/>
+          <p:nvPr/>
+        </p:nvSpPr>
+        <p:spPr>
+          <a:xfrm>
+            <a:off x="5212080" y="4919472"/>
+            <a:ext cx="1143000" cy="274320"/>
+          </a:xfrm>
+          <a:prstGeom prst="rect">
+            <a:avLst/>
+          </a:prstGeom>
+          <a:noFill/>
+        </p:spPr>
+        <p:txBody>
+          <a:bodyPr wrap="square">
+            <a:spAutoFit/>
+          </a:bodyPr>
+          <a:lstStyle/>
+          <a:p>
+            <a:pPr algn="l">
+              <a:defRPr sz="1100" b="0">
+                <a:solidFill>
+                  <a:srgbClr val="000000"/>
+                </a:solidFill>
+                <a:latin typeface="Segoe UI"/>
+              </a:defRPr>
+            </a:pPr>
+            <a:r>
+              <a:t>76%</a:t>
+            </a:r>
+          </a:p>
+        </p:txBody>
+      </p:sp>
+      <p:sp>
+        <p:nvSpPr>
+          <p:cNvPr id="72" name="TextBox 71"/>
+          <p:cNvSpPr txBox="1"/>
+          <p:nvPr/>
+        </p:nvSpPr>
+        <p:spPr>
+          <a:xfrm>
+            <a:off x="6400800" y="4919472"/>
+            <a:ext cx="1143000" cy="274320"/>
+          </a:xfrm>
+          <a:prstGeom prst="rect">
+            <a:avLst/>
+          </a:prstGeom>
+          <a:noFill/>
+        </p:spPr>
+        <p:txBody>
+          <a:bodyPr wrap="square">
+            <a:spAutoFit/>
+          </a:bodyPr>
+          <a:lstStyle/>
+          <a:p>
+            <a:pPr algn="l">
+              <a:defRPr sz="1100" b="0">
+                <a:solidFill>
+                  <a:srgbClr val="000000"/>
+                </a:solidFill>
+                <a:latin typeface="Segoe UI"/>
+              </a:defRPr>
+            </a:pPr>
+            <a:r>
+              <a:t>84%</a:t>
+            </a:r>
+          </a:p>
+        </p:txBody>
+      </p:sp>
+      <p:sp>
+        <p:nvSpPr>
+          <p:cNvPr id="73" name="TextBox 72"/>
+          <p:cNvSpPr txBox="1"/>
+          <p:nvPr/>
+        </p:nvSpPr>
+        <p:spPr>
+          <a:xfrm>
+            <a:off x="7772400" y="2743200"/>
+            <a:ext cx="3931920" cy="274320"/>
+          </a:xfrm>
+          <a:prstGeom prst="rect">
+            <a:avLst/>
+          </a:prstGeom>
+          <a:noFill/>
+        </p:spPr>
+        <p:txBody>
+          <a:bodyPr wrap="square">
+            <a:spAutoFit/>
+          </a:bodyPr>
+          <a:lstStyle/>
+          <a:p>
+            <a:pPr algn="l">
+              <a:defRPr sz="1100" b="1">
+                <a:solidFill>
+                  <a:srgbClr val="C8102E"/>
+                </a:solidFill>
+                <a:latin typeface="Segoe UI"/>
+              </a:defRPr>
+            </a:pPr>
+            <a:r>
+              <a:t>PERFORMANCE &amp; METHOD</a:t>
+            </a:r>
+          </a:p>
+        </p:txBody>
+      </p:sp>
+      <p:sp>
+        <p:nvSpPr>
+          <p:cNvPr id="74" name="TextBox 73"/>
+          <p:cNvSpPr txBox="1"/>
+          <p:nvPr/>
+        </p:nvSpPr>
+        <p:spPr>
+          <a:xfrm>
+            <a:off x="7772400" y="3108960"/>
+            <a:ext cx="3931920" cy="274320"/>
+          </a:xfrm>
+          <a:prstGeom prst="rect">
+            <a:avLst/>
+          </a:prstGeom>
+          <a:noFill/>
+        </p:spPr>
+        <p:txBody>
+          <a:bodyPr wrap="square">
+            <a:spAutoFit/>
+          </a:bodyPr>
+          <a:lstStyle/>
+          <a:p>
+            <a:pPr algn="l">
+              <a:defRPr sz="1100" b="0">
+                <a:solidFill>
+                  <a:srgbClr val="000000"/>
+                </a:solidFill>
+                <a:latin typeface="Segoe UI"/>
+              </a:defRPr>
+            </a:pPr>
+            <a:r>
+              <a:t>•  Source retrieval rate: 68.9%</a:t>
+            </a:r>
+          </a:p>
+        </p:txBody>
+      </p:sp>
+      <p:sp>
+        <p:nvSpPr>
+          <p:cNvPr id="75" name="TextBox 74"/>
+          <p:cNvSpPr txBox="1"/>
+          <p:nvPr/>
+        </p:nvSpPr>
+        <p:spPr>
+          <a:xfrm>
+            <a:off x="7772400" y="3410712"/>
+            <a:ext cx="3931920" cy="274320"/>
+          </a:xfrm>
+          <a:prstGeom prst="rect">
+            <a:avLst/>
+          </a:prstGeom>
+          <a:noFill/>
+        </p:spPr>
+        <p:txBody>
+          <a:bodyPr wrap="square">
+            <a:spAutoFit/>
+          </a:bodyPr>
+          <a:lstStyle/>
+          <a:p>
+            <a:pPr algn="l">
+              <a:defRPr sz="1100" b="0">
+                <a:solidFill>
+                  <a:srgbClr val="000000"/>
+                </a:solidFill>
+                <a:latin typeface="Segoe UI"/>
+              </a:defRPr>
+            </a:pPr>
+            <a:r>
+              <a:t>•  Avg similarity: 0.7109</a:t>
+            </a:r>
+          </a:p>
+        </p:txBody>
+      </p:sp>
+      <p:sp>
+        <p:nvSpPr>
+          <p:cNvPr id="76" name="TextBox 75"/>
+          <p:cNvSpPr txBox="1"/>
+          <p:nvPr/>
+        </p:nvSpPr>
+        <p:spPr>
+          <a:xfrm>
+            <a:off x="7772400" y="3712463"/>
+            <a:ext cx="3931920" cy="274320"/>
+          </a:xfrm>
+          <a:prstGeom prst="rect">
+            <a:avLst/>
+          </a:prstGeom>
+          <a:noFill/>
+        </p:spPr>
+        <p:txBody>
+          <a:bodyPr wrap="square">
+            <a:spAutoFit/>
+          </a:bodyPr>
+          <a:lstStyle/>
+          <a:p>
+            <a:pPr algn="l">
+              <a:defRPr sz="1100" b="0">
+                <a:solidFill>
+                  <a:srgbClr val="000000"/>
+                </a:solidFill>
+                <a:latin typeface="Segoe UI"/>
+              </a:defRPr>
+            </a:pPr>
+            <a:r>
+              <a:t>•  Avg retrieval: 0.079 sec</a:t>
+            </a:r>
+          </a:p>
+        </p:txBody>
+      </p:sp>
+      <p:sp>
+        <p:nvSpPr>
+          <p:cNvPr id="77" name="TextBox 76"/>
+          <p:cNvSpPr txBox="1"/>
+          <p:nvPr/>
+        </p:nvSpPr>
+        <p:spPr>
+          <a:xfrm>
+            <a:off x="7772400" y="4014215"/>
+            <a:ext cx="3931920" cy="274320"/>
+          </a:xfrm>
+          <a:prstGeom prst="rect">
+            <a:avLst/>
+          </a:prstGeom>
+          <a:noFill/>
+        </p:spPr>
+        <p:txBody>
+          <a:bodyPr wrap="square">
+            <a:spAutoFit/>
+          </a:bodyPr>
+          <a:lstStyle/>
+          <a:p>
+            <a:pPr algn="l">
+              <a:defRPr sz="1100" b="0">
+                <a:solidFill>
+                  <a:srgbClr val="000000"/>
+                </a:solidFill>
+                <a:latin typeface="Segoe UI"/>
+              </a:defRPr>
+            </a:pPr>
+            <a:r>
+              <a:t>•  Avg generation: 3.7 sec</a:t>
+            </a:r>
+          </a:p>
+        </p:txBody>
+      </p:sp>
+      <p:sp>
+        <p:nvSpPr>
+          <p:cNvPr id="78" name="TextBox 77"/>
+          <p:cNvSpPr txBox="1"/>
+          <p:nvPr/>
+        </p:nvSpPr>
+        <p:spPr>
+          <a:xfrm>
+            <a:off x="7772400" y="4315968"/>
+            <a:ext cx="3931920" cy="274320"/>
+          </a:xfrm>
+          <a:prstGeom prst="rect">
+            <a:avLst/>
+          </a:prstGeom>
+          <a:noFill/>
+        </p:spPr>
+        <p:txBody>
+          <a:bodyPr wrap="square">
+            <a:spAutoFit/>
+          </a:bodyPr>
+          <a:lstStyle/>
+          <a:p>
+            <a:pPr algn="l">
+              <a:defRPr sz="1100" b="0">
+                <a:solidFill>
+                  <a:srgbClr val="000000"/>
+                </a:solidFill>
+                <a:latin typeface="Segoe UI"/>
+              </a:defRPr>
+            </a:pPr>
+            <a:r>
+              <a:t>•  50/50 tests, 0 errors</a:t>
+            </a:r>
+          </a:p>
+        </p:txBody>
+      </p:sp>
+      <p:sp>
+        <p:nvSpPr>
+          <p:cNvPr id="79" name="TextBox 78"/>
+          <p:cNvSpPr txBox="1"/>
+          <p:nvPr/>
+        </p:nvSpPr>
+        <p:spPr>
+          <a:xfrm>
+            <a:off x="7772400" y="4617720"/>
+            <a:ext cx="3931920" cy="274320"/>
+          </a:xfrm>
+          <a:prstGeom prst="rect">
+            <a:avLst/>
+          </a:prstGeom>
+          <a:noFill/>
+        </p:spPr>
+        <p:txBody>
+          <a:bodyPr wrap="square">
+            <a:spAutoFit/>
+          </a:bodyPr>
+          <a:lstStyle/>
+          <a:p>
+            <a:pPr algn="l">
+              <a:defRPr sz="1100" b="0">
+                <a:solidFill>
+                  <a:srgbClr val="000000"/>
+                </a:solidFill>
+                <a:latin typeface="Segoe UI"/>
+              </a:defRPr>
+            </a:pPr>
+            <a:r>
+              <a:t>•  Ground-truth from UC docs</a:t>
+            </a:r>
+          </a:p>
+        </p:txBody>
+      </p:sp>
+      <p:sp>
+        <p:nvSpPr>
+          <p:cNvPr id="80" name="TextBox 79"/>
+          <p:cNvSpPr txBox="1"/>
+          <p:nvPr/>
+        </p:nvSpPr>
+        <p:spPr>
+          <a:xfrm>
+            <a:off x="7772400" y="4919472"/>
+            <a:ext cx="3931920" cy="274320"/>
+          </a:xfrm>
+          <a:prstGeom prst="rect">
+            <a:avLst/>
+          </a:prstGeom>
+          <a:noFill/>
+        </p:spPr>
+        <p:txBody>
+          <a:bodyPr wrap="square">
+            <a:spAutoFit/>
+          </a:bodyPr>
+          <a:lstStyle/>
+          <a:p>
+            <a:pPr algn="l">
+              <a:defRPr sz="1100" b="0">
+                <a:solidFill>
+                  <a:srgbClr val="000000"/>
+                </a:solidFill>
+                <a:latin typeface="Segoe UI"/>
+              </a:defRPr>
+            </a:pPr>
+            <a:r>
+              <a:t>•  Judge: Claude Opus via Bedrock</a:t>
+            </a:r>
+          </a:p>
+        </p:txBody>
+      </p:sp>
+    </p:spTree>
+  </p:cSld>
+  <p:clrMapOvr>
+    <a:masterClrMapping/>
+  </p:clrMapOvr>
+</p:sld>
+</file>
+
+<file path=ppt/slides/slide9.xml><?xml version="1.0" encoding="utf-8"?>
+<p:sld xmlns:a="http://schemas.openxmlformats.org/drawingml/2006/main" xmlns:r="http://schemas.openxmlformats.org/officeDocument/2006/relationships" xmlns:p="http://schemas.openxmlformats.org/presentationml/2006/main">
+  <p:cSld>
+    <p:spTree>
+      <p:nvGrpSpPr>
+        <p:cNvPr id="1" name=""/>
+        <p:cNvGrpSpPr/>
+        <p:nvPr/>
+      </p:nvGrpSpPr>
+      <p:grpSpPr>
+        <a:xfrm>
+          <a:off x="0" y="0"/>
+          <a:ext cx="0" cy="0"/>
+          <a:chOff x="0" y="0"/>
+          <a:chExt cx="0" cy="0"/>
+        </a:xfrm>
+      </p:grpSpPr>
+      <p:sp>
+        <p:nvSpPr>
+          <p:cNvPr id="2" name="Rectangle 1"/>
+          <p:cNvSpPr/>
+          <p:nvPr/>
+        </p:nvSpPr>
+        <p:spPr>
+          <a:xfrm>
+            <a:off x="0" y="0"/>
+            <a:ext cx="12191695" cy="868680"/>
+          </a:xfrm>
+          <a:prstGeom prst="rect">
+            <a:avLst/>
+          </a:prstGeom>
+          <a:solidFill>
+            <a:srgbClr val="FFFFFF"/>
+          </a:solidFill>
+          <a:ln>
+            <a:noFill/>
+          </a:ln>
+        </p:spPr>
+        <p:style>
+          <a:lnRef idx="1">
+            <a:schemeClr val="accent1"/>
+          </a:lnRef>
+          <a:fillRef idx="3">
+            <a:schemeClr val="accent1"/>
+          </a:fillRef>
+          <a:effectRef idx="2">
+            <a:schemeClr val="accent1"/>
+          </a:effectRef>
+          <a:fontRef idx="minor">
+            <a:schemeClr val="lt1"/>
+          </a:fontRef>
+        </p:style>
+        <p:txBody>
+          <a:bodyPr rtlCol="0" anchor="ctr"/>
+          <a:lstStyle/>
+          <a:p>
+            <a:pPr algn="ctr"/>
+            <a:endParaRPr/>
+          </a:p>
+        </p:txBody>
+      </p:sp>
+      <p:sp>
+        <p:nvSpPr>
+          <p:cNvPr id="3" name="Rectangle 2"/>
+          <p:cNvSpPr/>
+          <p:nvPr/>
+        </p:nvSpPr>
+        <p:spPr>
+          <a:xfrm>
+            <a:off x="0" y="850392"/>
+            <a:ext cx="12191695" cy="36576"/>
+          </a:xfrm>
+          <a:prstGeom prst="rect">
+            <a:avLst/>
+          </a:prstGeom>
+          <a:solidFill>
+            <a:srgbClr val="C8102E"/>
+          </a:solidFill>
+          <a:ln>
+            <a:noFill/>
+          </a:ln>
+        </p:spPr>
+        <p:style>
+          <a:lnRef idx="1">
+            <a:schemeClr val="accent1"/>
+          </a:lnRef>
+          <a:fillRef idx="3">
+            <a:schemeClr val="accent1"/>
+          </a:fillRef>
+          <a:effectRef idx="2">
+            <a:schemeClr val="accent1"/>
+          </a:effectRef>
+          <a:fontRef idx="minor">
+            <a:schemeClr val="lt1"/>
+          </a:fontRef>
+        </p:style>
+        <p:txBody>
+          <a:bodyPr rtlCol="0" anchor="ctr"/>
+          <a:lstStyle/>
+          <a:p>
+            <a:pPr algn="ctr"/>
+            <a:endParaRPr/>
+          </a:p>
+        </p:txBody>
+      </p:sp>
+      <p:sp>
+        <p:nvSpPr>
+          <p:cNvPr id="4" name="TextBox 3"/>
+          <p:cNvSpPr txBox="1"/>
+          <p:nvPr/>
+        </p:nvSpPr>
+        <p:spPr>
+          <a:xfrm>
+            <a:off x="640080" y="182880"/>
+            <a:ext cx="9144000" cy="640080"/>
+          </a:xfrm>
+          <a:prstGeom prst="rect">
+            <a:avLst/>
+          </a:prstGeom>
+          <a:noFill/>
+        </p:spPr>
+        <p:txBody>
+          <a:bodyPr wrap="none" anchor="ctr">
+            <a:spAutoFit/>
+          </a:bodyPr>
+          <a:lstStyle/>
+          <a:p>
+            <a:pPr>
+              <a:defRPr sz="2400" b="1">
+                <a:solidFill>
+                  <a:srgbClr val="1B365D"/>
+                </a:solidFill>
+                <a:latin typeface="Segoe UI"/>
+              </a:defRPr>
+            </a:pPr>
+            <a:r>
+              <a:t>Ethics, Safety &amp; Governance</a:t>
+            </a:r>
+          </a:p>
+        </p:txBody>
+      </p:sp>
+      <p:sp>
+        <p:nvSpPr>
+          <p:cNvPr id="5" name="Rounded Rectangle 4"/>
+          <p:cNvSpPr/>
+          <p:nvPr/>
+        </p:nvSpPr>
+        <p:spPr>
+          <a:xfrm>
+            <a:off x="640080" y="1097280"/>
+            <a:ext cx="3474720" cy="384048"/>
+          </a:xfrm>
+          <a:prstGeom prst="roundRect">
+            <a:avLst/>
+          </a:prstGeom>
+          <a:solidFill>
+            <a:srgbClr val="1B365D"/>
+          </a:solidFill>
+          <a:ln>
+            <a:noFill/>
+          </a:ln>
+        </p:spPr>
+        <p:style>
+          <a:lnRef idx="1">
+            <a:schemeClr val="accent1"/>
+          </a:lnRef>
+          <a:fillRef idx="3">
+            <a:schemeClr val="accent1"/>
+          </a:fillRef>
+          <a:effectRef idx="2">
+            <a:schemeClr val="accent1"/>
+          </a:effectRef>
+          <a:fontRef idx="minor">
+            <a:schemeClr val="lt1"/>
+          </a:fontRef>
+        </p:style>
+        <p:txBody>
+          <a:bodyPr wrap="square" rtlCol="0" anchor="ctr"/>
+          <a:lstStyle/>
+          <a:p>
+            <a:pPr algn="ctr">
+              <a:defRPr sz="1000" b="1">
+                <a:solidFill>
+                  <a:srgbClr val="FFFFFF"/>
+                </a:solidFill>
+                <a:latin typeface="Segoe UI"/>
+              </a:defRPr>
+            </a:pPr>
+            <a:r>
+              <a:t>CRAWL ETIQUETTE</a:t>
+            </a:r>
+          </a:p>
+        </p:txBody>
+      </p:sp>
+      <p:sp>
+        <p:nvSpPr>
+          <p:cNvPr id="6" name="TextBox 5"/>
+          <p:cNvSpPr txBox="1"/>
+          <p:nvPr/>
+        </p:nvSpPr>
+        <p:spPr>
+          <a:xfrm>
+            <a:off x="822960" y="1600200"/>
+            <a:ext cx="3291840" cy="301752"/>
+          </a:xfrm>
+          <a:prstGeom prst="rect">
+            <a:avLst/>
+          </a:prstGeom>
+          <a:noFill/>
+        </p:spPr>
+        <p:txBody>
+          <a:bodyPr wrap="square">
+            <a:spAutoFit/>
+          </a:bodyPr>
+          <a:lstStyle/>
+          <a:p>
+            <a:pPr algn="l">
+              <a:defRPr sz="1000" b="0">
+                <a:solidFill>
+                  <a:srgbClr val="000000"/>
+                </a:solidFill>
+                <a:latin typeface="Segoe UI"/>
+              </a:defRPr>
+            </a:pPr>
+            <a:r>
+              <a:t>•  100ms delay between requests</a:t>
+            </a:r>
+          </a:p>
+        </p:txBody>
+      </p:sp>
+      <p:sp>
+        <p:nvSpPr>
+          <p:cNvPr id="7" name="TextBox 6"/>
+          <p:cNvSpPr txBox="1"/>
+          <p:nvPr/>
+        </p:nvSpPr>
+        <p:spPr>
+          <a:xfrm>
+            <a:off x="822960" y="1920240"/>
+            <a:ext cx="3291840" cy="301752"/>
+          </a:xfrm>
+          <a:prstGeom prst="rect">
+            <a:avLst/>
+          </a:prstGeom>
+          <a:noFill/>
+        </p:spPr>
+        <p:txBody>
+          <a:bodyPr wrap="square">
+            <a:spAutoFit/>
+          </a:bodyPr>
+          <a:lstStyle/>
+          <a:p>
+            <a:pPr algn="l">
+              <a:defRPr sz="1000" b="0">
+                <a:solidFill>
+                  <a:srgbClr val="000000"/>
+                </a:solidFill>
+                <a:latin typeface="Segoe UI"/>
+              </a:defRPr>
+            </a:pPr>
+            <a:r>
+              <a:t>•  Respects robots.txt directives</a:t>
+            </a:r>
+          </a:p>
+        </p:txBody>
+      </p:sp>
+      <p:sp>
+        <p:nvSpPr>
+          <p:cNvPr id="8" name="TextBox 7"/>
+          <p:cNvSpPr txBox="1"/>
+          <p:nvPr/>
+        </p:nvSpPr>
+        <p:spPr>
+          <a:xfrm>
+            <a:off x="822960" y="2240280"/>
+            <a:ext cx="3291840" cy="301752"/>
+          </a:xfrm>
+          <a:prstGeom prst="rect">
+            <a:avLst/>
+          </a:prstGeom>
+          <a:noFill/>
+        </p:spPr>
+        <p:txBody>
+          <a:bodyPr wrap="square">
+            <a:spAutoFit/>
+          </a:bodyPr>
+          <a:lstStyle/>
+          <a:p>
+            <a:pPr algn="l">
+              <a:defRPr sz="1000" b="0">
+                <a:solidFill>
+                  <a:srgbClr val="000000"/>
+                </a:solidFill>
+                <a:latin typeface="Segoe UI"/>
+              </a:defRPr>
+            </a:pPr>
+            <a:r>
+              <a:t>•  Only public pages (no login-gated)</a:t>
+            </a:r>
+          </a:p>
+        </p:txBody>
+      </p:sp>
+      <p:sp>
+        <p:nvSpPr>
+          <p:cNvPr id="9" name="TextBox 8"/>
+          <p:cNvSpPr txBox="1"/>
+          <p:nvPr/>
+        </p:nvSpPr>
+        <p:spPr>
+          <a:xfrm>
+            <a:off x="822960" y="2560320"/>
+            <a:ext cx="3291840" cy="301752"/>
+          </a:xfrm>
+          <a:prstGeom prst="rect">
+            <a:avLst/>
+          </a:prstGeom>
+          <a:noFill/>
+        </p:spPr>
+        <p:txBody>
+          <a:bodyPr wrap="square">
+            <a:spAutoFit/>
+          </a:bodyPr>
+          <a:lstStyle/>
+          <a:p>
+            <a:pPr algn="l">
+              <a:defRPr sz="1000" b="0">
+                <a:solidFill>
+                  <a:srgbClr val="000000"/>
+                </a:solidFill>
+                <a:latin typeface="Segoe UI"/>
+              </a:defRPr>
+            </a:pPr>
+            <a:r>
+              <a:t>•  Identified bot User-Agent header</a:t>
+            </a:r>
+          </a:p>
+        </p:txBody>
+      </p:sp>
+      <p:sp>
+        <p:nvSpPr>
+          <p:cNvPr id="10" name="TextBox 9"/>
+          <p:cNvSpPr txBox="1"/>
+          <p:nvPr/>
+        </p:nvSpPr>
+        <p:spPr>
+          <a:xfrm>
+            <a:off x="822960" y="2880360"/>
+            <a:ext cx="3291840" cy="301752"/>
+          </a:xfrm>
+          <a:prstGeom prst="rect">
+            <a:avLst/>
+          </a:prstGeom>
+          <a:noFill/>
+        </p:spPr>
+        <p:txBody>
+          <a:bodyPr wrap="square">
+            <a:spAutoFit/>
+          </a:bodyPr>
+          <a:lstStyle/>
+          <a:p>
+            <a:pPr algn="l">
+              <a:defRPr sz="1000" b="0">
+                <a:solidFill>
+                  <a:srgbClr val="000000"/>
+                </a:solidFill>
+                <a:latin typeface="Segoe UI"/>
+              </a:defRPr>
+            </a:pPr>
+            <a:r>
+              <a:t>•  Data for academic use only</a:t>
+            </a:r>
+          </a:p>
+        </p:txBody>
+      </p:sp>
+      <p:sp>
+        <p:nvSpPr>
+          <p:cNvPr id="11" name="Rounded Rectangle 10"/>
+          <p:cNvSpPr/>
+          <p:nvPr/>
+        </p:nvSpPr>
+        <p:spPr>
+          <a:xfrm>
+            <a:off x="4389120" y="1097280"/>
+            <a:ext cx="3474720" cy="384048"/>
+          </a:xfrm>
+          <a:prstGeom prst="roundRect">
+            <a:avLst/>
+          </a:prstGeom>
+          <a:solidFill>
+            <a:srgbClr val="C8102E"/>
+          </a:solidFill>
+          <a:ln>
+            <a:noFill/>
+          </a:ln>
+        </p:spPr>
+        <p:style>
+          <a:lnRef idx="1">
+            <a:schemeClr val="accent1"/>
+          </a:lnRef>
+          <a:fillRef idx="3">
+            <a:schemeClr val="accent1"/>
+          </a:fillRef>
+          <a:effectRef idx="2">
+            <a:schemeClr val="accent1"/>
+          </a:effectRef>
+          <a:fontRef idx="minor">
+            <a:schemeClr val="lt1"/>
+          </a:fontRef>
+        </p:style>
+        <p:txBody>
+          <a:bodyPr wrap="square" rtlCol="0" anchor="ctr"/>
+          <a:lstStyle/>
+          <a:p>
+            <a:pPr algn="ctr">
+              <a:defRPr sz="1000" b="1">
+                <a:solidFill>
+                  <a:srgbClr val="FFFFFF"/>
+                </a:solidFill>
+                <a:latin typeface="Segoe UI"/>
+              </a:defRPr>
+            </a:pPr>
+            <a:r>
+              <a:t>PII / PHI EXCLUSION</a:t>
+            </a:r>
+          </a:p>
+        </p:txBody>
+      </p:sp>
+      <p:sp>
+        <p:nvSpPr>
+          <p:cNvPr id="12" name="TextBox 11"/>
+          <p:cNvSpPr txBox="1"/>
+          <p:nvPr/>
+        </p:nvSpPr>
+        <p:spPr>
+          <a:xfrm>
+            <a:off x="4572000" y="1600200"/>
+            <a:ext cx="3291840" cy="301752"/>
+          </a:xfrm>
+          <a:prstGeom prst="rect">
+            <a:avLst/>
+          </a:prstGeom>
+          <a:noFill/>
+        </p:spPr>
+        <p:txBody>
+          <a:bodyPr wrap="square">
+            <a:spAutoFit/>
+          </a:bodyPr>
+          <a:lstStyle/>
+          <a:p>
+            <a:pPr algn="l">
+              <a:defRPr sz="1000" b="0">
+                <a:solidFill>
+                  <a:srgbClr val="000000"/>
+                </a:solidFill>
+                <a:latin typeface="Segoe UI"/>
+              </a:defRPr>
+            </a:pPr>
+            <a:r>
+              <a:t>•  No student personal data collected</a:t>
+            </a:r>
+          </a:p>
+        </p:txBody>
+      </p:sp>
+      <p:sp>
+        <p:nvSpPr>
+          <p:cNvPr id="13" name="TextBox 12"/>
+          <p:cNvSpPr txBox="1"/>
+          <p:nvPr/>
+        </p:nvSpPr>
+        <p:spPr>
+          <a:xfrm>
+            <a:off x="4572000" y="1920240"/>
+            <a:ext cx="3291840" cy="301752"/>
+          </a:xfrm>
+          <a:prstGeom prst="rect">
+            <a:avLst/>
+          </a:prstGeom>
+          <a:noFill/>
+        </p:spPr>
+        <p:txBody>
+          <a:bodyPr wrap="square">
+            <a:spAutoFit/>
+          </a:bodyPr>
+          <a:lstStyle/>
+          <a:p>
+            <a:pPr algn="l">
+              <a:defRPr sz="1000" b="0">
+                <a:solidFill>
+                  <a:srgbClr val="000000"/>
+                </a:solidFill>
+                <a:latin typeface="Segoe UI"/>
+              </a:defRPr>
+            </a:pPr>
+            <a:r>
+              <a:t>•  Faculty info is publicly published</a:t>
+            </a:r>
+          </a:p>
+        </p:txBody>
+      </p:sp>
+      <p:sp>
+        <p:nvSpPr>
+          <p:cNvPr id="14" name="TextBox 13"/>
+          <p:cNvSpPr txBox="1"/>
+          <p:nvPr/>
+        </p:nvSpPr>
+        <p:spPr>
+          <a:xfrm>
+            <a:off x="4572000" y="2240280"/>
+            <a:ext cx="3291840" cy="301752"/>
+          </a:xfrm>
+          <a:prstGeom prst="rect">
+            <a:avLst/>
+          </a:prstGeom>
+          <a:noFill/>
+        </p:spPr>
+        <p:txBody>
+          <a:bodyPr wrap="square">
+            <a:spAutoFit/>
+          </a:bodyPr>
+          <a:lstStyle/>
+          <a:p>
+            <a:pPr algn="l">
+              <a:defRPr sz="1000" b="0">
+                <a:solidFill>
+                  <a:srgbClr val="000000"/>
+                </a:solidFill>
+                <a:latin typeface="Segoe UI"/>
+              </a:defRPr>
+            </a:pPr>
+            <a:r>
+              <a:t>•  No login-protected content</a:t>
+            </a:r>
+          </a:p>
+        </p:txBody>
+      </p:sp>
+      <p:sp>
+        <p:nvSpPr>
+          <p:cNvPr id="15" name="TextBox 14"/>
+          <p:cNvSpPr txBox="1"/>
+          <p:nvPr/>
+        </p:nvSpPr>
+        <p:spPr>
+          <a:xfrm>
+            <a:off x="4572000" y="2560320"/>
+            <a:ext cx="3291840" cy="301752"/>
+          </a:xfrm>
+          <a:prstGeom prst="rect">
+            <a:avLst/>
+          </a:prstGeom>
+          <a:noFill/>
+        </p:spPr>
+        <p:txBody>
+          <a:bodyPr wrap="square">
+            <a:spAutoFit/>
+          </a:bodyPr>
+          <a:lstStyle/>
+          <a:p>
+            <a:pPr algn="l">
+              <a:defRPr sz="1000" b="0">
+                <a:solidFill>
+                  <a:srgbClr val="000000"/>
+                </a:solidFill>
+                <a:latin typeface="Segoe UI"/>
+              </a:defRPr>
+            </a:pPr>
+            <a:r>
+              <a:t>•  User queries not stored or logged</a:t>
+            </a:r>
+          </a:p>
+        </p:txBody>
+      </p:sp>
+      <p:sp>
+        <p:nvSpPr>
+          <p:cNvPr id="16" name="TextBox 15"/>
+          <p:cNvSpPr txBox="1"/>
+          <p:nvPr/>
+        </p:nvSpPr>
+        <p:spPr>
+          <a:xfrm>
+            <a:off x="4572000" y="2880360"/>
+            <a:ext cx="3291840" cy="301752"/>
+          </a:xfrm>
+          <a:prstGeom prst="rect">
+            <a:avLst/>
+          </a:prstGeom>
+          <a:noFill/>
+        </p:spPr>
+        <p:txBody>
+          <a:bodyPr wrap="square">
+            <a:spAutoFit/>
+          </a:bodyPr>
+          <a:lstStyle/>
+          <a:p>
+            <a:pPr algn="l">
+              <a:defRPr sz="1000" b="0">
+                <a:solidFill>
+                  <a:srgbClr val="000000"/>
+                </a:solidFill>
+                <a:latin typeface="Segoe UI"/>
+              </a:defRPr>
+            </a:pPr>
+            <a:r>
+              <a:t>•  No health information (PHI) accessed</a:t>
+            </a:r>
+          </a:p>
+        </p:txBody>
+      </p:sp>
+      <p:sp>
+        <p:nvSpPr>
+          <p:cNvPr id="17" name="Rounded Rectangle 16"/>
+          <p:cNvSpPr/>
+          <p:nvPr/>
+        </p:nvSpPr>
+        <p:spPr>
+          <a:xfrm>
+            <a:off x="8138160" y="1097280"/>
+            <a:ext cx="3474720" cy="384048"/>
+          </a:xfrm>
+          <a:prstGeom prst="roundRect">
+            <a:avLst/>
+          </a:prstGeom>
+          <a:solidFill>
+            <a:srgbClr val="1B365D"/>
+          </a:solidFill>
+          <a:ln>
+            <a:noFill/>
+          </a:ln>
+        </p:spPr>
+        <p:style>
+          <a:lnRef idx="1">
+            <a:schemeClr val="accent1"/>
+          </a:lnRef>
+          <a:fillRef idx="3">
+            <a:schemeClr val="accent1"/>
+          </a:fillRef>
+          <a:effectRef idx="2">
+            <a:schemeClr val="accent1"/>
+          </a:effectRef>
+          <a:fontRef idx="minor">
+            <a:schemeClr val="lt1"/>
+          </a:fontRef>
+        </p:style>
+        <p:txBody>
+          <a:bodyPr wrap="square" rtlCol="0" anchor="ctr"/>
+          <a:lstStyle/>
+          <a:p>
+            <a:pPr algn="ctr">
+              <a:defRPr sz="1000" b="1">
+                <a:solidFill>
+                  <a:srgbClr val="FFFFFF"/>
+                </a:solidFill>
+                <a:latin typeface="Segoe UI"/>
+              </a:defRPr>
+            </a:pPr>
+            <a:r>
+              <a:t>AI SAFETY GUARDRAILS</a:t>
+            </a:r>
           </a:p>
         </p:txBody>
       </p:sp>
@@ -7939,66 +12731,642 @@
         </p:nvSpPr>
         <p:spPr>
           <a:xfrm>
+            <a:off x="8321040" y="1600200"/>
+            <a:ext cx="3291840" cy="301752"/>
+          </a:xfrm>
+          <a:prstGeom prst="rect">
+            <a:avLst/>
+          </a:prstGeom>
+          <a:noFill/>
+        </p:spPr>
+        <p:txBody>
+          <a:bodyPr wrap="square">
+            <a:spAutoFit/>
+          </a:bodyPr>
+          <a:lstStyle/>
+          <a:p>
+            <a:pPr algn="l">
+              <a:defRPr sz="1000" b="0">
+                <a:solidFill>
+                  <a:srgbClr val="000000"/>
+                </a:solidFill>
+                <a:latin typeface="Segoe UI"/>
+              </a:defRPr>
+            </a:pPr>
+            <a:r>
+              <a:t>•  Only answers from retrieved context</a:t>
+            </a:r>
+          </a:p>
+        </p:txBody>
+      </p:sp>
+      <p:sp>
+        <p:nvSpPr>
+          <p:cNvPr id="19" name="TextBox 18"/>
+          <p:cNvSpPr txBox="1"/>
+          <p:nvPr/>
+        </p:nvSpPr>
+        <p:spPr>
+          <a:xfrm>
+            <a:off x="8321040" y="1920240"/>
+            <a:ext cx="3291840" cy="301752"/>
+          </a:xfrm>
+          <a:prstGeom prst="rect">
+            <a:avLst/>
+          </a:prstGeom>
+          <a:noFill/>
+        </p:spPr>
+        <p:txBody>
+          <a:bodyPr wrap="square">
+            <a:spAutoFit/>
+          </a:bodyPr>
+          <a:lstStyle/>
+          <a:p>
+            <a:pPr algn="l">
+              <a:defRPr sz="1000" b="0">
+                <a:solidFill>
+                  <a:srgbClr val="000000"/>
+                </a:solidFill>
+                <a:latin typeface="Segoe UI"/>
+              </a:defRPr>
+            </a:pPr>
+            <a:r>
+              <a:t>•  Relevance threshold for refusal</a:t>
+            </a:r>
+          </a:p>
+        </p:txBody>
+      </p:sp>
+      <p:sp>
+        <p:nvSpPr>
+          <p:cNvPr id="20" name="TextBox 19"/>
+          <p:cNvSpPr txBox="1"/>
+          <p:nvPr/>
+        </p:nvSpPr>
+        <p:spPr>
+          <a:xfrm>
+            <a:off x="8321040" y="2240280"/>
+            <a:ext cx="3291840" cy="301752"/>
+          </a:xfrm>
+          <a:prstGeom prst="rect">
+            <a:avLst/>
+          </a:prstGeom>
+          <a:noFill/>
+        </p:spPr>
+        <p:txBody>
+          <a:bodyPr wrap="square">
+            <a:spAutoFit/>
+          </a:bodyPr>
+          <a:lstStyle/>
+          <a:p>
+            <a:pPr algn="l">
+              <a:defRPr sz="1000" b="0">
+                <a:solidFill>
+                  <a:srgbClr val="000000"/>
+                </a:solidFill>
+                <a:latin typeface="Segoe UI"/>
+              </a:defRPr>
+            </a:pPr>
+            <a:r>
+              <a:t>•  No hallucinated information</a:t>
+            </a:r>
+          </a:p>
+        </p:txBody>
+      </p:sp>
+      <p:sp>
+        <p:nvSpPr>
+          <p:cNvPr id="21" name="TextBox 20"/>
+          <p:cNvSpPr txBox="1"/>
+          <p:nvPr/>
+        </p:nvSpPr>
+        <p:spPr>
+          <a:xfrm>
+            <a:off x="8321040" y="2560320"/>
+            <a:ext cx="3291840" cy="301752"/>
+          </a:xfrm>
+          <a:prstGeom prst="rect">
+            <a:avLst/>
+          </a:prstGeom>
+          <a:noFill/>
+        </p:spPr>
+        <p:txBody>
+          <a:bodyPr wrap="square">
+            <a:spAutoFit/>
+          </a:bodyPr>
+          <a:lstStyle/>
+          <a:p>
+            <a:pPr algn="l">
+              <a:defRPr sz="1000" b="0">
+                <a:solidFill>
+                  <a:srgbClr val="000000"/>
+                </a:solidFill>
+                <a:latin typeface="Segoe UI"/>
+              </a:defRPr>
+            </a:pPr>
+            <a:r>
+              <a:t>•  Source URLs cited in every answer</a:t>
+            </a:r>
+          </a:p>
+        </p:txBody>
+      </p:sp>
+      <p:sp>
+        <p:nvSpPr>
+          <p:cNvPr id="22" name="TextBox 21"/>
+          <p:cNvSpPr txBox="1"/>
+          <p:nvPr/>
+        </p:nvSpPr>
+        <p:spPr>
+          <a:xfrm>
+            <a:off x="8321040" y="2880360"/>
+            <a:ext cx="3291840" cy="301752"/>
+          </a:xfrm>
+          <a:prstGeom prst="rect">
+            <a:avLst/>
+          </a:prstGeom>
+          <a:noFill/>
+        </p:spPr>
+        <p:txBody>
+          <a:bodyPr wrap="square">
+            <a:spAutoFit/>
+          </a:bodyPr>
+          <a:lstStyle/>
+          <a:p>
+            <a:pPr algn="l">
+              <a:defRPr sz="1000" b="0">
+                <a:solidFill>
+                  <a:srgbClr val="000000"/>
+                </a:solidFill>
+                <a:latin typeface="Segoe UI"/>
+              </a:defRPr>
+            </a:pPr>
+            <a:r>
+              <a:t>•  100% faithfulness in evaluation</a:t>
+            </a:r>
+          </a:p>
+        </p:txBody>
+      </p:sp>
+      <p:sp>
+        <p:nvSpPr>
+          <p:cNvPr id="23" name="TextBox 22"/>
+          <p:cNvSpPr txBox="1"/>
+          <p:nvPr/>
+        </p:nvSpPr>
+        <p:spPr>
+          <a:xfrm>
+            <a:off x="640080" y="3383280"/>
+            <a:ext cx="4572000" cy="274320"/>
+          </a:xfrm>
+          <a:prstGeom prst="rect">
+            <a:avLst/>
+          </a:prstGeom>
+          <a:noFill/>
+        </p:spPr>
+        <p:txBody>
+          <a:bodyPr wrap="square">
+            <a:spAutoFit/>
+          </a:bodyPr>
+          <a:lstStyle/>
+          <a:p>
+            <a:pPr algn="l">
+              <a:defRPr sz="1000" b="1">
+                <a:solidFill>
+                  <a:srgbClr val="C8102E"/>
+                </a:solidFill>
+                <a:latin typeface="Segoe UI"/>
+              </a:defRPr>
+            </a:pPr>
+            <a:r>
+              <a:t>ETHICAL RISKS &amp; MITIGATIONS</a:t>
+            </a:r>
+          </a:p>
+        </p:txBody>
+      </p:sp>
+      <p:sp>
+        <p:nvSpPr>
+          <p:cNvPr id="24" name="TextBox 23"/>
+          <p:cNvSpPr txBox="1"/>
+          <p:nvPr/>
+        </p:nvSpPr>
+        <p:spPr>
+          <a:xfrm>
+            <a:off x="640080" y="3657600"/>
+            <a:ext cx="2926080" cy="256032"/>
+          </a:xfrm>
+          <a:prstGeom prst="rect">
+            <a:avLst/>
+          </a:prstGeom>
+          <a:noFill/>
+        </p:spPr>
+        <p:txBody>
+          <a:bodyPr wrap="square">
+            <a:spAutoFit/>
+          </a:bodyPr>
+          <a:lstStyle/>
+          <a:p>
+            <a:pPr algn="l">
+              <a:defRPr sz="900" b="1">
+                <a:solidFill>
+                  <a:srgbClr val="1B365D"/>
+                </a:solidFill>
+                <a:latin typeface="Segoe UI"/>
+              </a:defRPr>
+            </a:pPr>
+            <a:r>
+              <a:t>Risk</a:t>
+            </a:r>
+          </a:p>
+        </p:txBody>
+      </p:sp>
+      <p:sp>
+        <p:nvSpPr>
+          <p:cNvPr id="25" name="TextBox 24"/>
+          <p:cNvSpPr txBox="1"/>
+          <p:nvPr/>
+        </p:nvSpPr>
+        <p:spPr>
+          <a:xfrm>
+            <a:off x="3657600" y="3657600"/>
+            <a:ext cx="8229600" cy="256032"/>
+          </a:xfrm>
+          <a:prstGeom prst="rect">
+            <a:avLst/>
+          </a:prstGeom>
+          <a:noFill/>
+        </p:spPr>
+        <p:txBody>
+          <a:bodyPr wrap="square">
+            <a:spAutoFit/>
+          </a:bodyPr>
+          <a:lstStyle/>
+          <a:p>
+            <a:pPr algn="l">
+              <a:defRPr sz="900" b="1">
+                <a:solidFill>
+                  <a:srgbClr val="1B365D"/>
+                </a:solidFill>
+                <a:latin typeface="Segoe UI"/>
+              </a:defRPr>
+            </a:pPr>
+            <a:r>
+              <a:t>Mitigation Strategy</a:t>
+            </a:r>
+          </a:p>
+        </p:txBody>
+      </p:sp>
+      <p:sp>
+        <p:nvSpPr>
+          <p:cNvPr id="26" name="TextBox 25"/>
+          <p:cNvSpPr txBox="1"/>
+          <p:nvPr/>
+        </p:nvSpPr>
+        <p:spPr>
+          <a:xfrm>
+            <a:off x="640080" y="3931920"/>
+            <a:ext cx="2926080" cy="256032"/>
+          </a:xfrm>
+          <a:prstGeom prst="rect">
+            <a:avLst/>
+          </a:prstGeom>
+          <a:noFill/>
+        </p:spPr>
+        <p:txBody>
+          <a:bodyPr wrap="square">
+            <a:spAutoFit/>
+          </a:bodyPr>
+          <a:lstStyle/>
+          <a:p>
+            <a:pPr algn="l">
+              <a:defRPr sz="900" b="0">
+                <a:solidFill>
+                  <a:srgbClr val="000000"/>
+                </a:solidFill>
+                <a:latin typeface="Segoe UI"/>
+              </a:defRPr>
+            </a:pPr>
+            <a:r>
+              <a:t>Outdated information</a:t>
+            </a:r>
+          </a:p>
+        </p:txBody>
+      </p:sp>
+      <p:sp>
+        <p:nvSpPr>
+          <p:cNvPr id="27" name="TextBox 26"/>
+          <p:cNvSpPr txBox="1"/>
+          <p:nvPr/>
+        </p:nvSpPr>
+        <p:spPr>
+          <a:xfrm>
+            <a:off x="3657600" y="3931920"/>
+            <a:ext cx="8229600" cy="256032"/>
+          </a:xfrm>
+          <a:prstGeom prst="rect">
+            <a:avLst/>
+          </a:prstGeom>
+          <a:noFill/>
+        </p:spPr>
+        <p:txBody>
+          <a:bodyPr wrap="square">
+            <a:spAutoFit/>
+          </a:bodyPr>
+          <a:lstStyle/>
+          <a:p>
+            <a:pPr algn="l">
+              <a:defRPr sz="900" b="0">
+                <a:solidFill>
+                  <a:srgbClr val="000000"/>
+                </a:solidFill>
+                <a:latin typeface="Segoe UI"/>
+              </a:defRPr>
+            </a:pPr>
+            <a:r>
+              <a:t>Timestamps; disclaimers; scheduled re-scraping pipeline</a:t>
+            </a:r>
+          </a:p>
+        </p:txBody>
+      </p:sp>
+      <p:sp>
+        <p:nvSpPr>
+          <p:cNvPr id="28" name="TextBox 27"/>
+          <p:cNvSpPr txBox="1"/>
+          <p:nvPr/>
+        </p:nvSpPr>
+        <p:spPr>
+          <a:xfrm>
+            <a:off x="640080" y="4206240"/>
+            <a:ext cx="2926080" cy="256032"/>
+          </a:xfrm>
+          <a:prstGeom prst="rect">
+            <a:avLst/>
+          </a:prstGeom>
+          <a:noFill/>
+        </p:spPr>
+        <p:txBody>
+          <a:bodyPr wrap="square">
+            <a:spAutoFit/>
+          </a:bodyPr>
+          <a:lstStyle/>
+          <a:p>
+            <a:pPr algn="l">
+              <a:defRPr sz="900" b="0">
+                <a:solidFill>
+                  <a:srgbClr val="000000"/>
+                </a:solidFill>
+                <a:latin typeface="Segoe UI"/>
+              </a:defRPr>
+            </a:pPr>
+            <a:r>
+              <a:t>Incorrect academic advice</a:t>
+            </a:r>
+          </a:p>
+        </p:txBody>
+      </p:sp>
+      <p:sp>
+        <p:nvSpPr>
+          <p:cNvPr id="29" name="TextBox 28"/>
+          <p:cNvSpPr txBox="1"/>
+          <p:nvPr/>
+        </p:nvSpPr>
+        <p:spPr>
+          <a:xfrm>
+            <a:off x="3657600" y="4206240"/>
+            <a:ext cx="8229600" cy="256032"/>
+          </a:xfrm>
+          <a:prstGeom prst="rect">
+            <a:avLst/>
+          </a:prstGeom>
+          <a:noFill/>
+        </p:spPr>
+        <p:txBody>
+          <a:bodyPr wrap="square">
+            <a:spAutoFit/>
+          </a:bodyPr>
+          <a:lstStyle/>
+          <a:p>
+            <a:pPr algn="l">
+              <a:defRPr sz="900" b="0">
+                <a:solidFill>
+                  <a:srgbClr val="000000"/>
+                </a:solidFill>
+                <a:latin typeface="Segoe UI"/>
+              </a:defRPr>
+            </a:pPr>
+            <a:r>
+              <a:t>Refusal on low confidence; links to official pages; no guarantees</a:t>
+            </a:r>
+          </a:p>
+        </p:txBody>
+      </p:sp>
+      <p:sp>
+        <p:nvSpPr>
+          <p:cNvPr id="30" name="TextBox 29"/>
+          <p:cNvSpPr txBox="1"/>
+          <p:nvPr/>
+        </p:nvSpPr>
+        <p:spPr>
+          <a:xfrm>
             <a:off x="640080" y="4480560"/>
-            <a:ext cx="10972800" cy="457200"/>
-          </a:xfrm>
-          <a:prstGeom prst="rect">
-            <a:avLst/>
-          </a:prstGeom>
-          <a:noFill/>
-        </p:spPr>
-        <p:txBody>
-          <a:bodyPr wrap="square">
-            <a:spAutoFit/>
-          </a:bodyPr>
-          <a:lstStyle/>
-          <a:p>
-            <a:pPr algn="ctr">
-              <a:defRPr sz="1400" b="1">
-                <a:solidFill>
-                  <a:srgbClr val="1B365D"/>
-                </a:solidFill>
-                <a:latin typeface="Segoe UI"/>
-              </a:defRPr>
-            </a:pPr>
-            <a:r>
-              <a:t>GitHub: github.com/rmakala38838/uc-rag-chatbot</a:t>
-            </a:r>
-          </a:p>
-        </p:txBody>
-      </p:sp>
-      <p:sp>
-        <p:nvSpPr>
-          <p:cNvPr id="19" name="TextBox 18"/>
+            <a:ext cx="2926080" cy="256032"/>
+          </a:xfrm>
+          <a:prstGeom prst="rect">
+            <a:avLst/>
+          </a:prstGeom>
+          <a:noFill/>
+        </p:spPr>
+        <p:txBody>
+          <a:bodyPr wrap="square">
+            <a:spAutoFit/>
+          </a:bodyPr>
+          <a:lstStyle/>
+          <a:p>
+            <a:pPr algn="l">
+              <a:defRPr sz="900" b="0">
+                <a:solidFill>
+                  <a:srgbClr val="000000"/>
+                </a:solidFill>
+                <a:latin typeface="Segoe UI"/>
+              </a:defRPr>
+            </a:pPr>
+            <a:r>
+              <a:t>Over-reliance on AI</a:t>
+            </a:r>
+          </a:p>
+        </p:txBody>
+      </p:sp>
+      <p:sp>
+        <p:nvSpPr>
+          <p:cNvPr id="31" name="TextBox 30"/>
+          <p:cNvSpPr txBox="1"/>
+          <p:nvPr/>
+        </p:nvSpPr>
+        <p:spPr>
+          <a:xfrm>
+            <a:off x="3657600" y="4480560"/>
+            <a:ext cx="8229600" cy="256032"/>
+          </a:xfrm>
+          <a:prstGeom prst="rect">
+            <a:avLst/>
+          </a:prstGeom>
+          <a:noFill/>
+        </p:spPr>
+        <p:txBody>
+          <a:bodyPr wrap="square">
+            <a:spAutoFit/>
+          </a:bodyPr>
+          <a:lstStyle/>
+          <a:p>
+            <a:pPr algn="l">
+              <a:defRPr sz="900" b="0">
+                <a:solidFill>
+                  <a:srgbClr val="000000"/>
+                </a:solidFill>
+                <a:latin typeface="Segoe UI"/>
+              </a:defRPr>
+            </a:pPr>
+            <a:r>
+              <a:t>Footer disclaimer: 'For official inquiries, contact UC directly'</a:t>
+            </a:r>
+          </a:p>
+        </p:txBody>
+      </p:sp>
+      <p:sp>
+        <p:nvSpPr>
+          <p:cNvPr id="32" name="TextBox 31"/>
+          <p:cNvSpPr txBox="1"/>
+          <p:nvPr/>
+        </p:nvSpPr>
+        <p:spPr>
+          <a:xfrm>
+            <a:off x="640080" y="4754880"/>
+            <a:ext cx="2926080" cy="256032"/>
+          </a:xfrm>
+          <a:prstGeom prst="rect">
+            <a:avLst/>
+          </a:prstGeom>
+          <a:noFill/>
+        </p:spPr>
+        <p:txBody>
+          <a:bodyPr wrap="square">
+            <a:spAutoFit/>
+          </a:bodyPr>
+          <a:lstStyle/>
+          <a:p>
+            <a:pPr algn="l">
+              <a:defRPr sz="900" b="0">
+                <a:solidFill>
+                  <a:srgbClr val="000000"/>
+                </a:solidFill>
+                <a:latin typeface="Segoe UI"/>
+              </a:defRPr>
+            </a:pPr>
+            <a:r>
+              <a:t>Bias in embeddings</a:t>
+            </a:r>
+          </a:p>
+        </p:txBody>
+      </p:sp>
+      <p:sp>
+        <p:nvSpPr>
+          <p:cNvPr id="33" name="TextBox 32"/>
+          <p:cNvSpPr txBox="1"/>
+          <p:nvPr/>
+        </p:nvSpPr>
+        <p:spPr>
+          <a:xfrm>
+            <a:off x="3657600" y="4754880"/>
+            <a:ext cx="8229600" cy="256032"/>
+          </a:xfrm>
+          <a:prstGeom prst="rect">
+            <a:avLst/>
+          </a:prstGeom>
+          <a:noFill/>
+        </p:spPr>
+        <p:txBody>
+          <a:bodyPr wrap="square">
+            <a:spAutoFit/>
+          </a:bodyPr>
+          <a:lstStyle/>
+          <a:p>
+            <a:pPr algn="l">
+              <a:defRPr sz="900" b="0">
+                <a:solidFill>
+                  <a:srgbClr val="000000"/>
+                </a:solidFill>
+                <a:latin typeface="Segoe UI"/>
+              </a:defRPr>
+            </a:pPr>
+            <a:r>
+              <a:t>Open-source BGE model; tested across 7 categories for fairness</a:t>
+            </a:r>
+          </a:p>
+        </p:txBody>
+      </p:sp>
+      <p:sp>
+        <p:nvSpPr>
+          <p:cNvPr id="34" name="TextBox 33"/>
           <p:cNvSpPr txBox="1"/>
           <p:nvPr/>
         </p:nvSpPr>
         <p:spPr>
           <a:xfrm>
             <a:off x="640080" y="5029200"/>
-            <a:ext cx="10972800" cy="457200"/>
-          </a:xfrm>
-          <a:prstGeom prst="rect">
-            <a:avLst/>
-          </a:prstGeom>
-          <a:noFill/>
-        </p:spPr>
-        <p:txBody>
-          <a:bodyPr wrap="square">
-            <a:spAutoFit/>
-          </a:bodyPr>
-          <a:lstStyle/>
-          <a:p>
-            <a:pPr algn="ctr">
-              <a:defRPr sz="2200" b="1">
-                <a:solidFill>
-                  <a:srgbClr val="C8102E"/>
-                </a:solidFill>
-                <a:latin typeface="Segoe UI"/>
-              </a:defRPr>
-            </a:pPr>
-            <a:r>
-              <a:t>Thank You  —  Questions &amp; Live Demo</a:t>
+            <a:ext cx="2926080" cy="256032"/>
+          </a:xfrm>
+          <a:prstGeom prst="rect">
+            <a:avLst/>
+          </a:prstGeom>
+          <a:noFill/>
+        </p:spPr>
+        <p:txBody>
+          <a:bodyPr wrap="square">
+            <a:spAutoFit/>
+          </a:bodyPr>
+          <a:lstStyle/>
+          <a:p>
+            <a:pPr algn="l">
+              <a:defRPr sz="900" b="0">
+                <a:solidFill>
+                  <a:srgbClr val="000000"/>
+                </a:solidFill>
+                <a:latin typeface="Segoe UI"/>
+              </a:defRPr>
+            </a:pPr>
+            <a:r>
+              <a:t>Privacy of user queries</a:t>
+            </a:r>
+          </a:p>
+        </p:txBody>
+      </p:sp>
+      <p:sp>
+        <p:nvSpPr>
+          <p:cNvPr id="35" name="TextBox 34"/>
+          <p:cNvSpPr txBox="1"/>
+          <p:nvPr/>
+        </p:nvSpPr>
+        <p:spPr>
+          <a:xfrm>
+            <a:off x="3657600" y="5029200"/>
+            <a:ext cx="8229600" cy="256032"/>
+          </a:xfrm>
+          <a:prstGeom prst="rect">
+            <a:avLst/>
+          </a:prstGeom>
+          <a:noFill/>
+        </p:spPr>
+        <p:txBody>
+          <a:bodyPr wrap="square">
+            <a:spAutoFit/>
+          </a:bodyPr>
+          <a:lstStyle/>
+          <a:p>
+            <a:pPr algn="l">
+              <a:defRPr sz="900" b="0">
+                <a:solidFill>
+                  <a:srgbClr val="000000"/>
+                </a:solidFill>
+                <a:latin typeface="Segoe UI"/>
+              </a:defRPr>
+            </a:pPr>
+            <a:r>
+              <a:t>No query logging; session-only history; no PII stored</a:t>
             </a:r>
           </a:p>
         </p:txBody>
